--- a/system-design-101/vi/lessons/sd-10-020/slides/sd-10-020.pptx
+++ b/system-design-101/vi/lessons/sd-10-020/slides/sd-10-020.pptx
@@ -4045,7 +4045,7 @@
               <a:buNone/>
             </a:pPr>
             <a:r>
-              <a:rPr lang="en-US" sz="1800" dirty="0" spc="-3" kern="0">
+              <a:rPr lang="en-US" sz="1800" dirty="0" spc="0" kern="0">
                 <a:solidFill>
                   <a:srgbClr val="9AA0B5"/>
                 </a:solidFill>
@@ -4053,10 +4053,10 @@
                 <a:ea typeface="Be Vietnam Pro" pitchFamily="34" charset="-122"/>
                 <a:cs typeface="Be Vietnam Pro" pitchFamily="34" charset="-120"/>
               </a:rPr>
-              <a:t>bài</a:t>
-            </a:r>
-            <a:r>
-              <a:rPr lang="en-US" sz="1800" dirty="0" spc="-4" kern="0">
+              <a:t>chỉ</a:t>
+            </a:r>
+            <a:r>
+              <a:rPr lang="en-US" sz="1800" dirty="0" spc="-7" kern="0">
                 <a:solidFill>
                   <a:srgbClr val="9AA0B5"/>
                 </a:solidFill>
@@ -4064,7 +4064,18 @@
                 <a:ea typeface="Be Vietnam Pro" pitchFamily="34" charset="-122"/>
                 <a:cs typeface="Be Vietnam Pro" pitchFamily="34" charset="-120"/>
               </a:rPr>
-              <a:t> nguồn,</a:t>
+              <a:t> lấy</a:t>
+            </a:r>
+            <a:r>
+              <a:rPr lang="en-US" sz="1800" dirty="0" spc="-13" kern="0">
+                <a:solidFill>
+                  <a:srgbClr val="9AA0B5"/>
+                </a:solidFill>
+                <a:latin typeface="Be Vietnam Pro" pitchFamily="34" charset="0"/>
+                <a:ea typeface="Be Vietnam Pro" pitchFamily="34" charset="-122"/>
+                <a:cs typeface="Be Vietnam Pro" pitchFamily="34" charset="-120"/>
+              </a:rPr>
+              <a:t> tên</a:t>
             </a:r>
             <a:r>
               <a:rPr lang="en-US" sz="1800" dirty="0" spc="-11" kern="0">
@@ -4078,6 +4089,17 @@
               <a:t> tám</a:t>
             </a:r>
             <a:r>
+              <a:rPr lang="en-US" sz="1800" dirty="0" spc="-1" kern="0">
+                <a:solidFill>
+                  <a:srgbClr val="9AA0B5"/>
+                </a:solidFill>
+                <a:latin typeface="Be Vietnam Pro" pitchFamily="34" charset="0"/>
+                <a:ea typeface="Be Vietnam Pro" pitchFamily="34" charset="-122"/>
+                <a:cs typeface="Be Vietnam Pro" pitchFamily="34" charset="-120"/>
+              </a:rPr>
+              <a:t> mô</a:t>
+            </a:r>
+            <a:r>
               <a:rPr lang="en-US" sz="1800" dirty="0" spc="-2" kern="0">
                 <a:solidFill>
                   <a:srgbClr val="9AA0B5"/>
@@ -4086,7 +4108,7 @@
                 <a:ea typeface="Be Vietnam Pro" pitchFamily="34" charset="-122"/>
                 <a:cs typeface="Be Vietnam Pro" pitchFamily="34" charset="-120"/>
               </a:rPr>
-              <a:t> mô hình</a:t>
+              <a:t> hình</a:t>
             </a:r>
             <a:endParaRPr lang="en-US" sz="1800" dirty="0"/>
           </a:p>
@@ -4546,7 +4568,29 @@
                 <a:ea typeface="Be Vietnam Pro" pitchFamily="34" charset="-122"/>
                 <a:cs typeface="Be Vietnam Pro" pitchFamily="34" charset="-120"/>
               </a:rPr>
-              <a:t> 2026-10-18.</a:t>
+              <a:t> 2026-10-19.</a:t>
+            </a:r>
+            <a:r>
+              <a:rPr lang="en-US" sz="1950" dirty="0" spc="-4" kern="0">
+                <a:solidFill>
+                  <a:srgbClr val="C4C8D6"/>
+                </a:solidFill>
+                <a:latin typeface="Be Vietnam Pro" pitchFamily="34" charset="0"/>
+                <a:ea typeface="Be Vietnam Pro" pitchFamily="34" charset="-122"/>
+                <a:cs typeface="Be Vietnam Pro" pitchFamily="34" charset="-120"/>
+              </a:rPr>
+              <a:t> Đọc</a:t>
+            </a:r>
+            <a:r>
+              <a:rPr lang="en-US" sz="1950" dirty="0" spc="-1" kern="0">
+                <a:solidFill>
+                  <a:srgbClr val="C4C8D6"/>
+                </a:solidFill>
+                <a:latin typeface="Be Vietnam Pro" pitchFamily="34" charset="0"/>
+                <a:ea typeface="Be Vietnam Pro" pitchFamily="34" charset="-122"/>
+                <a:cs typeface="Be Vietnam Pro" pitchFamily="34" charset="-120"/>
+              </a:rPr>
+              <a:t> thêm:</a:t>
             </a:r>
             <a:r>
               <a:rPr lang="en-US" sz="1950" dirty="0" spc="0" kern="0">
@@ -4557,10 +4601,10 @@
                 <a:ea typeface="Be Vietnam Pro" pitchFamily="34" charset="-122"/>
                 <a:cs typeface="Be Vietnam Pro" pitchFamily="34" charset="-120"/>
               </a:rPr>
-              <a:t> Hình</a:t>
-            </a:r>
-            <a:r>
-              <a:rPr lang="en-US" sz="1950" dirty="0" spc="2" kern="0">
+              <a:t> MDN,</a:t>
+            </a:r>
+            <a:r>
+              <a:rPr lang="en-US" sz="1950" dirty="0" spc="7" kern="0">
                 <a:solidFill>
                   <a:srgbClr val="C4C8D6"/>
                 </a:solidFill>
@@ -4568,7 +4612,18 @@
                 <a:ea typeface="Be Vietnam Pro" pitchFamily="34" charset="-122"/>
                 <a:cs typeface="Be Vietnam Pro" pitchFamily="34" charset="-120"/>
               </a:rPr>
-              <a:t> minh</a:t>
+              <a:t> Spring</a:t>
+            </a:r>
+            <a:r>
+              <a:rPr lang="en-US" sz="1950" dirty="0" spc="-15" kern="0">
+                <a:solidFill>
+                  <a:srgbClr val="C4C8D6"/>
+                </a:solidFill>
+                <a:latin typeface="Be Vietnam Pro" pitchFamily="34" charset="0"/>
+                <a:ea typeface="Be Vietnam Pro" pitchFamily="34" charset="-122"/>
+                <a:cs typeface="Be Vietnam Pro" pitchFamily="34" charset="-120"/>
+              </a:rPr>
+              <a:t> AOP,</a:t>
             </a:r>
             <a:r>
               <a:rPr lang="en-US" sz="1950" dirty="0" spc="-3" kern="0">
@@ -4579,10 +4634,10 @@
                 <a:ea typeface="Be Vietnam Pro" pitchFamily="34" charset="-122"/>
                 <a:cs typeface="Be Vietnam Pro" pitchFamily="34" charset="-120"/>
               </a:rPr>
-              <a:t> họa</a:t>
-            </a:r>
-            <a:r>
-              <a:rPr lang="en-US" sz="1950" dirty="0" spc="-2" kern="0">
+              <a:t> AspectJ,</a:t>
+            </a:r>
+            <a:r>
+              <a:rPr lang="en-US" sz="1950" dirty="0" spc="-16" kern="0">
                 <a:solidFill>
                   <a:srgbClr val="C4C8D6"/>
                 </a:solidFill>
@@ -4590,10 +4645,10 @@
                 <a:ea typeface="Be Vietnam Pro" pitchFamily="34" charset="-122"/>
                 <a:cs typeface="Be Vietnam Pro" pitchFamily="34" charset="-120"/>
               </a:rPr>
-              <a:t> là</a:t>
-            </a:r>
-            <a:r>
-              <a:rPr lang="en-US" sz="1950" dirty="0" spc="-4" kern="0">
+              <a:t> Reactive</a:t>
+            </a:r>
+            <a:r>
+              <a:rPr lang="en-US" sz="1950" dirty="0" spc="-8" kern="0">
                 <a:solidFill>
                   <a:srgbClr val="C4C8D6"/>
                 </a:solidFill>
@@ -4601,29 +4656,7 @@
                 <a:ea typeface="Be Vietnam Pro" pitchFamily="34" charset="-122"/>
                 <a:cs typeface="Be Vietnam Pro" pitchFamily="34" charset="-120"/>
               </a:rPr>
-              <a:t> thiết</a:t>
-            </a:r>
-            <a:r>
-              <a:rPr lang="en-US" sz="1950" dirty="0" spc="-32" kern="0">
-                <a:solidFill>
-                  <a:srgbClr val="C4C8D6"/>
-                </a:solidFill>
-                <a:latin typeface="Be Vietnam Pro" pitchFamily="34" charset="0"/>
-                <a:ea typeface="Be Vietnam Pro" pitchFamily="34" charset="-122"/>
-                <a:cs typeface="Be Vietnam Pro" pitchFamily="34" charset="-120"/>
-              </a:rPr>
-              <a:t> kế</a:t>
-            </a:r>
-            <a:r>
-              <a:rPr lang="en-US" sz="1950" dirty="0" spc="-1" kern="0">
-                <a:solidFill>
-                  <a:srgbClr val="C4C8D6"/>
-                </a:solidFill>
-                <a:latin typeface="Be Vietnam Pro" pitchFamily="34" charset="0"/>
-                <a:ea typeface="Be Vietnam Pro" pitchFamily="34" charset="-122"/>
-                <a:cs typeface="Be Vietnam Pro" pitchFamily="34" charset="-120"/>
-              </a:rPr>
-              <a:t> mới.</a:t>
+              <a:t> Streams.</a:t>
             </a:r>
             <a:endParaRPr lang="en-US" sz="1950" dirty="0"/>
           </a:p>
@@ -5059,39 +5092,6 @@
               <a:buNone/>
             </a:pPr>
             <a:r>
-              <a:rPr lang="en-US" sz="2100" dirty="0" spc="2" kern="0">
-                <a:solidFill>
-                  <a:srgbClr val="F3EEE3"/>
-                </a:solidFill>
-                <a:latin typeface="Be Vietnam Pro" pitchFamily="34" charset="0"/>
-                <a:ea typeface="Be Vietnam Pro" pitchFamily="34" charset="-122"/>
-                <a:cs typeface="Be Vietnam Pro" pitchFamily="34" charset="-120"/>
-              </a:rPr>
-              <a:t>tính</a:t>
-            </a:r>
-            <a:r>
-              <a:rPr lang="en-US" sz="2100" dirty="0" spc="-12" kern="0">
-                <a:solidFill>
-                  <a:srgbClr val="F3EEE3"/>
-                </a:solidFill>
-                <a:latin typeface="Be Vietnam Pro" pitchFamily="34" charset="0"/>
-                <a:ea typeface="Be Vietnam Pro" pitchFamily="34" charset="-122"/>
-                <a:cs typeface="Be Vietnam Pro" pitchFamily="34" charset="-120"/>
-              </a:rPr>
-              <a:t> toán</a:t>
-            </a:r>
-            <a:r>
-              <a:rPr lang="en-US" sz="2100" dirty="0" spc="-4" kern="0">
-                <a:solidFill>
-                  <a:srgbClr val="F3EEE3"/>
-                </a:solidFill>
-                <a:latin typeface="Be Vietnam Pro" pitchFamily="34" charset="0"/>
-                <a:ea typeface="Be Vietnam Pro" pitchFamily="34" charset="-122"/>
-                <a:cs typeface="Be Vietnam Pro" pitchFamily="34" charset="-120"/>
-              </a:rPr>
-              <a:t> là</a:t>
-            </a:r>
-            <a:r>
               <a:rPr lang="en-US" sz="2100" dirty="0" spc="0" kern="0">
                 <a:solidFill>
                   <a:srgbClr val="F3EEE3"/>
@@ -5100,7 +5100,18 @@
                 <a:ea typeface="Be Vietnam Pro" pitchFamily="34" charset="-122"/>
                 <a:cs typeface="Be Vietnam Pro" pitchFamily="34" charset="-120"/>
               </a:rPr>
-              <a:t> tính</a:t>
+              <a:t>chia</a:t>
+            </a:r>
+            <a:r>
+              <a:rPr lang="en-US" sz="2100" dirty="0" spc="-2" kern="0">
+                <a:solidFill>
+                  <a:srgbClr val="F3EEE3"/>
+                </a:solidFill>
+                <a:latin typeface="Be Vietnam Pro" pitchFamily="34" charset="0"/>
+                <a:ea typeface="Be Vietnam Pro" pitchFamily="34" charset="-122"/>
+                <a:cs typeface="Be Vietnam Pro" pitchFamily="34" charset="-120"/>
+              </a:rPr>
+              <a:t> việc</a:t>
             </a:r>
             <a:r>
               <a:rPr lang="en-US" sz="2100" dirty="0" spc="-1" kern="0">
@@ -5111,18 +5122,7 @@
                 <a:ea typeface="Be Vietnam Pro" pitchFamily="34" charset="-122"/>
                 <a:cs typeface="Be Vietnam Pro" pitchFamily="34" charset="-120"/>
               </a:rPr>
-              <a:t> giá</a:t>
-            </a:r>
-            <a:r>
-              <a:rPr lang="en-US" sz="2100" dirty="0" spc="10" kern="0">
-                <a:solidFill>
-                  <a:srgbClr val="F3EEE3"/>
-                </a:solidFill>
-                <a:latin typeface="Be Vietnam Pro" pitchFamily="34" charset="0"/>
-                <a:ea typeface="Be Vietnam Pro" pitchFamily="34" charset="-122"/>
-                <a:cs typeface="Be Vietnam Pro" pitchFamily="34" charset="-120"/>
-              </a:rPr>
-              <a:t> trị</a:t>
+              <a:t> thành</a:t>
             </a:r>
             <a:r>
               <a:rPr lang="en-US" sz="2100" dirty="0" spc="-2" kern="0">
@@ -7309,7 +7309,7 @@
               <a:t>Giữ</a:t>
             </a:r>
             <a:r>
-              <a:rPr lang="en-US" sz="2550" dirty="0" spc="21" kern="0">
+              <a:rPr lang="en-US" sz="2550" dirty="0" spc="-11" kern="0">
                 <a:solidFill>
                   <a:srgbClr val="14161C"/>
                 </a:solidFill>
@@ -7317,7 +7317,7 @@
                 <a:ea typeface="Be Vietnam Pro" pitchFamily="34" charset="-122"/>
                 <a:cs typeface="Be Vietnam Pro" pitchFamily="34" charset="-120"/>
               </a:rPr>
-              <a:t> định</a:t>
+              <a:t> tên tám</a:t>
             </a:r>
             <a:r>
               <a:rPr lang="en-US" sz="2550" dirty="0" spc="0" kern="0">
@@ -7328,7 +7328,7 @@
                 <a:ea typeface="Be Vietnam Pro" pitchFamily="34" charset="-122"/>
                 <a:cs typeface="Be Vietnam Pro" pitchFamily="34" charset="-120"/>
               </a:rPr>
-              <a:t> nghĩa</a:t>
+              <a:t> mô hình</a:t>
             </a:r>
             <a:r>
               <a:rPr lang="en-US" sz="2550" dirty="0" spc="-1" kern="0">
@@ -7342,7 +7342,7 @@
               <a:t> của</a:t>
             </a:r>
             <a:r>
-              <a:rPr lang="en-US" sz="2550" dirty="0" spc="1" kern="0">
+              <a:rPr lang="en-US" sz="2550" dirty="0" spc="0" kern="0">
                 <a:solidFill>
                   <a:srgbClr val="14161C"/>
                 </a:solidFill>
@@ -7351,50 +7351,6 @@
                 <a:cs typeface="Be Vietnam Pro" pitchFamily="34" charset="-120"/>
               </a:rPr>
               <a:t> nguồn</a:t>
-            </a:r>
-            <a:r>
-              <a:rPr lang="en-US" sz="2550" dirty="0" spc="-1" kern="0">
-                <a:solidFill>
-                  <a:srgbClr val="14161C"/>
-                </a:solidFill>
-                <a:latin typeface="Be Vietnam Pro" pitchFamily="34" charset="0"/>
-                <a:ea typeface="Be Vietnam Pro" pitchFamily="34" charset="-122"/>
-                <a:cs typeface="Be Vietnam Pro" pitchFamily="34" charset="-120"/>
-              </a:rPr>
-              <a:t> cho</a:t>
-            </a:r>
-            <a:r>
-              <a:rPr lang="en-US" sz="2550" dirty="0" spc="-11" kern="0">
-                <a:solidFill>
-                  <a:srgbClr val="14161C"/>
-                </a:solidFill>
-                <a:latin typeface="Be Vietnam Pro" pitchFamily="34" charset="0"/>
-                <a:ea typeface="Be Vietnam Pro" pitchFamily="34" charset="-122"/>
-                <a:cs typeface="Be Vietnam Pro" pitchFamily="34" charset="-120"/>
-              </a:rPr>
-              <a:t> tám</a:t>
-            </a:r>
-            <a:r>
-              <a:rPr lang="en-US" sz="2550" dirty="0" spc="1" kern="0">
-                <a:solidFill>
-                  <a:srgbClr val="14161C"/>
-                </a:solidFill>
-                <a:latin typeface="Be Vietnam Pro" pitchFamily="34" charset="0"/>
-                <a:ea typeface="Be Vietnam Pro" pitchFamily="34" charset="-122"/>
-                <a:cs typeface="Be Vietnam Pro" pitchFamily="34" charset="-120"/>
-              </a:rPr>
-              <a:t> mô</a:t>
-            </a:r>
-            <a:r>
-              <a:rPr lang="en-US" sz="2550" dirty="0" spc="0" kern="0">
-                <a:solidFill>
-                  <a:srgbClr val="14161C"/>
-                </a:solidFill>
-                <a:latin typeface="Be Vietnam Pro" pitchFamily="34" charset="0"/>
-                <a:ea typeface="Be Vietnam Pro" pitchFamily="34" charset="-122"/>
-                <a:cs typeface="Be Vietnam Pro" pitchFamily="34" charset="-120"/>
-              </a:rPr>
-              <a:t> hình</a:t>
             </a:r>
             <a:endParaRPr lang="en-US" sz="2550" dirty="0"/>
           </a:p>
@@ -7537,7 +7493,7 @@
               <a:t> chiếu</a:t>
             </a:r>
             <a:r>
-              <a:rPr lang="en-US" sz="2550" dirty="0" spc="-3" kern="0">
+              <a:rPr lang="en-US" sz="2550" dirty="0" spc="-15" kern="0">
                 <a:solidFill>
                   <a:srgbClr val="14161C"/>
                 </a:solidFill>
@@ -7545,10 +7501,10 @@
                 <a:ea typeface="Be Vietnam Pro" pitchFamily="34" charset="-122"/>
                 <a:cs typeface="Be Vietnam Pro" pitchFamily="34" charset="-120"/>
               </a:rPr>
-              <a:t> bốn</a:t>
-            </a:r>
-            <a:r>
-              <a:rPr lang="en-US" sz="2550" dirty="0" spc="0" kern="0">
+              <a:t> với</a:t>
+            </a:r>
+            <a:r>
+              <a:rPr lang="en-US" sz="2550" dirty="0" spc="-12" kern="0">
                 <a:solidFill>
                   <a:srgbClr val="14161C"/>
                 </a:solidFill>
@@ -7556,10 +7512,10 @@
                 <a:ea typeface="Be Vietnam Pro" pitchFamily="34" charset="-122"/>
                 <a:cs typeface="Be Vietnam Pro" pitchFamily="34" charset="-120"/>
               </a:rPr>
-              <a:t> mô hình</a:t>
-            </a:r>
-            <a:r>
-              <a:rPr lang="en-US" sz="2550" dirty="0" spc="-15" kern="0">
+              <a:t> tài</a:t>
+            </a:r>
+            <a:r>
+              <a:rPr lang="en-US" sz="2550" dirty="0" spc="2" kern="0">
                 <a:solidFill>
                   <a:srgbClr val="14161C"/>
                 </a:solidFill>
@@ -7567,32 +7523,10 @@
                 <a:ea typeface="Be Vietnam Pro" pitchFamily="34" charset="-122"/>
                 <a:cs typeface="Be Vietnam Pro" pitchFamily="34" charset="-120"/>
               </a:rPr>
-              <a:t> với</a:t>
-            </a:r>
-            <a:r>
-              <a:rPr lang="en-US" sz="2550" dirty="0" spc="-12" kern="0">
-                <a:solidFill>
-                  <a:srgbClr val="14161C"/>
-                </a:solidFill>
-                <a:latin typeface="Be Vietnam Pro" pitchFamily="34" charset="0"/>
-                <a:ea typeface="Be Vietnam Pro" pitchFamily="34" charset="-122"/>
-                <a:cs typeface="Be Vietnam Pro" pitchFamily="34" charset="-120"/>
-              </a:rPr>
-              <a:t> tài</a:t>
-            </a:r>
-            <a:r>
-              <a:rPr lang="en-US" sz="2550" dirty="0" spc="1" kern="0">
-                <a:solidFill>
-                  <a:srgbClr val="14161C"/>
-                </a:solidFill>
-                <a:latin typeface="Be Vietnam Pro" pitchFamily="34" charset="0"/>
-                <a:ea typeface="Be Vietnam Pro" pitchFamily="34" charset="-122"/>
-                <a:cs typeface="Be Vietnam Pro" pitchFamily="34" charset="-120"/>
-              </a:rPr>
               <a:t> liệu</a:t>
             </a:r>
             <a:r>
-              <a:rPr lang="en-US" sz="2550" dirty="0" spc="-15" kern="0">
+              <a:rPr lang="en-US" sz="2550" dirty="0" spc="-16" kern="0">
                 <a:solidFill>
                   <a:srgbClr val="14161C"/>
                 </a:solidFill>
@@ -8702,6 +8636,17 @@
               <a:buNone/>
             </a:pPr>
             <a:r>
+              <a:rPr lang="en-US" sz="2550" dirty="0" spc="-1" kern="0">
+                <a:solidFill>
+                  <a:srgbClr val="F3EEE3"/>
+                </a:solidFill>
+                <a:latin typeface="Be Vietnam Pro" pitchFamily="34" charset="0"/>
+                <a:ea typeface="Be Vietnam Pro" pitchFamily="34" charset="-122"/>
+                <a:cs typeface="Be Vietnam Pro" pitchFamily="34" charset="-120"/>
+              </a:rPr>
+              <a:t>Lisp,</a:t>
+            </a:r>
+            <a:r>
               <a:rPr lang="en-US" sz="2550" dirty="0" spc="0" kern="0">
                 <a:solidFill>
                   <a:srgbClr val="F3EEE3"/>
@@ -8710,7 +8655,29 @@
                 <a:ea typeface="Be Vietnam Pro" pitchFamily="34" charset="-122"/>
                 <a:cs typeface="Be Vietnam Pro" pitchFamily="34" charset="-120"/>
               </a:rPr>
-              <a:t>Hàm</a:t>
+              <a:t> C++,</a:t>
+            </a:r>
+            <a:r>
+              <a:rPr lang="en-US" sz="2550" dirty="0" spc="8" kern="0">
+                <a:solidFill>
+                  <a:srgbClr val="F3EEE3"/>
+                </a:solidFill>
+                <a:latin typeface="Be Vietnam Pro" pitchFamily="34" charset="0"/>
+                <a:ea typeface="Be Vietnam Pro" pitchFamily="34" charset="-122"/>
+                <a:cs typeface="Be Vietnam Pro" pitchFamily="34" charset="-120"/>
+              </a:rPr>
+              <a:t> Python</a:t>
+            </a:r>
+            <a:r>
+              <a:rPr lang="en-US" sz="2550" dirty="0" spc="-1" kern="0">
+                <a:solidFill>
+                  <a:srgbClr val="F3EEE3"/>
+                </a:solidFill>
+                <a:latin typeface="Be Vietnam Pro" pitchFamily="34" charset="0"/>
+                <a:ea typeface="Be Vietnam Pro" pitchFamily="34" charset="-122"/>
+                <a:cs typeface="Be Vietnam Pro" pitchFamily="34" charset="-120"/>
+              </a:rPr>
+              <a:t> pha</a:t>
             </a:r>
             <a:r>
               <a:rPr lang="en-US" sz="2550" dirty="0" spc="1" kern="0">
@@ -8721,18 +8688,7 @@
                 <a:ea typeface="Be Vietnam Pro" pitchFamily="34" charset="-122"/>
                 <a:cs typeface="Be Vietnam Pro" pitchFamily="34" charset="-120"/>
               </a:rPr>
-              <a:t> là</a:t>
-            </a:r>
-            <a:r>
-              <a:rPr lang="en-US" sz="2550" dirty="0" spc="-5" kern="0">
-                <a:solidFill>
-                  <a:srgbClr val="F3EEE3"/>
-                </a:solidFill>
-                <a:latin typeface="Be Vietnam Pro" pitchFamily="34" charset="0"/>
-                <a:ea typeface="Be Vietnam Pro" pitchFamily="34" charset="-122"/>
-                <a:cs typeface="Be Vietnam Pro" pitchFamily="34" charset="-120"/>
-              </a:rPr>
-              <a:t> một</a:t>
+              <a:t> nhiều</a:t>
             </a:r>
             <a:r>
               <a:rPr lang="en-US" sz="2550" dirty="0" spc="0" kern="0">
@@ -8743,40 +8699,7 @@
                 <a:ea typeface="Be Vietnam Pro" pitchFamily="34" charset="-122"/>
                 <a:cs typeface="Be Vietnam Pro" pitchFamily="34" charset="-120"/>
               </a:rPr>
-              <a:t> dạng phổ biến</a:t>
-            </a:r>
-            <a:r>
-              <a:rPr lang="en-US" sz="2550" dirty="0" spc="-2" kern="0">
-                <a:solidFill>
-                  <a:srgbClr val="F3EEE3"/>
-                </a:solidFill>
-                <a:latin typeface="Be Vietnam Pro" pitchFamily="34" charset="0"/>
-                <a:ea typeface="Be Vietnam Pro" pitchFamily="34" charset="-122"/>
-                <a:cs typeface="Be Vietnam Pro" pitchFamily="34" charset="-120"/>
-              </a:rPr>
-              <a:t> của</a:t>
-            </a:r>
-            <a:r>
-              <a:rPr lang="en-US" sz="2550" dirty="0" spc="0" kern="0">
-                <a:solidFill>
-                  <a:srgbClr val="F3EEE3"/>
-                </a:solidFill>
-                <a:latin typeface="Be Vietnam Pro" pitchFamily="34" charset="0"/>
-                <a:ea typeface="Be Vietnam Pro" pitchFamily="34" charset="-122"/>
-                <a:cs typeface="Be Vietnam Pro" pitchFamily="34" charset="-120"/>
-              </a:rPr>
-              <a:t> khai</a:t>
-            </a:r>
-            <a:r>
-              <a:rPr lang="en-US" sz="2550" dirty="0" spc="-2" kern="0">
-                <a:solidFill>
-                  <a:srgbClr val="F3EEE3"/>
-                </a:solidFill>
-                <a:latin typeface="Be Vietnam Pro" pitchFamily="34" charset="0"/>
-                <a:ea typeface="Be Vietnam Pro" pitchFamily="34" charset="-122"/>
-                <a:cs typeface="Be Vietnam Pro" pitchFamily="34" charset="-120"/>
-              </a:rPr>
-              <a:t> báo.</a:t>
+              <a:t> lối.</a:t>
             </a:r>
             <a:endParaRPr lang="en-US" sz="2550" dirty="0"/>
           </a:p>
@@ -8961,7 +8884,7 @@
               <a:buNone/>
             </a:pPr>
             <a:r>
-              <a:rPr lang="en-US" sz="2400" dirty="0" spc="-2" kern="0">
+              <a:rPr lang="en-US" sz="2400" dirty="0" spc="0" kern="0">
                 <a:solidFill>
                   <a:srgbClr val="C4C8D6"/>
                 </a:solidFill>
@@ -8969,10 +8892,10 @@
                 <a:ea typeface="Be Vietnam Pro" pitchFamily="34" charset="-122"/>
                 <a:cs typeface="Be Vietnam Pro" pitchFamily="34" charset="-120"/>
               </a:rPr>
-              <a:t>Chuỗi</a:t>
-            </a:r>
-            <a:r>
-              <a:rPr lang="en-US" sz="2400" dirty="0" spc="7" kern="0">
+              <a:t>Danh</a:t>
+            </a:r>
+            <a:r>
+              <a:rPr lang="en-US" sz="2400" dirty="0" spc="-6" kern="0">
                 <a:solidFill>
                   <a:srgbClr val="C4C8D6"/>
                 </a:solidFill>
@@ -8980,7 +8903,40 @@
                 <a:ea typeface="Be Vietnam Pro" pitchFamily="34" charset="-122"/>
                 <a:cs typeface="Be Vietnam Pro" pitchFamily="34" charset="-120"/>
               </a:rPr>
-              <a:t> bước</a:t>
+              <a:t> sách</a:t>
+            </a:r>
+            <a:r>
+              <a:rPr lang="en-US" sz="2400" dirty="0" spc="0" kern="0">
+                <a:solidFill>
+                  <a:srgbClr val="C4C8D6"/>
+                </a:solidFill>
+                <a:latin typeface="Be Vietnam Pro" pitchFamily="34" charset="0"/>
+                <a:ea typeface="Be Vietnam Pro" pitchFamily="34" charset="-122"/>
+                <a:cs typeface="Be Vietnam Pro" pitchFamily="34" charset="-120"/>
+              </a:rPr>
+              <a:t> lệnh</a:t>
+            </a:r>
+            <a:r>
+              <a:rPr lang="en-US" sz="2400" dirty="0" spc="1" kern="0">
+                <a:solidFill>
+                  <a:srgbClr val="C4C8D6"/>
+                </a:solidFill>
+                <a:latin typeface="Be Vietnam Pro" pitchFamily="34" charset="0"/>
+                <a:ea typeface="Be Vietnam Pro" pitchFamily="34" charset="-122"/>
+                <a:cs typeface="Be Vietnam Pro" pitchFamily="34" charset="-120"/>
+              </a:rPr>
+              <a:t> bảo</a:t>
+            </a:r>
+            <a:r>
+              <a:rPr lang="en-US" sz="2400" dirty="0" spc="-6" kern="0">
+                <a:solidFill>
+                  <a:srgbClr val="C4C8D6"/>
+                </a:solidFill>
+                <a:latin typeface="Be Vietnam Pro" pitchFamily="34" charset="0"/>
+                <a:ea typeface="Be Vietnam Pro" pitchFamily="34" charset="-122"/>
+                <a:cs typeface="Be Vietnam Pro" pitchFamily="34" charset="-120"/>
+              </a:rPr>
+              <a:t> máy</a:t>
             </a:r>
             <a:r>
               <a:rPr lang="en-US" sz="2400" dirty="0" spc="3" kern="0">
@@ -8994,7 +8950,7 @@
               <a:t> làm</a:t>
             </a:r>
             <a:r>
-              <a:rPr lang="en-US" sz="2400" dirty="0" spc="-6" kern="0">
+              <a:rPr lang="en-US" sz="2400" dirty="0" spc="1" kern="0">
                 <a:solidFill>
                   <a:srgbClr val="C4C8D6"/>
                 </a:solidFill>
@@ -9002,62 +8958,7 @@
                 <a:ea typeface="Be Vietnam Pro" pitchFamily="34" charset="-122"/>
                 <a:cs typeface="Be Vietnam Pro" pitchFamily="34" charset="-120"/>
               </a:rPr>
-              <a:t> thay</a:t>
-            </a:r>
-            <a:r>
-              <a:rPr lang="en-US" sz="2400" dirty="0" spc="12" kern="0">
-                <a:solidFill>
-                  <a:srgbClr val="C4C8D6"/>
-                </a:solidFill>
-                <a:latin typeface="Be Vietnam Pro" pitchFamily="34" charset="0"/>
-                <a:ea typeface="Be Vietnam Pro" pitchFamily="34" charset="-122"/>
-                <a:cs typeface="Be Vietnam Pro" pitchFamily="34" charset="-120"/>
-              </a:rPr>
-              <a:t> đổi</a:t>
-            </a:r>
-            <a:r>
-              <a:rPr lang="en-US" sz="2400" dirty="0" spc="-13" kern="0">
-                <a:solidFill>
-                  <a:srgbClr val="C4C8D6"/>
-                </a:solidFill>
-                <a:latin typeface="Be Vietnam Pro" pitchFamily="34" charset="0"/>
-                <a:ea typeface="Be Vietnam Pro" pitchFamily="34" charset="-122"/>
-                <a:cs typeface="Be Vietnam Pro" pitchFamily="34" charset="-120"/>
-              </a:rPr>
-              <a:t> trạng</a:t>
-            </a:r>
-            <a:r>
-              <a:rPr lang="en-US" sz="2400" dirty="0" spc="1" kern="0">
-                <a:solidFill>
-                  <a:srgbClr val="C4C8D6"/>
-                </a:solidFill>
-                <a:latin typeface="Be Vietnam Pro" pitchFamily="34" charset="0"/>
-                <a:ea typeface="Be Vietnam Pro" pitchFamily="34" charset="-122"/>
-                <a:cs typeface="Be Vietnam Pro" pitchFamily="34" charset="-120"/>
-              </a:rPr>
-              <a:t> thái</a:t>
-            </a:r>
-            <a:r>
-              <a:rPr lang="en-US" sz="2400" dirty="0" spc="5" kern="0">
-                <a:solidFill>
-                  <a:srgbClr val="C4C8D6"/>
-                </a:solidFill>
-                <a:latin typeface="Be Vietnam Pro" pitchFamily="34" charset="0"/>
-                <a:ea typeface="Be Vietnam Pro" pitchFamily="34" charset="-122"/>
-                <a:cs typeface="Be Vietnam Pro" pitchFamily="34" charset="-120"/>
-              </a:rPr>
-              <a:t> chương</a:t>
-            </a:r>
-            <a:r>
-              <a:rPr lang="en-US" sz="2400" dirty="0" spc="8" kern="0">
-                <a:solidFill>
-                  <a:srgbClr val="C4C8D6"/>
-                </a:solidFill>
-                <a:latin typeface="Be Vietnam Pro" pitchFamily="34" charset="0"/>
-                <a:ea typeface="Be Vietnam Pro" pitchFamily="34" charset="-122"/>
-                <a:cs typeface="Be Vietnam Pro" pitchFamily="34" charset="-120"/>
-              </a:rPr>
-              <a:t> trình.</a:t>
+              <a:t> gì.</a:t>
             </a:r>
             <a:endParaRPr lang="en-US" sz="2400" dirty="0"/>
           </a:p>
@@ -9088,7 +8989,7 @@
               <a:buNone/>
             </a:pPr>
             <a:r>
-              <a:rPr lang="en-US" sz="1950" b="1" dirty="0" spc="-6" kern="0">
+              <a:rPr lang="en-US" sz="1950" b="1" dirty="0" spc="1" kern="0">
                 <a:solidFill>
                   <a:srgbClr val="7C93FF"/>
                 </a:solidFill>
@@ -9096,7 +8997,29 @@
                 <a:ea typeface="Be Vietnam Pro" pitchFamily="34" charset="-122"/>
                 <a:cs typeface="Be Vietnam Pro" pitchFamily="34" charset="-120"/>
               </a:rPr>
-              <a:t>Nguồn</a:t>
+              <a:t>Python</a:t>
+            </a:r>
+            <a:r>
+              <a:rPr lang="en-US" sz="1950" b="1" dirty="0" spc="-5" kern="0">
+                <a:solidFill>
+                  <a:srgbClr val="7C93FF"/>
+                </a:solidFill>
+                <a:latin typeface="Be Vietnam Pro" pitchFamily="34" charset="0"/>
+                <a:ea typeface="Be Vietnam Pro" pitchFamily="34" charset="-122"/>
+                <a:cs typeface="Be Vietnam Pro" pitchFamily="34" charset="-120"/>
+              </a:rPr>
+              <a:t> gọi</a:t>
+            </a:r>
+            <a:r>
+              <a:rPr lang="en-US" sz="1950" b="1" dirty="0" spc="-3" kern="0">
+                <a:solidFill>
+                  <a:srgbClr val="7C93FF"/>
+                </a:solidFill>
+                <a:latin typeface="Be Vietnam Pro" pitchFamily="34" charset="0"/>
+                <a:ea typeface="Be Vietnam Pro" pitchFamily="34" charset="-122"/>
+                <a:cs typeface="Be Vietnam Pro" pitchFamily="34" charset="-120"/>
+              </a:rPr>
+              <a:t> là</a:t>
             </a:r>
             <a:r>
               <a:rPr lang="en-US" sz="1950" b="1" dirty="0" spc="-1" kern="0">
@@ -9107,10 +9030,10 @@
                 <a:ea typeface="Be Vietnam Pro" pitchFamily="34" charset="-122"/>
                 <a:cs typeface="Be Vietnam Pro" pitchFamily="34" charset="-120"/>
               </a:rPr>
-              <a:t> nêu:</a:t>
-            </a:r>
-            <a:r>
-              <a:rPr lang="en-US" sz="1950" b="1" dirty="0" spc="-2" kern="0">
+              <a:t> thủ</a:t>
+            </a:r>
+            <a:r>
+              <a:rPr lang="en-US" sz="1950" b="1" dirty="0" spc="0" kern="0">
                 <a:solidFill>
                   <a:srgbClr val="7C93FF"/>
                 </a:solidFill>
@@ -9118,10 +9041,10 @@
                 <a:ea typeface="Be Vietnam Pro" pitchFamily="34" charset="-122"/>
                 <a:cs typeface="Be Vietnam Pro" pitchFamily="34" charset="-120"/>
               </a:rPr>
-              <a:t> C,</a:t>
-            </a:r>
-            <a:r>
-              <a:rPr lang="en-US" sz="1950" b="1" dirty="0" spc="-3" kern="0">
+              <a:t> tục</a:t>
+            </a:r>
+            <a:r>
+              <a:rPr lang="en-US" sz="1950" b="1" dirty="0" spc="-9" kern="0">
                 <a:solidFill>
                   <a:srgbClr val="7C93FF"/>
                 </a:solidFill>
@@ -9129,29 +9052,7 @@
                 <a:ea typeface="Be Vietnam Pro" pitchFamily="34" charset="-122"/>
                 <a:cs typeface="Be Vietnam Pro" pitchFamily="34" charset="-120"/>
               </a:rPr>
-              <a:t> C++,</a:t>
-            </a:r>
-            <a:r>
-              <a:rPr lang="en-US" sz="1950" b="1" dirty="0" spc="-18" kern="0">
-                <a:solidFill>
-                  <a:srgbClr val="7C93FF"/>
-                </a:solidFill>
-                <a:latin typeface="Be Vietnam Pro" pitchFamily="34" charset="0"/>
-                <a:ea typeface="Be Vietnam Pro" pitchFamily="34" charset="-122"/>
-                <a:cs typeface="Be Vietnam Pro" pitchFamily="34" charset="-120"/>
-              </a:rPr>
-              <a:t> Java,</a:t>
-            </a:r>
-            <a:r>
-              <a:rPr lang="en-US" sz="1950" b="1" dirty="0" spc="1" kern="0">
-                <a:solidFill>
-                  <a:srgbClr val="7C93FF"/>
-                </a:solidFill>
-                <a:latin typeface="Be Vietnam Pro" pitchFamily="34" charset="0"/>
-                <a:ea typeface="Be Vietnam Pro" pitchFamily="34" charset="-122"/>
-                <a:cs typeface="Be Vietnam Pro" pitchFamily="34" charset="-120"/>
-              </a:rPr>
-              <a:t> Python</a:t>
+              <a:t> (procedural)</a:t>
             </a:r>
             <a:endParaRPr lang="en-US" sz="1950" dirty="0"/>
           </a:p>
@@ -9344,10 +9245,10 @@
                 <a:ea typeface="Be Vietnam Pro" pitchFamily="34" charset="-122"/>
                 <a:cs typeface="Be Vietnam Pro" pitchFamily="34" charset="-120"/>
               </a:rPr>
-              <a:t> logic</a:t>
-            </a:r>
-            <a:r>
-              <a:rPr lang="en-US" sz="2400" dirty="0" spc="-16" kern="0">
+              <a:t> bài</a:t>
+            </a:r>
+            <a:r>
+              <a:rPr lang="en-US" sz="2400" dirty="0" spc="-8" kern="0">
                 <a:solidFill>
                   <a:srgbClr val="C4C8D6"/>
                 </a:solidFill>
@@ -9355,10 +9256,10 @@
                 <a:ea typeface="Be Vietnam Pro" pitchFamily="34" charset="-122"/>
                 <a:cs typeface="Be Vietnam Pro" pitchFamily="34" charset="-120"/>
               </a:rPr>
-              <a:t> và</a:t>
-            </a:r>
-            <a:r>
-              <a:rPr lang="en-US" sz="2400" dirty="0" spc="7" kern="0">
+              <a:t> toán,</a:t>
+            </a:r>
+            <a:r>
+              <a:rPr lang="en-US" sz="2400" dirty="0" spc="0" kern="0">
                 <a:solidFill>
                   <a:srgbClr val="C4C8D6"/>
                 </a:solidFill>
@@ -9366,7 +9267,7 @@
                 <a:ea typeface="Be Vietnam Pro" pitchFamily="34" charset="-122"/>
                 <a:cs typeface="Be Vietnam Pro" pitchFamily="34" charset="-120"/>
               </a:rPr>
-              <a:t> chức</a:t>
+              <a:t> cài</a:t>
             </a:r>
             <a:r>
               <a:rPr lang="en-US" sz="2400" dirty="0" spc="3" kern="0">
@@ -9377,7 +9278,7 @@
                 <a:ea typeface="Be Vietnam Pro" pitchFamily="34" charset="-122"/>
                 <a:cs typeface="Be Vietnam Pro" pitchFamily="34" charset="-120"/>
               </a:rPr>
-              <a:t> năng,</a:t>
+              <a:t> đặt tự</a:t>
             </a:r>
             <a:r>
               <a:rPr lang="en-US" sz="2400" dirty="0" spc="0" kern="0">
@@ -9388,40 +9289,7 @@
                 <a:ea typeface="Be Vietnam Pro" pitchFamily="34" charset="-122"/>
                 <a:cs typeface="Be Vietnam Pro" pitchFamily="34" charset="-120"/>
               </a:rPr>
-              <a:t> không nêu</a:t>
-            </a:r>
-            <a:r>
-              <a:rPr lang="en-US" sz="2400" dirty="0" spc="1" kern="0">
-                <a:solidFill>
-                  <a:srgbClr val="C4C8D6"/>
-                </a:solidFill>
-                <a:latin typeface="Be Vietnam Pro" pitchFamily="34" charset="0"/>
-                <a:ea typeface="Be Vietnam Pro" pitchFamily="34" charset="-122"/>
-                <a:cs typeface="Be Vietnam Pro" pitchFamily="34" charset="-120"/>
-              </a:rPr>
-              <a:t> luồng</a:t>
-            </a:r>
-            <a:r>
-              <a:rPr lang="en-US" sz="2400" dirty="0" spc="18" kern="0">
-                <a:solidFill>
-                  <a:srgbClr val="C4C8D6"/>
-                </a:solidFill>
-                <a:latin typeface="Be Vietnam Pro" pitchFamily="34" charset="0"/>
-                <a:ea typeface="Be Vietnam Pro" pitchFamily="34" charset="-122"/>
-                <a:cs typeface="Be Vietnam Pro" pitchFamily="34" charset="-120"/>
-              </a:rPr>
-              <a:t> điều</a:t>
-            </a:r>
-            <a:r>
-              <a:rPr lang="en-US" sz="2400" dirty="0" spc="-2" kern="0">
-                <a:solidFill>
-                  <a:srgbClr val="C4C8D6"/>
-                </a:solidFill>
-                <a:latin typeface="Be Vietnam Pro" pitchFamily="34" charset="0"/>
-                <a:ea typeface="Be Vietnam Pro" pitchFamily="34" charset="-122"/>
-                <a:cs typeface="Be Vietnam Pro" pitchFamily="34" charset="-120"/>
-              </a:rPr>
-              <a:t> khiển.</a:t>
+              <a:t> chọn cách giải.</a:t>
             </a:r>
             <a:endParaRPr lang="en-US" sz="2400" dirty="0"/>
           </a:p>
@@ -9697,10 +9565,10 @@
                 <a:ea typeface="Be Vietnam Pro" pitchFamily="34" charset="-122"/>
                 <a:cs typeface="Be Vietnam Pro" pitchFamily="34" charset="-120"/>
               </a:rPr>
-              <a:t>Tính</a:t>
-            </a:r>
-            <a:r>
-              <a:rPr lang="en-US" sz="2400" dirty="0" spc="-9" kern="0">
+              <a:t>Chia</a:t>
+            </a:r>
+            <a:r>
+              <a:rPr lang="en-US" sz="2400" dirty="0" spc="-5" kern="0">
                 <a:solidFill>
                   <a:srgbClr val="C4C8D6"/>
                 </a:solidFill>
@@ -9708,7 +9576,7 @@
                 <a:ea typeface="Be Vietnam Pro" pitchFamily="34" charset="-122"/>
                 <a:cs typeface="Be Vietnam Pro" pitchFamily="34" charset="-120"/>
               </a:rPr>
-              <a:t> toán</a:t>
+              <a:t> việc</a:t>
             </a:r>
             <a:r>
               <a:rPr lang="en-US" sz="2400" dirty="0" spc="1" kern="0">
@@ -9719,7 +9587,7 @@
                 <a:ea typeface="Be Vietnam Pro" pitchFamily="34" charset="-122"/>
                 <a:cs typeface="Be Vietnam Pro" pitchFamily="34" charset="-120"/>
               </a:rPr>
-              <a:t> là tính</a:t>
+              <a:t> thành</a:t>
             </a:r>
             <a:r>
               <a:rPr lang="en-US" sz="2400" dirty="0" spc="3" kern="0">
@@ -9730,10 +9598,10 @@
                 <a:ea typeface="Be Vietnam Pro" pitchFamily="34" charset="-122"/>
                 <a:cs typeface="Be Vietnam Pro" pitchFamily="34" charset="-120"/>
               </a:rPr>
-              <a:t> hàm</a:t>
-            </a:r>
-            <a:r>
-              <a:rPr lang="en-US" sz="2400" dirty="0" spc="-10" kern="0">
+              <a:t> hàm:</a:t>
+            </a:r>
+            <a:r>
+              <a:rPr lang="en-US" sz="2400" dirty="0" spc="1" kern="0">
                 <a:solidFill>
                   <a:srgbClr val="C4C8D6"/>
                 </a:solidFill>
@@ -9741,10 +9609,10 @@
                 <a:ea typeface="Be Vietnam Pro" pitchFamily="34" charset="-122"/>
                 <a:cs typeface="Be Vietnam Pro" pitchFamily="34" charset="-120"/>
               </a:rPr>
-              <a:t> toán</a:t>
-            </a:r>
-            <a:r>
-              <a:rPr lang="en-US" sz="2400" dirty="0" spc="-2" kern="0">
+              <a:t> nhận</a:t>
+            </a:r>
+            <a:r>
+              <a:rPr lang="en-US" sz="2400" dirty="0" spc="-8" kern="0">
                 <a:solidFill>
                   <a:srgbClr val="C4C8D6"/>
                 </a:solidFill>
@@ -9752,10 +9620,10 @@
                 <a:ea typeface="Be Vietnam Pro" pitchFamily="34" charset="-122"/>
                 <a:cs typeface="Be Vietnam Pro" pitchFamily="34" charset="-120"/>
               </a:rPr>
-              <a:t> học,</a:t>
-            </a:r>
-            <a:r>
-              <a:rPr lang="en-US" sz="2400" dirty="0" spc="22" kern="0">
+              <a:t> vào,</a:t>
+            </a:r>
+            <a:r>
+              <a:rPr lang="en-US" sz="2400" dirty="0" spc="-21" kern="0">
                 <a:solidFill>
                   <a:srgbClr val="C4C8D6"/>
                 </a:solidFill>
@@ -9763,10 +9631,10 @@
                 <a:ea typeface="Be Vietnam Pro" pitchFamily="34" charset="-122"/>
                 <a:cs typeface="Be Vietnam Pro" pitchFamily="34" charset="-120"/>
               </a:rPr>
-              <a:t> ưu</a:t>
-            </a:r>
-            <a:r>
-              <a:rPr lang="en-US" sz="2400" dirty="0" spc="0" kern="0">
+              <a:t> trả</a:t>
+            </a:r>
+            <a:r>
+              <a:rPr lang="en-US" sz="2400" dirty="0" spc="-22" kern="0">
                 <a:solidFill>
                   <a:srgbClr val="C4C8D6"/>
                 </a:solidFill>
@@ -9774,51 +9642,7 @@
                 <a:ea typeface="Be Vietnam Pro" pitchFamily="34" charset="-122"/>
                 <a:cs typeface="Be Vietnam Pro" pitchFamily="34" charset="-120"/>
               </a:rPr>
-              <a:t> tiên</a:t>
-            </a:r>
-            <a:r>
-              <a:rPr lang="en-US" sz="2400" dirty="0" spc="3" kern="0">
-                <a:solidFill>
-                  <a:srgbClr val="C4C8D6"/>
-                </a:solidFill>
-                <a:latin typeface="Be Vietnam Pro" pitchFamily="34" charset="0"/>
-                <a:ea typeface="Be Vietnam Pro" pitchFamily="34" charset="-122"/>
-                <a:cs typeface="Be Vietnam Pro" pitchFamily="34" charset="-120"/>
-              </a:rPr>
-              <a:t> dữ</a:t>
-            </a:r>
-            <a:r>
-              <a:rPr lang="en-US" sz="2400" dirty="0" spc="-1" kern="0">
-                <a:solidFill>
-                  <a:srgbClr val="C4C8D6"/>
-                </a:solidFill>
-                <a:latin typeface="Be Vietnam Pro" pitchFamily="34" charset="0"/>
-                <a:ea typeface="Be Vietnam Pro" pitchFamily="34" charset="-122"/>
-                <a:cs typeface="Be Vietnam Pro" pitchFamily="34" charset="-120"/>
-              </a:rPr>
-              <a:t> liệu</a:t>
-            </a:r>
-            <a:r>
-              <a:rPr lang="en-US" sz="2400" dirty="0" spc="-12" kern="0">
-                <a:solidFill>
-                  <a:srgbClr val="C4C8D6"/>
-                </a:solidFill>
-                <a:latin typeface="Be Vietnam Pro" pitchFamily="34" charset="0"/>
-                <a:ea typeface="Be Vietnam Pro" pitchFamily="34" charset="-122"/>
-                <a:cs typeface="Be Vietnam Pro" pitchFamily="34" charset="-120"/>
-              </a:rPr>
-              <a:t> bất</a:t>
-            </a:r>
-            <a:r>
-              <a:rPr lang="en-US" sz="2400" dirty="0" spc="-1" kern="0">
-                <a:solidFill>
-                  <a:srgbClr val="C4C8D6"/>
-                </a:solidFill>
-                <a:latin typeface="Be Vietnam Pro" pitchFamily="34" charset="0"/>
-                <a:ea typeface="Be Vietnam Pro" pitchFamily="34" charset="-122"/>
-                <a:cs typeface="Be Vietnam Pro" pitchFamily="34" charset="-120"/>
-              </a:rPr>
-              <a:t> biến.</a:t>
+              <a:t> ra.</a:t>
             </a:r>
             <a:endParaRPr lang="en-US" sz="2400" dirty="0"/>
           </a:p>
@@ -9849,6 +9673,28 @@
               <a:buNone/>
             </a:pPr>
             <a:r>
+              <a:rPr lang="en-US" sz="1950" b="1" dirty="0" spc="1" kern="0">
+                <a:solidFill>
+                  <a:srgbClr val="7C93FF"/>
+                </a:solidFill>
+                <a:latin typeface="Be Vietnam Pro" pitchFamily="34" charset="0"/>
+                <a:ea typeface="Be Vietnam Pro" pitchFamily="34" charset="-122"/>
+                <a:cs typeface="Be Vietnam Pro" pitchFamily="34" charset="-120"/>
+              </a:rPr>
+              <a:t>Python</a:t>
+            </a:r>
+            <a:r>
+              <a:rPr lang="en-US" sz="1950" b="1" dirty="0" spc="-1" kern="0">
+                <a:solidFill>
+                  <a:srgbClr val="7C93FF"/>
+                </a:solidFill>
+                <a:latin typeface="Be Vietnam Pro" pitchFamily="34" charset="0"/>
+                <a:ea typeface="Be Vietnam Pro" pitchFamily="34" charset="-122"/>
+                <a:cs typeface="Be Vietnam Pro" pitchFamily="34" charset="-120"/>
+              </a:rPr>
+              <a:t> nêu:</a:t>
+            </a:r>
+            <a:r>
               <a:rPr lang="en-US" sz="1950" b="1" dirty="0" spc="-6" kern="0">
                 <a:solidFill>
                   <a:srgbClr val="7C93FF"/>
@@ -9857,7 +9703,7 @@
                 <a:ea typeface="Be Vietnam Pro" pitchFamily="34" charset="-122"/>
                 <a:cs typeface="Be Vietnam Pro" pitchFamily="34" charset="-120"/>
               </a:rPr>
-              <a:t>Nguồn</a:t>
+              <a:t> họ</a:t>
             </a:r>
             <a:r>
               <a:rPr lang="en-US" sz="1950" b="1" dirty="0" spc="-1" kern="0">
@@ -9868,10 +9714,10 @@
                 <a:ea typeface="Be Vietnam Pro" pitchFamily="34" charset="-122"/>
                 <a:cs typeface="Be Vietnam Pro" pitchFamily="34" charset="-120"/>
               </a:rPr>
-              <a:t> nêu:</a:t>
-            </a:r>
-            <a:r>
-              <a:rPr lang="en-US" sz="1950" b="1" dirty="0" spc="-12" kern="0">
+              <a:t> ML,</a:t>
+            </a:r>
+            <a:r>
+              <a:rPr lang="en-US" sz="1950" b="1" dirty="0" spc="-14" kern="0">
                 <a:solidFill>
                   <a:srgbClr val="7C93FF"/>
                 </a:solidFill>
@@ -9879,29 +9725,7 @@
                 <a:ea typeface="Be Vietnam Pro" pitchFamily="34" charset="-122"/>
                 <a:cs typeface="Be Vietnam Pro" pitchFamily="34" charset="-120"/>
               </a:rPr>
-              <a:t> Haskell,</a:t>
-            </a:r>
-            <a:r>
-              <a:rPr lang="en-US" sz="1950" b="1" dirty="0" spc="0" kern="0">
-                <a:solidFill>
-                  <a:srgbClr val="7C93FF"/>
-                </a:solidFill>
-                <a:latin typeface="Be Vietnam Pro" pitchFamily="34" charset="0"/>
-                <a:ea typeface="Be Vietnam Pro" pitchFamily="34" charset="-122"/>
-                <a:cs typeface="Be Vietnam Pro" pitchFamily="34" charset="-120"/>
-              </a:rPr>
-              <a:t> Lisp,</a:t>
-            </a:r>
-            <a:r>
-              <a:rPr lang="en-US" sz="1950" b="1" dirty="0" spc="-3" kern="0">
-                <a:solidFill>
-                  <a:srgbClr val="7C93FF"/>
-                </a:solidFill>
-                <a:latin typeface="Be Vietnam Pro" pitchFamily="34" charset="0"/>
-                <a:ea typeface="Be Vietnam Pro" pitchFamily="34" charset="-122"/>
-                <a:cs typeface="Be Vietnam Pro" pitchFamily="34" charset="-120"/>
-              </a:rPr>
-              <a:t> Erlang</a:t>
+              <a:t> Haskell</a:t>
             </a:r>
             <a:endParaRPr lang="en-US" sz="1950" dirty="0"/>
           </a:p>
@@ -10536,10 +10360,10 @@
                 <a:ea typeface="Be Vietnam Pro" pitchFamily="34" charset="-122"/>
                 <a:cs typeface="Be Vietnam Pro" pitchFamily="34" charset="-120"/>
               </a:rPr>
-              <a:t> là</a:t>
-            </a:r>
-            <a:r>
-              <a:rPr lang="en-US" sz="2550" dirty="0" spc="-5" kern="0">
+              <a:t> mở</a:t>
+            </a:r>
+            <a:r>
+              <a:rPr lang="en-US" sz="2550" dirty="0" spc="-21" kern="0">
                 <a:solidFill>
                   <a:srgbClr val="14161C"/>
                 </a:solidFill>
@@ -10547,10 +10371,10 @@
                 <a:ea typeface="Be Vietnam Pro" pitchFamily="34" charset="-122"/>
                 <a:cs typeface="Be Vietnam Pro" pitchFamily="34" charset="-120"/>
               </a:rPr>
-              <a:t> một</a:t>
-            </a:r>
-            <a:r>
-              <a:rPr lang="en-US" sz="2550" dirty="0" spc="-17" kern="0">
+              <a:t> rộng</a:t>
+            </a:r>
+            <a:r>
+              <a:rPr lang="en-US" sz="2550" dirty="0" spc="-22" kern="0">
                 <a:solidFill>
                   <a:srgbClr val="14161C"/>
                 </a:solidFill>
@@ -10558,10 +10382,10 @@
                 <a:ea typeface="Be Vietnam Pro" pitchFamily="34" charset="-122"/>
                 <a:cs typeface="Be Vietnam Pro" pitchFamily="34" charset="-120"/>
               </a:rPr>
-              <a:t> trong</a:t>
-            </a:r>
-            <a:r>
-              <a:rPr lang="en-US" sz="2550" dirty="0" spc="16" kern="0">
+              <a:t> Java</a:t>
+            </a:r>
+            <a:r>
+              <a:rPr lang="en-US" sz="2550" dirty="0" spc="-2" kern="0">
                 <a:solidFill>
                   <a:srgbClr val="14161C"/>
                 </a:solidFill>
@@ -10569,7 +10393,18 @@
                 <a:ea typeface="Be Vietnam Pro" pitchFamily="34" charset="-122"/>
                 <a:cs typeface="Be Vietnam Pro" pitchFamily="34" charset="-120"/>
               </a:rPr>
-              <a:t> những</a:t>
+              <a:t> theo</a:t>
+            </a:r>
+            <a:r>
+              <a:rPr lang="en-US" sz="2550" dirty="0" spc="5" kern="0">
+                <a:solidFill>
+                  <a:srgbClr val="14161C"/>
+                </a:solidFill>
+                <a:latin typeface="Be Vietnam Pro" pitchFamily="34" charset="0"/>
+                <a:ea typeface="Be Vietnam Pro" pitchFamily="34" charset="-122"/>
+                <a:cs typeface="Be Vietnam Pro" pitchFamily="34" charset="-120"/>
+              </a:rPr>
+              <a:t> hướng</a:t>
             </a:r>
             <a:r>
               <a:rPr lang="en-US" sz="2550" dirty="0" spc="1" kern="0">
@@ -10580,84 +10415,7 @@
                 <a:ea typeface="Be Vietnam Pro" pitchFamily="34" charset="-122"/>
                 <a:cs typeface="Be Vietnam Pro" pitchFamily="34" charset="-120"/>
               </a:rPr>
-              <a:t> khung</a:t>
-            </a:r>
-            <a:r>
-              <a:rPr lang="en-US" sz="2550" dirty="0" spc="-25" kern="0">
-                <a:solidFill>
-                  <a:srgbClr val="14161C"/>
-                </a:solidFill>
-                <a:latin typeface="Be Vietnam Pro" pitchFamily="34" charset="0"/>
-                <a:ea typeface="Be Vietnam Pro" pitchFamily="34" charset="-122"/>
-                <a:cs typeface="Be Vietnam Pro" pitchFamily="34" charset="-120"/>
-              </a:rPr>
-              <a:t> AOP</a:t>
-            </a:r>
-            <a:r>
-              <a:rPr lang="en-US" sz="2550" dirty="0" spc="-1" kern="0">
-                <a:solidFill>
-                  <a:srgbClr val="14161C"/>
-                </a:solidFill>
-                <a:latin typeface="Be Vietnam Pro" pitchFamily="34" charset="0"/>
-                <a:ea typeface="Be Vietnam Pro" pitchFamily="34" charset="-122"/>
-                <a:cs typeface="Be Vietnam Pro" pitchFamily="34" charset="-120"/>
-              </a:rPr>
-              <a:t> nổi</a:t>
-            </a:r>
-            <a:r>
-              <a:rPr lang="en-US" sz="2550" dirty="0" spc="1" kern="0">
-                <a:solidFill>
-                  <a:srgbClr val="14161C"/>
-                </a:solidFill>
-                <a:latin typeface="Be Vietnam Pro" pitchFamily="34" charset="0"/>
-                <a:ea typeface="Be Vietnam Pro" pitchFamily="34" charset="-122"/>
-                <a:cs typeface="Be Vietnam Pro" pitchFamily="34" charset="-120"/>
-              </a:rPr>
-              <a:t> tiếng</a:t>
-            </a:r>
-            <a:r>
-              <a:rPr lang="en-US" sz="2550" dirty="0" spc="-9" kern="0">
-                <a:solidFill>
-                  <a:srgbClr val="14161C"/>
-                </a:solidFill>
-                <a:latin typeface="Be Vietnam Pro" pitchFamily="34" charset="0"/>
-                <a:ea typeface="Be Vietnam Pro" pitchFamily="34" charset="-122"/>
-                <a:cs typeface="Be Vietnam Pro" pitchFamily="34" charset="-120"/>
-              </a:rPr>
-              <a:t> nhất,</a:t>
-            </a:r>
-            <a:r>
-              <a:rPr lang="en-US" sz="2550" dirty="0" spc="1" kern="0">
-                <a:solidFill>
-                  <a:srgbClr val="14161C"/>
-                </a:solidFill>
-                <a:latin typeface="Be Vietnam Pro" pitchFamily="34" charset="0"/>
-                <a:ea typeface="Be Vietnam Pro" pitchFamily="34" charset="-122"/>
-                <a:cs typeface="Be Vietnam Pro" pitchFamily="34" charset="-120"/>
-              </a:rPr>
-              <a:t> mở</a:t>
-            </a:r>
-            <a:r>
-              <a:rPr lang="en-US" sz="2550" dirty="0" spc="-20" kern="0">
-                <a:solidFill>
-                  <a:srgbClr val="14161C"/>
-                </a:solidFill>
-                <a:latin typeface="Be Vietnam Pro" pitchFamily="34" charset="0"/>
-                <a:ea typeface="Be Vietnam Pro" pitchFamily="34" charset="-122"/>
-                <a:cs typeface="Be Vietnam Pro" pitchFamily="34" charset="-120"/>
-              </a:rPr>
-              <a:t> rộng</a:t>
-            </a:r>
-            <a:r>
-              <a:rPr lang="en-US" sz="2550" dirty="0" spc="-18" kern="0">
-                <a:solidFill>
-                  <a:srgbClr val="14161C"/>
-                </a:solidFill>
-                <a:latin typeface="Be Vietnam Pro" pitchFamily="34" charset="0"/>
-                <a:ea typeface="Be Vietnam Pro" pitchFamily="34" charset="-122"/>
-                <a:cs typeface="Be Vietnam Pro" pitchFamily="34" charset="-120"/>
-              </a:rPr>
-              <a:t> Java.</a:t>
+              <a:t> khía cạnh.</a:t>
             </a:r>
             <a:endParaRPr lang="en-US" sz="2550" dirty="0"/>
           </a:p>
@@ -12312,15 +12070,37 @@
               <a:buNone/>
             </a:pPr>
             <a:r>
-              <a:rPr lang="en-US" sz="2700" dirty="0" spc="-5" kern="0">
-                <a:solidFill>
-                  <a:srgbClr val="F3EEE3"/>
-                </a:solidFill>
-                <a:latin typeface="Be Vietnam Pro" pitchFamily="34" charset="0"/>
-                <a:ea typeface="Be Vietnam Pro" pitchFamily="34" charset="-122"/>
-                <a:cs typeface="Be Vietnam Pro" pitchFamily="34" charset="-120"/>
-              </a:rPr>
-              <a:t>Viết</a:t>
+              <a:rPr lang="en-US" sz="2700" dirty="0" spc="-2" kern="0">
+                <a:solidFill>
+                  <a:srgbClr val="F3EEE3"/>
+                </a:solidFill>
+                <a:latin typeface="Be Vietnam Pro" pitchFamily="34" charset="0"/>
+                <a:ea typeface="Be Vietnam Pro" pitchFamily="34" charset="-122"/>
+                <a:cs typeface="Be Vietnam Pro" pitchFamily="34" charset="-120"/>
+              </a:rPr>
+              <a:t>Kiểu phần</a:t>
+            </a:r>
+            <a:r>
+              <a:rPr lang="en-US" sz="2700" dirty="0" spc="0" kern="0">
+                <a:solidFill>
+                  <a:srgbClr val="F3EEE3"/>
+                </a:solidFill>
+                <a:latin typeface="Be Vietnam Pro" pitchFamily="34" charset="0"/>
+                <a:ea typeface="Be Vietnam Pro" pitchFamily="34" charset="-122"/>
+                <a:cs typeface="Be Vietnam Pro" pitchFamily="34" charset="-120"/>
+              </a:rPr>
+              <a:t> tử</a:t>
+            </a:r>
+            <a:r>
+              <a:rPr lang="en-US" sz="2700" dirty="0" spc="-1" kern="0">
+                <a:solidFill>
+                  <a:srgbClr val="F3EEE3"/>
+                </a:solidFill>
+                <a:latin typeface="Be Vietnam Pro" pitchFamily="34" charset="0"/>
+                <a:ea typeface="Be Vietnam Pro" pitchFamily="34" charset="-122"/>
+                <a:cs typeface="Be Vietnam Pro" pitchFamily="34" charset="-120"/>
+              </a:rPr>
+              <a:t> là</a:t>
             </a:r>
             <a:r>
               <a:rPr lang="en-US" sz="2700" dirty="0" spc="-7" kern="0">
@@ -12331,62 +12111,7 @@
                 <a:ea typeface="Be Vietnam Pro" pitchFamily="34" charset="-122"/>
                 <a:cs typeface="Be Vietnam Pro" pitchFamily="34" charset="-120"/>
               </a:rPr>
-              <a:t> thuật</a:t>
-            </a:r>
-            <a:r>
-              <a:rPr lang="en-US" sz="2700" dirty="0" spc="-15" kern="0">
-                <a:solidFill>
-                  <a:srgbClr val="F3EEE3"/>
-                </a:solidFill>
-                <a:latin typeface="Be Vietnam Pro" pitchFamily="34" charset="0"/>
-                <a:ea typeface="Be Vietnam Pro" pitchFamily="34" charset="-122"/>
-                <a:cs typeface="Be Vietnam Pro" pitchFamily="34" charset="-120"/>
-              </a:rPr>
-              <a:t> toán</a:t>
-            </a:r>
-            <a:r>
-              <a:rPr lang="en-US" sz="2700" dirty="0" spc="-17" kern="0">
-                <a:solidFill>
-                  <a:srgbClr val="F3EEE3"/>
-                </a:solidFill>
-                <a:latin typeface="Be Vietnam Pro" pitchFamily="34" charset="0"/>
-                <a:ea typeface="Be Vietnam Pro" pitchFamily="34" charset="-122"/>
-                <a:cs typeface="Be Vietnam Pro" pitchFamily="34" charset="-120"/>
-              </a:rPr>
-              <a:t> và</a:t>
-            </a:r>
-            <a:r>
-              <a:rPr lang="en-US" sz="2700" dirty="0" spc="1" kern="0">
-                <a:solidFill>
-                  <a:srgbClr val="F3EEE3"/>
-                </a:solidFill>
-                <a:latin typeface="Be Vietnam Pro" pitchFamily="34" charset="0"/>
-                <a:ea typeface="Be Vietnam Pro" pitchFamily="34" charset="-122"/>
-                <a:cs typeface="Be Vietnam Pro" pitchFamily="34" charset="-120"/>
-              </a:rPr>
-              <a:t> cấu</a:t>
-            </a:r>
-            <a:r>
-              <a:rPr lang="en-US" sz="2700" dirty="0" spc="0" kern="0">
-                <a:solidFill>
-                  <a:srgbClr val="F3EEE3"/>
-                </a:solidFill>
-                <a:latin typeface="Be Vietnam Pro" pitchFamily="34" charset="0"/>
-                <a:ea typeface="Be Vietnam Pro" pitchFamily="34" charset="-122"/>
-                <a:cs typeface="Be Vietnam Pro" pitchFamily="34" charset="-120"/>
-              </a:rPr>
-              <a:t> trúc</a:t>
-            </a:r>
-            <a:r>
-              <a:rPr lang="en-US" sz="2700" dirty="0" spc="-4" kern="0">
-                <a:solidFill>
-                  <a:srgbClr val="F3EEE3"/>
-                </a:solidFill>
-                <a:latin typeface="Be Vietnam Pro" pitchFamily="34" charset="0"/>
-                <a:ea typeface="Be Vietnam Pro" pitchFamily="34" charset="-122"/>
-                <a:cs typeface="Be Vietnam Pro" pitchFamily="34" charset="-120"/>
-              </a:rPr>
-              <a:t> dữ</a:t>
+              <a:t> một</a:t>
             </a:r>
             <a:r>
               <a:rPr lang="en-US" sz="2700" dirty="0" spc="-1" kern="0">
@@ -12397,7 +12122,18 @@
                 <a:ea typeface="Be Vietnam Pro" pitchFamily="34" charset="-122"/>
                 <a:cs typeface="Be Vietnam Pro" pitchFamily="34" charset="-120"/>
               </a:rPr>
-              <a:t> liệu</a:t>
+              <a:t> tham</a:t>
+            </a:r>
+            <a:r>
+              <a:rPr lang="en-US" sz="2700" dirty="0" spc="-12" kern="0">
+                <a:solidFill>
+                  <a:srgbClr val="F3EEE3"/>
+                </a:solidFill>
+                <a:latin typeface="Be Vietnam Pro" pitchFamily="34" charset="0"/>
+                <a:ea typeface="Be Vietnam Pro" pitchFamily="34" charset="-122"/>
+                <a:cs typeface="Be Vietnam Pro" pitchFamily="34" charset="-120"/>
+              </a:rPr>
+              <a:t> số</a:t>
             </a:r>
             <a:r>
               <a:rPr lang="en-US" sz="2700" dirty="0" spc="-2" kern="0">
@@ -12408,29 +12144,7 @@
                 <a:ea typeface="Be Vietnam Pro" pitchFamily="34" charset="-122"/>
                 <a:cs typeface="Be Vietnam Pro" pitchFamily="34" charset="-120"/>
               </a:rPr>
-              <a:t> mà không nêu kiểu</a:t>
-            </a:r>
-            <a:r>
-              <a:rPr lang="en-US" sz="2700" dirty="0" spc="-1" kern="0">
-                <a:solidFill>
-                  <a:srgbClr val="F3EEE3"/>
-                </a:solidFill>
-                <a:latin typeface="Be Vietnam Pro" pitchFamily="34" charset="0"/>
-                <a:ea typeface="Be Vietnam Pro" pitchFamily="34" charset="-122"/>
-                <a:cs typeface="Be Vietnam Pro" pitchFamily="34" charset="-120"/>
-              </a:rPr>
-              <a:t> chúng làm</a:t>
-            </a:r>
-            <a:r>
-              <a:rPr lang="en-US" sz="2700" dirty="0" spc="-3" kern="0">
-                <a:solidFill>
-                  <a:srgbClr val="F3EEE3"/>
-                </a:solidFill>
-                <a:latin typeface="Be Vietnam Pro" pitchFamily="34" charset="0"/>
-                <a:ea typeface="Be Vietnam Pro" pitchFamily="34" charset="-122"/>
-                <a:cs typeface="Be Vietnam Pro" pitchFamily="34" charset="-120"/>
-              </a:rPr>
-              <a:t> việc.</a:t>
+              <a:t> của lớp.</a:t>
             </a:r>
             <a:endParaRPr lang="en-US" sz="2700" dirty="0"/>
           </a:p>
@@ -12706,6 +12420,72 @@
               <a:buNone/>
             </a:pPr>
             <a:r>
+              <a:rPr lang="en-US" sz="2550" dirty="0" spc="-4" kern="0">
+                <a:solidFill>
+                  <a:srgbClr val="F3EEE3"/>
+                </a:solidFill>
+                <a:latin typeface="Be Vietnam Pro" pitchFamily="34" charset="0"/>
+                <a:ea typeface="Be Vietnam Pro" pitchFamily="34" charset="-122"/>
+                <a:cs typeface="Be Vietnam Pro" pitchFamily="34" charset="-120"/>
+              </a:rPr>
+              <a:t>Thư</a:t>
+            </a:r>
+            <a:r>
+              <a:rPr lang="en-US" sz="2550" dirty="0" spc="-1" kern="0">
+                <a:solidFill>
+                  <a:srgbClr val="F3EEE3"/>
+                </a:solidFill>
+                <a:latin typeface="Be Vietnam Pro" pitchFamily="34" charset="0"/>
+                <a:ea typeface="Be Vietnam Pro" pitchFamily="34" charset="-122"/>
+                <a:cs typeface="Be Vietnam Pro" pitchFamily="34" charset="-120"/>
+              </a:rPr>
+              <a:t> viện</a:t>
+            </a:r>
+            <a:r>
+              <a:rPr lang="en-US" sz="2550" dirty="0" spc="-23" kern="0">
+                <a:solidFill>
+                  <a:srgbClr val="F3EEE3"/>
+                </a:solidFill>
+                <a:latin typeface="Be Vietnam Pro" pitchFamily="34" charset="0"/>
+                <a:ea typeface="Be Vietnam Pro" pitchFamily="34" charset="-122"/>
+                <a:cs typeface="Be Vietnam Pro" pitchFamily="34" charset="-120"/>
+              </a:rPr>
+              <a:t> Java</a:t>
+            </a:r>
+            <a:r>
+              <a:rPr lang="en-US" sz="2550" dirty="0" spc="-1" kern="0">
+                <a:solidFill>
+                  <a:srgbClr val="F3EEE3"/>
+                </a:solidFill>
+                <a:latin typeface="Be Vietnam Pro" pitchFamily="34" charset="0"/>
+                <a:ea typeface="Be Vietnam Pro" pitchFamily="34" charset="-122"/>
+                <a:cs typeface="Be Vietnam Pro" pitchFamily="34" charset="-120"/>
+              </a:rPr>
+              <a:t> dùng</a:t>
+            </a:r>
+            <a:r>
+              <a:rPr lang="en-US" sz="2550" dirty="0" spc="1" kern="0">
+                <a:solidFill>
+                  <a:srgbClr val="F3EEE3"/>
+                </a:solidFill>
+                <a:latin typeface="Be Vietnam Pro" pitchFamily="34" charset="0"/>
+                <a:ea typeface="Be Vietnam Pro" pitchFamily="34" charset="-122"/>
+                <a:cs typeface="Be Vietnam Pro" pitchFamily="34" charset="-120"/>
+              </a:rPr>
+              <a:t> tham</a:t>
+            </a:r>
+            <a:r>
+              <a:rPr lang="en-US" sz="2550" dirty="0" spc="-11" kern="0">
+                <a:solidFill>
+                  <a:srgbClr val="F3EEE3"/>
+                </a:solidFill>
+                <a:latin typeface="Be Vietnam Pro" pitchFamily="34" charset="0"/>
+                <a:ea typeface="Be Vietnam Pro" pitchFamily="34" charset="-122"/>
+                <a:cs typeface="Be Vietnam Pro" pitchFamily="34" charset="-120"/>
+              </a:rPr>
+              <a:t> số</a:t>
+            </a:r>
+            <a:r>
               <a:rPr lang="en-US" sz="2550" dirty="0" spc="2" kern="0">
                 <a:solidFill>
                   <a:srgbClr val="F3EEE3"/>
@@ -12714,29 +12494,7 @@
                 <a:ea typeface="Be Vietnam Pro" pitchFamily="34" charset="-122"/>
                 <a:cs typeface="Be Vietnam Pro" pitchFamily="34" charset="-120"/>
               </a:rPr>
-              <a:t>Nguồn</a:t>
-            </a:r>
-            <a:r>
-              <a:rPr lang="en-US" sz="2550" dirty="0" spc="-1" kern="0">
-                <a:solidFill>
-                  <a:srgbClr val="F3EEE3"/>
-                </a:solidFill>
-                <a:latin typeface="Be Vietnam Pro" pitchFamily="34" charset="0"/>
-                <a:ea typeface="Be Vietnam Pro" pitchFamily="34" charset="-122"/>
-                <a:cs typeface="Be Vietnam Pro" pitchFamily="34" charset="-120"/>
-              </a:rPr>
-              <a:t> nói</a:t>
-            </a:r>
-            <a:r>
-              <a:rPr lang="en-US" sz="2550" dirty="0" spc="1" kern="0">
-                <a:solidFill>
-                  <a:srgbClr val="F3EEE3"/>
-                </a:solidFill>
-                <a:latin typeface="Be Vietnam Pro" pitchFamily="34" charset="0"/>
-                <a:ea typeface="Be Vietnam Pro" pitchFamily="34" charset="-122"/>
-                <a:cs typeface="Be Vietnam Pro" pitchFamily="34" charset="-120"/>
-              </a:rPr>
-              <a:t> mô</a:t>
+              <a:t> kiểu</a:t>
             </a:r>
             <a:r>
               <a:rPr lang="en-US" sz="2550" dirty="0" spc="0" kern="0">
@@ -12747,106 +12505,18 @@
                 <a:ea typeface="Be Vietnam Pro" pitchFamily="34" charset="-122"/>
                 <a:cs typeface="Be Vietnam Pro" pitchFamily="34" charset="-120"/>
               </a:rPr>
-              <a:t> hình</a:t>
-            </a:r>
-            <a:r>
-              <a:rPr lang="en-US" sz="2550" dirty="0" spc="-10" kern="0">
-                <a:solidFill>
-                  <a:srgbClr val="F3EEE3"/>
-                </a:solidFill>
-                <a:latin typeface="Be Vietnam Pro" pitchFamily="34" charset="0"/>
-                <a:ea typeface="Be Vietnam Pro" pitchFamily="34" charset="-122"/>
-                <a:cs typeface="Be Vietnam Pro" pitchFamily="34" charset="-120"/>
-              </a:rPr>
-              <a:t> này</a:t>
-            </a:r>
-            <a:r>
-              <a:rPr lang="en-US" sz="2550" dirty="0" spc="6" kern="0">
-                <a:solidFill>
-                  <a:srgbClr val="F3EEE3"/>
-                </a:solidFill>
-                <a:latin typeface="Be Vietnam Pro" pitchFamily="34" charset="0"/>
-                <a:ea typeface="Be Vietnam Pro" pitchFamily="34" charset="-122"/>
-                <a:cs typeface="Be Vietnam Pro" pitchFamily="34" charset="-120"/>
-              </a:rPr>
-              <a:t> được</a:t>
-            </a:r>
-            <a:r>
-              <a:rPr lang="en-US" sz="2550" dirty="0" spc="-1" kern="0">
-                <a:solidFill>
-                  <a:srgbClr val="F3EEE3"/>
-                </a:solidFill>
-                <a:latin typeface="Be Vietnam Pro" pitchFamily="34" charset="0"/>
-                <a:ea typeface="Be Vietnam Pro" pitchFamily="34" charset="-122"/>
-                <a:cs typeface="Be Vietnam Pro" pitchFamily="34" charset="-120"/>
-              </a:rPr>
-              <a:t> dùng</a:t>
-            </a:r>
-            <a:r>
-              <a:rPr lang="en-US" sz="2550" dirty="0" spc="1" kern="0">
-                <a:solidFill>
-                  <a:srgbClr val="F3EEE3"/>
-                </a:solidFill>
-                <a:latin typeface="Be Vietnam Pro" pitchFamily="34" charset="0"/>
-                <a:ea typeface="Be Vietnam Pro" pitchFamily="34" charset="-122"/>
-                <a:cs typeface="Be Vietnam Pro" pitchFamily="34" charset="-120"/>
-              </a:rPr>
-              <a:t> nhiều</a:t>
-            </a:r>
-            <a:r>
-              <a:rPr lang="en-US" sz="2550" dirty="0" spc="-17" kern="0">
-                <a:solidFill>
-                  <a:srgbClr val="F3EEE3"/>
-                </a:solidFill>
-                <a:latin typeface="Be Vietnam Pro" pitchFamily="34" charset="0"/>
-                <a:ea typeface="Be Vietnam Pro" pitchFamily="34" charset="-122"/>
-                <a:cs typeface="Be Vietnam Pro" pitchFamily="34" charset="-120"/>
-              </a:rPr>
-              <a:t> trong</a:t>
-            </a:r>
-            <a:r>
-              <a:rPr lang="en-US" sz="2550" dirty="0" spc="0" kern="0">
-                <a:solidFill>
-                  <a:srgbClr val="F3EEE3"/>
-                </a:solidFill>
-                <a:latin typeface="Be Vietnam Pro" pitchFamily="34" charset="0"/>
-                <a:ea typeface="Be Vietnam Pro" pitchFamily="34" charset="-122"/>
-                <a:cs typeface="Be Vietnam Pro" pitchFamily="34" charset="-120"/>
-              </a:rPr>
-              <a:t> thư</a:t>
-            </a:r>
-            <a:r>
-              <a:rPr lang="en-US" sz="2550" dirty="0" spc="-2" kern="0">
-                <a:solidFill>
-                  <a:srgbClr val="F3EEE3"/>
-                </a:solidFill>
-                <a:latin typeface="Be Vietnam Pro" pitchFamily="34" charset="0"/>
-                <a:ea typeface="Be Vietnam Pro" pitchFamily="34" charset="-122"/>
-                <a:cs typeface="Be Vietnam Pro" pitchFamily="34" charset="-120"/>
-              </a:rPr>
-              <a:t> viện</a:t>
-            </a:r>
-            <a:r>
-              <a:rPr lang="en-US" sz="2550" dirty="0" spc="-18" kern="0">
-                <a:solidFill>
-                  <a:srgbClr val="F3EEE3"/>
-                </a:solidFill>
-                <a:latin typeface="Be Vietnam Pro" pitchFamily="34" charset="0"/>
-                <a:ea typeface="Be Vietnam Pro" pitchFamily="34" charset="-122"/>
-                <a:cs typeface="Be Vietnam Pro" pitchFamily="34" charset="-120"/>
-              </a:rPr>
-              <a:t> và</a:t>
-            </a:r>
-            <a:r>
-              <a:rPr lang="en-US" sz="2550" dirty="0" spc="2" kern="0">
-                <a:solidFill>
-                  <a:srgbClr val="F3EEE3"/>
-                </a:solidFill>
-                <a:latin typeface="Be Vietnam Pro" pitchFamily="34" charset="0"/>
-                <a:ea typeface="Be Vietnam Pro" pitchFamily="34" charset="-122"/>
-                <a:cs typeface="Be Vietnam Pro" pitchFamily="34" charset="-120"/>
-              </a:rPr>
-              <a:t> khung.</a:t>
+              <a:t> cho</a:t>
+            </a:r>
+            <a:r>
+              <a:rPr lang="en-US" sz="2550" dirty="0" spc="-4" kern="0">
+                <a:solidFill>
+                  <a:srgbClr val="F3EEE3"/>
+                </a:solidFill>
+                <a:latin typeface="Be Vietnam Pro" pitchFamily="34" charset="0"/>
+                <a:ea typeface="Be Vietnam Pro" pitchFamily="34" charset="-122"/>
+                <a:cs typeface="Be Vietnam Pro" pitchFamily="34" charset="-120"/>
+              </a:rPr>
+              <a:t> List.</a:t>
             </a:r>
             <a:endParaRPr lang="en-US" sz="2550" dirty="0"/>
           </a:p>
@@ -13419,7 +13089,7 @@
               <a:buNone/>
             </a:pPr>
             <a:r>
-              <a:rPr lang="en-US" sz="1800" b="1" spc="226" kern="0" dirty="0">
+              <a:rPr lang="en-US" sz="1800" b="1" spc="225" kern="0" dirty="0">
                 <a:solidFill>
                   <a:srgbClr val="FFB454"/>
                 </a:solidFill>
@@ -13427,10 +13097,10 @@
                 <a:ea typeface="Be Vietnam Pro" pitchFamily="34" charset="-122"/>
                 <a:cs typeface="Be Vietnam Pro" pitchFamily="34" charset="-120"/>
               </a:rPr>
-              <a:t>DÙNG</a:t>
-            </a:r>
-            <a:r>
-              <a:rPr lang="en-US" sz="1800" b="1" spc="222" kern="0" dirty="0">
+              <a:t>KIỂU</a:t>
+            </a:r>
+            <a:r>
+              <a:rPr lang="en-US" sz="1800" b="1" spc="191" kern="0" dirty="0">
                 <a:solidFill>
                   <a:srgbClr val="FFB454"/>
                 </a:solidFill>
@@ -13438,7 +13108,18 @@
                 <a:ea typeface="Be Vietnam Pro" pitchFamily="34" charset="-122"/>
                 <a:cs typeface="Be Vietnam Pro" pitchFamily="34" charset="-120"/>
               </a:rPr>
-              <a:t> LẠI</a:t>
+              <a:t> THAY</a:t>
+            </a:r>
+            <a:r>
+              <a:rPr lang="en-US" sz="1800" b="1" spc="229" kern="0" dirty="0">
+                <a:solidFill>
+                  <a:srgbClr val="FFB454"/>
+                </a:solidFill>
+                <a:latin typeface="Be Vietnam Pro" pitchFamily="34" charset="0"/>
+                <a:ea typeface="Be Vietnam Pro" pitchFamily="34" charset="-122"/>
+                <a:cs typeface="Be Vietnam Pro" pitchFamily="34" charset="-120"/>
+              </a:rPr>
+              <a:t> CHO</a:t>
             </a:r>
             <a:r>
               <a:rPr lang="en-US" sz="1800" b="1" spc="228" kern="0" dirty="0">
@@ -13449,7 +13130,7 @@
                 <a:ea typeface="Be Vietnam Pro" pitchFamily="34" charset="-122"/>
                 <a:cs typeface="Be Vietnam Pro" pitchFamily="34" charset="-120"/>
               </a:rPr>
-              <a:t> CHO</a:t>
+              <a:t> E</a:t>
             </a:r>
             <a:endParaRPr lang="en-US" sz="1800" dirty="0"/>
           </a:p>
@@ -13484,26 +13165,26 @@
               <a:buNone/>
             </a:pPr>
             <a:r>
-              <a:rPr lang="en-US" sz="2250" b="1" dirty="0" spc="4" kern="0">
-                <a:solidFill>
-                  <a:srgbClr val="F3EEE3"/>
-                </a:solidFill>
-                <a:latin typeface="Be Vietnam Pro" pitchFamily="34" charset="0"/>
-                <a:ea typeface="Be Vietnam Pro" pitchFamily="34" charset="-122"/>
-                <a:cs typeface="Be Vietnam Pro" pitchFamily="34" charset="-120"/>
-              </a:rPr>
-              <a:t>Danh</a:t>
-            </a:r>
-            <a:r>
-              <a:rPr lang="en-US" sz="2250" b="1" dirty="0" spc="3" kern="0">
-                <a:solidFill>
-                  <a:srgbClr val="F3EEE3"/>
-                </a:solidFill>
-                <a:latin typeface="Be Vietnam Pro" pitchFamily="34" charset="0"/>
-                <a:ea typeface="Be Vietnam Pro" pitchFamily="34" charset="-122"/>
-                <a:cs typeface="Be Vietnam Pro" pitchFamily="34" charset="-120"/>
-              </a:rPr>
-              <a:t> sách</a:t>
+              <a:rPr lang="en-US" sz="2250" b="1" dirty="0" spc="1" kern="0">
+                <a:solidFill>
+                  <a:srgbClr val="F3EEE3"/>
+                </a:solidFill>
+                <a:latin typeface="Be Vietnam Pro" pitchFamily="34" charset="0"/>
+                <a:ea typeface="Be Vietnam Pro" pitchFamily="34" charset="-122"/>
+                <a:cs typeface="Be Vietnam Pro" pitchFamily="34" charset="-120"/>
+              </a:rPr>
+              <a:t>Kiểu</a:t>
+            </a:r>
+            <a:r>
+              <a:rPr lang="en-US" sz="2250" b="1" dirty="0" spc="5" kern="0">
+                <a:solidFill>
+                  <a:srgbClr val="F3EEE3"/>
+                </a:solidFill>
+                <a:latin typeface="Be Vietnam Pro" pitchFamily="34" charset="0"/>
+                <a:ea typeface="Be Vietnam Pro" pitchFamily="34" charset="-122"/>
+                <a:cs typeface="Be Vietnam Pro" pitchFamily="34" charset="-120"/>
+              </a:rPr>
+              <a:t> A</a:t>
             </a:r>
             <a:endParaRPr lang="en-US" sz="2250" dirty="0"/>
           </a:p>
@@ -13538,26 +13219,26 @@
               <a:buNone/>
             </a:pPr>
             <a:r>
-              <a:rPr lang="en-US" sz="2250" b="1" dirty="0" spc="-8" kern="0">
-                <a:solidFill>
-                  <a:srgbClr val="F3EEE3"/>
-                </a:solidFill>
-                <a:latin typeface="Be Vietnam Pro" pitchFamily="34" charset="0"/>
-                <a:ea typeface="Be Vietnam Pro" pitchFamily="34" charset="-122"/>
-                <a:cs typeface="Be Vietnam Pro" pitchFamily="34" charset="-120"/>
-              </a:rPr>
-              <a:t>Ngăn</a:t>
-            </a:r>
-            <a:r>
-              <a:rPr lang="en-US" sz="2250" b="1" dirty="0" spc="-19" kern="0">
-                <a:solidFill>
-                  <a:srgbClr val="F3EEE3"/>
-                </a:solidFill>
-                <a:latin typeface="Be Vietnam Pro" pitchFamily="34" charset="0"/>
-                <a:ea typeface="Be Vietnam Pro" pitchFamily="34" charset="-122"/>
-                <a:cs typeface="Be Vietnam Pro" pitchFamily="34" charset="-120"/>
-              </a:rPr>
-              <a:t> xếp</a:t>
+              <a:rPr lang="en-US" sz="2250" b="1" dirty="0" spc="1" kern="0">
+                <a:solidFill>
+                  <a:srgbClr val="F3EEE3"/>
+                </a:solidFill>
+                <a:latin typeface="Be Vietnam Pro" pitchFamily="34" charset="0"/>
+                <a:ea typeface="Be Vietnam Pro" pitchFamily="34" charset="-122"/>
+                <a:cs typeface="Be Vietnam Pro" pitchFamily="34" charset="-120"/>
+              </a:rPr>
+              <a:t>Kiểu</a:t>
+            </a:r>
+            <a:r>
+              <a:rPr lang="en-US" sz="2250" b="1" dirty="0" spc="0" kern="0">
+                <a:solidFill>
+                  <a:srgbClr val="F3EEE3"/>
+                </a:solidFill>
+                <a:latin typeface="Be Vietnam Pro" pitchFamily="34" charset="0"/>
+                <a:ea typeface="Be Vietnam Pro" pitchFamily="34" charset="-122"/>
+                <a:cs typeface="Be Vietnam Pro" pitchFamily="34" charset="-120"/>
+              </a:rPr>
+              <a:t> B</a:t>
             </a:r>
             <a:endParaRPr lang="en-US" sz="2250" dirty="0"/>
           </a:p>
@@ -13592,26 +13273,26 @@
               <a:buNone/>
             </a:pPr>
             <a:r>
-              <a:rPr lang="en-US" sz="2250" b="1" dirty="0" spc="-7" kern="0">
-                <a:solidFill>
-                  <a:srgbClr val="F3EEE3"/>
-                </a:solidFill>
-                <a:latin typeface="Be Vietnam Pro" pitchFamily="34" charset="0"/>
-                <a:ea typeface="Be Vietnam Pro" pitchFamily="34" charset="-122"/>
-                <a:cs typeface="Be Vietnam Pro" pitchFamily="34" charset="-120"/>
-              </a:rPr>
-              <a:t>Hàng</a:t>
-            </a:r>
-            <a:r>
-              <a:rPr lang="en-US" sz="2250" b="1" dirty="0" spc="13" kern="0">
-                <a:solidFill>
-                  <a:srgbClr val="F3EEE3"/>
-                </a:solidFill>
-                <a:latin typeface="Be Vietnam Pro" pitchFamily="34" charset="0"/>
-                <a:ea typeface="Be Vietnam Pro" pitchFamily="34" charset="-122"/>
-                <a:cs typeface="Be Vietnam Pro" pitchFamily="34" charset="-120"/>
-              </a:rPr>
-              <a:t> đợi</a:t>
+              <a:rPr lang="en-US" sz="2250" b="1" dirty="0" spc="1" kern="0">
+                <a:solidFill>
+                  <a:srgbClr val="F3EEE3"/>
+                </a:solidFill>
+                <a:latin typeface="Be Vietnam Pro" pitchFamily="34" charset="0"/>
+                <a:ea typeface="Be Vietnam Pro" pitchFamily="34" charset="-122"/>
+                <a:cs typeface="Be Vietnam Pro" pitchFamily="34" charset="-120"/>
+              </a:rPr>
+              <a:t>Kiểu</a:t>
+            </a:r>
+            <a:r>
+              <a:rPr lang="en-US" sz="2250" b="1" dirty="0" spc="4" kern="0">
+                <a:solidFill>
+                  <a:srgbClr val="F3EEE3"/>
+                </a:solidFill>
+                <a:latin typeface="Be Vietnam Pro" pitchFamily="34" charset="0"/>
+                <a:ea typeface="Be Vietnam Pro" pitchFamily="34" charset="-122"/>
+                <a:cs typeface="Be Vietnam Pro" pitchFamily="34" charset="-120"/>
+              </a:rPr>
+              <a:t> C</a:t>
             </a:r>
             <a:endParaRPr lang="en-US" sz="2250" dirty="0"/>
           </a:p>
@@ -13646,26 +13327,26 @@
               <a:buNone/>
             </a:pPr>
             <a:r>
-              <a:rPr lang="en-US" sz="2250" b="1" dirty="0" spc="4" kern="0">
-                <a:solidFill>
-                  <a:srgbClr val="F3EEE3"/>
-                </a:solidFill>
-                <a:latin typeface="Be Vietnam Pro" pitchFamily="34" charset="0"/>
-                <a:ea typeface="Be Vietnam Pro" pitchFamily="34" charset="-122"/>
-                <a:cs typeface="Be Vietnam Pro" pitchFamily="34" charset="-120"/>
-              </a:rPr>
-              <a:t>Sắp</a:t>
-            </a:r>
-            <a:r>
-              <a:rPr lang="en-US" sz="2250" b="1" dirty="0" spc="-19" kern="0">
-                <a:solidFill>
-                  <a:srgbClr val="F3EEE3"/>
-                </a:solidFill>
-                <a:latin typeface="Be Vietnam Pro" pitchFamily="34" charset="0"/>
-                <a:ea typeface="Be Vietnam Pro" pitchFamily="34" charset="-122"/>
-                <a:cs typeface="Be Vietnam Pro" pitchFamily="34" charset="-120"/>
-              </a:rPr>
-              <a:t> xếp</a:t>
+              <a:rPr lang="en-US" sz="2250" b="1" dirty="0" spc="1" kern="0">
+                <a:solidFill>
+                  <a:srgbClr val="F3EEE3"/>
+                </a:solidFill>
+                <a:latin typeface="Be Vietnam Pro" pitchFamily="34" charset="0"/>
+                <a:ea typeface="Be Vietnam Pro" pitchFamily="34" charset="-122"/>
+                <a:cs typeface="Be Vietnam Pro" pitchFamily="34" charset="-120"/>
+              </a:rPr>
+              <a:t>Kiểu</a:t>
+            </a:r>
+            <a:r>
+              <a:rPr lang="en-US" sz="2250" b="1" dirty="0" spc="3" kern="0">
+                <a:solidFill>
+                  <a:srgbClr val="F3EEE3"/>
+                </a:solidFill>
+                <a:latin typeface="Be Vietnam Pro" pitchFamily="34" charset="0"/>
+                <a:ea typeface="Be Vietnam Pro" pitchFamily="34" charset="-122"/>
+                <a:cs typeface="Be Vietnam Pro" pitchFamily="34" charset="-120"/>
+              </a:rPr>
+              <a:t> D</a:t>
             </a:r>
             <a:endParaRPr lang="en-US" sz="2250" dirty="0"/>
           </a:p>
@@ -13700,26 +13381,26 @@
               <a:buNone/>
             </a:pPr>
             <a:r>
-              <a:rPr lang="en-US" sz="2250" b="1" dirty="0" spc="5" kern="0">
-                <a:solidFill>
-                  <a:srgbClr val="F3EEE3"/>
-                </a:solidFill>
-                <a:latin typeface="Be Vietnam Pro" pitchFamily="34" charset="0"/>
-                <a:ea typeface="Be Vietnam Pro" pitchFamily="34" charset="-122"/>
-                <a:cs typeface="Be Vietnam Pro" pitchFamily="34" charset="-120"/>
-              </a:rPr>
-              <a:t>Tìm</a:t>
-            </a:r>
-            <a:r>
-              <a:rPr lang="en-US" sz="2250" b="1" dirty="0" spc="0" kern="0">
-                <a:solidFill>
-                  <a:srgbClr val="F3EEE3"/>
-                </a:solidFill>
-                <a:latin typeface="Be Vietnam Pro" pitchFamily="34" charset="0"/>
-                <a:ea typeface="Be Vietnam Pro" pitchFamily="34" charset="-122"/>
-                <a:cs typeface="Be Vietnam Pro" pitchFamily="34" charset="-120"/>
-              </a:rPr>
-              <a:t> kiếm</a:t>
+              <a:rPr lang="en-US" sz="2250" b="1" dirty="0" spc="1" kern="0">
+                <a:solidFill>
+                  <a:srgbClr val="F3EEE3"/>
+                </a:solidFill>
+                <a:latin typeface="Be Vietnam Pro" pitchFamily="34" charset="0"/>
+                <a:ea typeface="Be Vietnam Pro" pitchFamily="34" charset="-122"/>
+                <a:cs typeface="Be Vietnam Pro" pitchFamily="34" charset="-120"/>
+              </a:rPr>
+              <a:t>Kiểu</a:t>
+            </a:r>
+            <a:r>
+              <a:rPr lang="en-US" sz="2250" b="1" dirty="0" spc="-1" kern="0">
+                <a:solidFill>
+                  <a:srgbClr val="F3EEE3"/>
+                </a:solidFill>
+                <a:latin typeface="Be Vietnam Pro" pitchFamily="34" charset="0"/>
+                <a:ea typeface="Be Vietnam Pro" pitchFamily="34" charset="-122"/>
+                <a:cs typeface="Be Vietnam Pro" pitchFamily="34" charset="-120"/>
+              </a:rPr>
+              <a:t> E</a:t>
             </a:r>
             <a:endParaRPr lang="en-US" sz="2250" dirty="0"/>
           </a:p>
@@ -14527,7 +14208,7 @@
               <a:t>Phản</a:t>
             </a:r>
             <a:r>
-              <a:rPr lang="en-US" sz="2700" dirty="0" spc="23" kern="0">
+              <a:rPr lang="en-US" sz="2700" dirty="0" spc="18" kern="0">
                 <a:solidFill>
                   <a:srgbClr val="14161C"/>
                 </a:solidFill>
@@ -14535,7 +14216,73 @@
                 <a:ea typeface="Be Vietnam Pro" pitchFamily="34" charset="-122"/>
                 <a:cs typeface="Be Vietnam Pro" pitchFamily="34" charset="-120"/>
               </a:rPr>
-              <a:t> ứng</a:t>
+              <a:t> ứng:</a:t>
+            </a:r>
+            <a:r>
+              <a:rPr lang="en-US" sz="2700" dirty="0" spc="-1" kern="0">
+                <a:solidFill>
+                  <a:srgbClr val="14161C"/>
+                </a:solidFill>
+                <a:latin typeface="Be Vietnam Pro" pitchFamily="34" charset="0"/>
+                <a:ea typeface="Be Vietnam Pro" pitchFamily="34" charset="-122"/>
+                <a:cs typeface="Be Vietnam Pro" pitchFamily="34" charset="-120"/>
+              </a:rPr>
+              <a:t> luồng</a:t>
+            </a:r>
+            <a:r>
+              <a:rPr lang="en-US" sz="2700" dirty="0" spc="0" kern="0">
+                <a:solidFill>
+                  <a:srgbClr val="14161C"/>
+                </a:solidFill>
+                <a:latin typeface="Be Vietnam Pro" pitchFamily="34" charset="0"/>
+                <a:ea typeface="Be Vietnam Pro" pitchFamily="34" charset="-122"/>
+                <a:cs typeface="Be Vietnam Pro" pitchFamily="34" charset="-120"/>
+              </a:rPr>
+              <a:t> có</a:t>
+            </a:r>
+            <a:r>
+              <a:rPr lang="en-US" sz="2700" dirty="0" spc="20" kern="0">
+                <a:solidFill>
+                  <a:srgbClr val="14161C"/>
+                </a:solidFill>
+                <a:latin typeface="Be Vietnam Pro" pitchFamily="34" charset="0"/>
+                <a:ea typeface="Be Vietnam Pro" pitchFamily="34" charset="-122"/>
+                <a:cs typeface="Be Vietnam Pro" pitchFamily="34" charset="-120"/>
+              </a:rPr>
+              <a:t> điều</a:t>
+            </a:r>
+            <a:r>
+              <a:rPr lang="en-US" sz="2700" dirty="0" spc="-5" kern="0">
+                <a:solidFill>
+                  <a:srgbClr val="14161C"/>
+                </a:solidFill>
+                <a:latin typeface="Be Vietnam Pro" pitchFamily="34" charset="0"/>
+                <a:ea typeface="Be Vietnam Pro" pitchFamily="34" charset="-122"/>
+                <a:cs typeface="Be Vietnam Pro" pitchFamily="34" charset="-120"/>
+              </a:rPr>
+              <a:t> tiết</a:t>
+            </a:r>
+            <a:r>
+              <a:rPr lang="en-US" sz="2700" dirty="0" spc="22" kern="0">
+                <a:solidFill>
+                  <a:srgbClr val="14161C"/>
+                </a:solidFill>
+                <a:latin typeface="Be Vietnam Pro" pitchFamily="34" charset="0"/>
+                <a:ea typeface="Be Vietnam Pro" pitchFamily="34" charset="-122"/>
+                <a:cs typeface="Be Vietnam Pro" pitchFamily="34" charset="-120"/>
+              </a:rPr>
+              <a:t> lưu</a:t>
+            </a:r>
+            <a:r>
+              <a:rPr lang="en-US" sz="2700" dirty="0" spc="5" kern="0">
+                <a:solidFill>
+                  <a:srgbClr val="14161C"/>
+                </a:solidFill>
+                <a:latin typeface="Be Vietnam Pro" pitchFamily="34" charset="0"/>
+                <a:ea typeface="Be Vietnam Pro" pitchFamily="34" charset="-122"/>
+                <a:cs typeface="Be Vietnam Pro" pitchFamily="34" charset="-120"/>
+              </a:rPr>
+              <a:t> lượng.</a:t>
             </a:r>
             <a:r>
               <a:rPr lang="en-US" sz="2700" dirty="0" spc="-2" kern="0">
@@ -14546,10 +14293,10 @@
                 <a:ea typeface="Be Vietnam Pro" pitchFamily="34" charset="-122"/>
                 <a:cs typeface="Be Vietnam Pro" pitchFamily="34" charset="-120"/>
               </a:rPr>
-              <a:t> lan</a:t>
-            </a:r>
-            <a:r>
-              <a:rPr lang="en-US" sz="2700" dirty="0" spc="-15" kern="0">
+              <a:t> Đồng</a:t>
+            </a:r>
+            <a:r>
+              <a:rPr lang="en-US" sz="2700" dirty="0" spc="-1" kern="0">
                 <a:solidFill>
                   <a:srgbClr val="14161C"/>
                 </a:solidFill>
@@ -14557,10 +14304,10 @@
                 <a:ea typeface="Be Vietnam Pro" pitchFamily="34" charset="-122"/>
                 <a:cs typeface="Be Vietnam Pro" pitchFamily="34" charset="-120"/>
               </a:rPr>
-              <a:t> truyền</a:t>
-            </a:r>
-            <a:r>
-              <a:rPr lang="en-US" sz="2700" dirty="0" spc="-9" kern="0">
+              <a:t> thời:</a:t>
+            </a:r>
+            <a:r>
+              <a:rPr lang="en-US" sz="2700" dirty="0" spc="2" kern="0">
                 <a:solidFill>
                   <a:srgbClr val="14161C"/>
                 </a:solidFill>
@@ -14568,10 +14315,10 @@
                 <a:ea typeface="Be Vietnam Pro" pitchFamily="34" charset="-122"/>
                 <a:cs typeface="Be Vietnam Pro" pitchFamily="34" charset="-120"/>
               </a:rPr>
-              <a:t> thay</a:t>
-            </a:r>
-            <a:r>
-              <a:rPr lang="en-US" sz="2700" dirty="0" spc="9" kern="0">
+              <a:t> các</a:t>
+            </a:r>
+            <a:r>
+              <a:rPr lang="en-US" sz="2700" dirty="0" spc="-2" kern="0">
                 <a:solidFill>
                   <a:srgbClr val="14161C"/>
                 </a:solidFill>
@@ -14579,7 +14326,29 @@
                 <a:ea typeface="Be Vietnam Pro" pitchFamily="34" charset="-122"/>
                 <a:cs typeface="Be Vietnam Pro" pitchFamily="34" charset="-120"/>
               </a:rPr>
-              <a:t> đổi.</a:t>
+              <a:t> phần</a:t>
+            </a:r>
+            <a:r>
+              <a:rPr lang="en-US" sz="2700" dirty="0" spc="-8" kern="0">
+                <a:solidFill>
+                  <a:srgbClr val="14161C"/>
+                </a:solidFill>
+                <a:latin typeface="Be Vietnam Pro" pitchFamily="34" charset="0"/>
+                <a:ea typeface="Be Vietnam Pro" pitchFamily="34" charset="-122"/>
+                <a:cs typeface="Be Vietnam Pro" pitchFamily="34" charset="-120"/>
+              </a:rPr>
+              <a:t> chạy</a:t>
+            </a:r>
+            <a:r>
+              <a:rPr lang="en-US" sz="2700" dirty="0" spc="10" kern="0">
+                <a:solidFill>
+                  <a:srgbClr val="14161C"/>
+                </a:solidFill>
+                <a:latin typeface="Be Vietnam Pro" pitchFamily="34" charset="0"/>
+                <a:ea typeface="Be Vietnam Pro" pitchFamily="34" charset="-122"/>
+                <a:cs typeface="Be Vietnam Pro" pitchFamily="34" charset="-120"/>
+              </a:rPr>
+              <a:t> độc</a:t>
             </a:r>
             <a:r>
               <a:rPr lang="en-US" sz="2700" dirty="0" spc="-1" kern="0">
@@ -14590,84 +14359,7 @@
                 <a:ea typeface="Be Vietnam Pro" pitchFamily="34" charset="-122"/>
                 <a:cs typeface="Be Vietnam Pro" pitchFamily="34" charset="-120"/>
               </a:rPr>
-              <a:t> Đồng</a:t>
-            </a:r>
-            <a:r>
-              <a:rPr lang="en-US" sz="2700" dirty="0" spc="0" kern="0">
-                <a:solidFill>
-                  <a:srgbClr val="14161C"/>
-                </a:solidFill>
-                <a:latin typeface="Be Vietnam Pro" pitchFamily="34" charset="0"/>
-                <a:ea typeface="Be Vietnam Pro" pitchFamily="34" charset="-122"/>
-                <a:cs typeface="Be Vietnam Pro" pitchFamily="34" charset="-120"/>
-              </a:rPr>
-              <a:t> thời</a:t>
-            </a:r>
-            <a:r>
-              <a:rPr lang="en-US" sz="2700" dirty="0" spc="-9" kern="0">
-                <a:solidFill>
-                  <a:srgbClr val="14161C"/>
-                </a:solidFill>
-                <a:latin typeface="Be Vietnam Pro" pitchFamily="34" charset="0"/>
-                <a:ea typeface="Be Vietnam Pro" pitchFamily="34" charset="-122"/>
-                <a:cs typeface="Be Vietnam Pro" pitchFamily="34" charset="-120"/>
-              </a:rPr>
-              <a:t> chạy</a:t>
-            </a:r>
-            <a:r>
-              <a:rPr lang="en-US" sz="2700" dirty="0" spc="-1" kern="0">
-                <a:solidFill>
-                  <a:srgbClr val="14161C"/>
-                </a:solidFill>
-                <a:latin typeface="Be Vietnam Pro" pitchFamily="34" charset="0"/>
-                <a:ea typeface="Be Vietnam Pro" pitchFamily="34" charset="-122"/>
-                <a:cs typeface="Be Vietnam Pro" pitchFamily="34" charset="-120"/>
-              </a:rPr>
-              <a:t> nhiều</a:t>
-            </a:r>
-            <a:r>
-              <a:rPr lang="en-US" sz="2700" dirty="0" spc="-12" kern="0">
-                <a:solidFill>
-                  <a:srgbClr val="14161C"/>
-                </a:solidFill>
-                <a:latin typeface="Be Vietnam Pro" pitchFamily="34" charset="0"/>
-                <a:ea typeface="Be Vietnam Pro" pitchFamily="34" charset="-122"/>
-                <a:cs typeface="Be Vietnam Pro" pitchFamily="34" charset="-120"/>
-              </a:rPr>
-              <a:t> tác</a:t>
-            </a:r>
-            <a:r>
-              <a:rPr lang="en-US" sz="2700" dirty="0" spc="-1" kern="0">
-                <a:solidFill>
-                  <a:srgbClr val="14161C"/>
-                </a:solidFill>
-                <a:latin typeface="Be Vietnam Pro" pitchFamily="34" charset="0"/>
-                <a:ea typeface="Be Vietnam Pro" pitchFamily="34" charset="-122"/>
-                <a:cs typeface="Be Vietnam Pro" pitchFamily="34" charset="-120"/>
-              </a:rPr>
-              <a:t> vụ</a:t>
-            </a:r>
-            <a:r>
-              <a:rPr lang="en-US" sz="2700" dirty="0" spc="-2" kern="0">
-                <a:solidFill>
-                  <a:srgbClr val="14161C"/>
-                </a:solidFill>
-                <a:latin typeface="Be Vietnam Pro" pitchFamily="34" charset="0"/>
-                <a:ea typeface="Be Vietnam Pro" pitchFamily="34" charset="-122"/>
-                <a:cs typeface="Be Vietnam Pro" pitchFamily="34" charset="-120"/>
-              </a:rPr>
-              <a:t> cùng</a:t>
-            </a:r>
-            <a:r>
-              <a:rPr lang="en-US" sz="2700" dirty="0" spc="-1" kern="0">
-                <a:solidFill>
-                  <a:srgbClr val="14161C"/>
-                </a:solidFill>
-                <a:latin typeface="Be Vietnam Pro" pitchFamily="34" charset="0"/>
-                <a:ea typeface="Be Vietnam Pro" pitchFamily="34" charset="-122"/>
-                <a:cs typeface="Be Vietnam Pro" pitchFamily="34" charset="-120"/>
-              </a:rPr>
-              <a:t> lúc.</a:t>
+              <a:t> lập.</a:t>
             </a:r>
             <a:endParaRPr lang="en-US" sz="2700" dirty="0"/>
           </a:p>
@@ -14878,7 +14570,7 @@
               <a:buNone/>
             </a:pPr>
             <a:r>
-              <a:rPr lang="en-US" sz="2550" dirty="0" spc="0" kern="0">
+              <a:rPr lang="en-US" sz="2550" dirty="0" spc="-23" kern="0">
                 <a:solidFill>
                   <a:srgbClr val="14161C"/>
                 </a:solidFill>
@@ -14886,10 +14578,10 @@
                 <a:ea typeface="Be Vietnam Pro" pitchFamily="34" charset="-122"/>
                 <a:cs typeface="Be Vietnam Pro" pitchFamily="34" charset="-120"/>
               </a:rPr>
-              <a:t>Ứng</a:t>
-            </a:r>
-            <a:r>
-              <a:rPr lang="en-US" sz="2550" dirty="0" spc="-1" kern="0">
+              <a:t>Reactive</a:t>
+            </a:r>
+            <a:r>
+              <a:rPr lang="en-US" sz="2550" dirty="0" spc="-13" kern="0">
                 <a:solidFill>
                   <a:srgbClr val="14161C"/>
                 </a:solidFill>
@@ -14897,10 +14589,10 @@
                 <a:ea typeface="Be Vietnam Pro" pitchFamily="34" charset="-122"/>
                 <a:cs typeface="Be Vietnam Pro" pitchFamily="34" charset="-120"/>
               </a:rPr>
-              <a:t> dụng</a:t>
-            </a:r>
-            <a:r>
-              <a:rPr lang="en-US" sz="2550" dirty="0" spc="5" kern="0">
+              <a:t> Streams:</a:t>
+            </a:r>
+            <a:r>
+              <a:rPr lang="en-US" sz="2550" dirty="0" spc="1" kern="0">
                 <a:solidFill>
                   <a:srgbClr val="14161C"/>
                 </a:solidFill>
@@ -14908,10 +14600,10 @@
                 <a:ea typeface="Be Vietnam Pro" pitchFamily="34" charset="-122"/>
                 <a:cs typeface="Be Vietnam Pro" pitchFamily="34" charset="-120"/>
               </a:rPr>
-              <a:t> hướng</a:t>
-            </a:r>
-            <a:r>
-              <a:rPr lang="en-US" sz="2550" dirty="0" spc="-3" kern="0">
+              <a:t> luồng</a:t>
+            </a:r>
+            <a:r>
+              <a:rPr lang="en-US" sz="2550" dirty="0" spc="-15" kern="0">
                 <a:solidFill>
                   <a:srgbClr val="14161C"/>
                 </a:solidFill>
@@ -14919,10 +14611,10 @@
                 <a:ea typeface="Be Vietnam Pro" pitchFamily="34" charset="-122"/>
                 <a:cs typeface="Be Vietnam Pro" pitchFamily="34" charset="-120"/>
               </a:rPr>
-              <a:t> sự</a:t>
-            </a:r>
-            <a:r>
-              <a:rPr lang="en-US" sz="2550" dirty="0" spc="0" kern="0">
+              <a:t> bất</a:t>
+            </a:r>
+            <a:r>
+              <a:rPr lang="en-US" sz="2550" dirty="0" spc="11" kern="0">
                 <a:solidFill>
                   <a:srgbClr val="14161C"/>
                 </a:solidFill>
@@ -14930,10 +14622,10 @@
                 <a:ea typeface="Be Vietnam Pro" pitchFamily="34" charset="-122"/>
                 <a:cs typeface="Be Vietnam Pro" pitchFamily="34" charset="-120"/>
               </a:rPr>
-              <a:t> kiện</a:t>
-            </a:r>
-            <a:r>
-              <a:rPr lang="en-US" sz="2550" dirty="0" spc="5" kern="0">
+              <a:t> đồng</a:t>
+            </a:r>
+            <a:r>
+              <a:rPr lang="en-US" sz="2550" dirty="0" spc="-4" kern="0">
                 <a:solidFill>
                   <a:srgbClr val="14161C"/>
                 </a:solidFill>
@@ -14941,10 +14633,10 @@
                 <a:ea typeface="Be Vietnam Pro" pitchFamily="34" charset="-122"/>
                 <a:cs typeface="Be Vietnam Pro" pitchFamily="34" charset="-120"/>
               </a:rPr>
-              <a:t> hưởng</a:t>
-            </a:r>
-            <a:r>
-              <a:rPr lang="en-US" sz="2550" dirty="0" spc="0" kern="0">
+              <a:t> bộ,</a:t>
+            </a:r>
+            <a:r>
+              <a:rPr lang="en-US" sz="2550" dirty="0" spc="-15" kern="0">
                 <a:solidFill>
                   <a:srgbClr val="14161C"/>
                 </a:solidFill>
@@ -14952,40 +14644,7 @@
                 <a:ea typeface="Be Vietnam Pro" pitchFamily="34" charset="-122"/>
                 <a:cs typeface="Be Vietnam Pro" pitchFamily="34" charset="-120"/>
               </a:rPr>
-              <a:t> lợi</a:t>
-            </a:r>
-            <a:r>
-              <a:rPr lang="en-US" sz="2550" dirty="0" spc="-1" kern="0">
-                <a:solidFill>
-                  <a:srgbClr val="14161C"/>
-                </a:solidFill>
-                <a:latin typeface="Be Vietnam Pro" pitchFamily="34" charset="0"/>
-                <a:ea typeface="Be Vietnam Pro" pitchFamily="34" charset="-122"/>
-                <a:cs typeface="Be Vietnam Pro" pitchFamily="34" charset="-120"/>
-              </a:rPr>
-              <a:t> từ</a:t>
-            </a:r>
-            <a:r>
-              <a:rPr lang="en-US" sz="2550" dirty="0" spc="0" kern="0">
-                <a:solidFill>
-                  <a:srgbClr val="14161C"/>
-                </a:solidFill>
-                <a:latin typeface="Be Vietnam Pro" pitchFamily="34" charset="0"/>
-                <a:ea typeface="Be Vietnam Pro" pitchFamily="34" charset="-122"/>
-                <a:cs typeface="Be Vietnam Pro" pitchFamily="34" charset="-120"/>
-              </a:rPr>
-              <a:t> mô hình phản</a:t>
-            </a:r>
-            <a:r>
-              <a:rPr lang="en-US" sz="2550" dirty="0" spc="20" kern="0">
-                <a:solidFill>
-                  <a:srgbClr val="14161C"/>
-                </a:solidFill>
-                <a:latin typeface="Be Vietnam Pro" pitchFamily="34" charset="0"/>
-                <a:ea typeface="Be Vietnam Pro" pitchFamily="34" charset="-122"/>
-                <a:cs typeface="Be Vietnam Pro" pitchFamily="34" charset="-120"/>
-              </a:rPr>
-              <a:t> ứng.</a:t>
+              <a:t> backpressure.</a:t>
             </a:r>
             <a:endParaRPr lang="en-US" sz="2550" dirty="0"/>
           </a:p>
@@ -15475,7 +15134,7 @@
               <a:t> ·</a:t>
             </a:r>
             <a:r>
-              <a:rPr lang="en-US" sz="1800" b="1" spc="226" kern="0" dirty="0">
+              <a:rPr lang="en-US" sz="1800" b="1" spc="193" kern="0" dirty="0">
                 <a:solidFill>
                   <a:srgbClr val="0F766E"/>
                 </a:solidFill>
@@ -15483,10 +15142,10 @@
                 <a:ea typeface="Be Vietnam Pro" pitchFamily="34" charset="-122"/>
                 <a:cs typeface="Be Vietnam Pro" pitchFamily="34" charset="-120"/>
               </a:rPr>
-              <a:t> NHIỀU</a:t>
-            </a:r>
-            <a:r>
-              <a:rPr lang="en-US" sz="1800" b="1" spc="165" kern="0" dirty="0">
+              <a:t> CÁC</a:t>
+            </a:r>
+            <a:r>
+              <a:rPr lang="en-US" sz="1800" b="1" spc="225" kern="0" dirty="0">
                 <a:solidFill>
                   <a:srgbClr val="0F766E"/>
                 </a:solidFill>
@@ -15494,10 +15153,10 @@
                 <a:ea typeface="Be Vietnam Pro" pitchFamily="34" charset="-122"/>
                 <a:cs typeface="Be Vietnam Pro" pitchFamily="34" charset="-120"/>
               </a:rPr>
-              <a:t> TÁC</a:t>
-            </a:r>
-            <a:r>
-              <a:rPr lang="en-US" sz="1800" b="1" spc="229" kern="0" dirty="0">
+              <a:t> PHẦN</a:t>
+            </a:r>
+            <a:r>
+              <a:rPr lang="en-US" sz="1800" b="1" spc="192" kern="0" dirty="0">
                 <a:solidFill>
                   <a:srgbClr val="0F766E"/>
                 </a:solidFill>
@@ -15505,10 +15164,10 @@
                 <a:ea typeface="Be Vietnam Pro" pitchFamily="34" charset="-122"/>
                 <a:cs typeface="Be Vietnam Pro" pitchFamily="34" charset="-120"/>
               </a:rPr>
-              <a:t> VỤ</a:t>
-            </a:r>
-            <a:r>
-              <a:rPr lang="en-US" sz="1800" b="1" spc="226" kern="0" dirty="0">
+              <a:t> CHẠY</a:t>
+            </a:r>
+            <a:r>
+              <a:rPr lang="en-US" sz="1800" b="1" spc="227" kern="0" dirty="0">
                 <a:solidFill>
                   <a:srgbClr val="0F766E"/>
                 </a:solidFill>
@@ -15516,10 +15175,10 @@
                 <a:ea typeface="Be Vietnam Pro" pitchFamily="34" charset="-122"/>
                 <a:cs typeface="Be Vietnam Pro" pitchFamily="34" charset="-120"/>
               </a:rPr>
-              <a:t> CÙNG</a:t>
-            </a:r>
-            <a:r>
-              <a:rPr lang="en-US" sz="1800" b="1" spc="227" kern="0" dirty="0">
+              <a:t> ĐỘC</a:t>
+            </a:r>
+            <a:r>
+              <a:rPr lang="en-US" sz="1800" b="1" spc="222" kern="0" dirty="0">
                 <a:solidFill>
                   <a:srgbClr val="0F766E"/>
                 </a:solidFill>
@@ -15527,7 +15186,7 @@
                 <a:ea typeface="Be Vietnam Pro" pitchFamily="34" charset="-122"/>
                 <a:cs typeface="Be Vietnam Pro" pitchFamily="34" charset="-120"/>
               </a:rPr>
-              <a:t> LÚC</a:t>
+              <a:t> LẬP</a:t>
             </a:r>
             <a:endParaRPr lang="en-US" sz="1800" dirty="0"/>
           </a:p>
@@ -15974,7 +15633,7 @@
               <a:buNone/>
             </a:pPr>
             <a:r>
-              <a:rPr lang="en-US" sz="1950" dirty="0" spc="0" kern="0">
+              <a:rPr lang="en-US" sz="1950" dirty="0" spc="-2" kern="0">
                 <a:solidFill>
                   <a:srgbClr val="6B6A66"/>
                 </a:solidFill>
@@ -15982,10 +15641,10 @@
                 <a:ea typeface="Be Vietnam Pro" pitchFamily="34" charset="-122"/>
                 <a:cs typeface="Be Vietnam Pro" pitchFamily="34" charset="-120"/>
               </a:rPr>
-              <a:t>Mục</a:t>
-            </a:r>
-            <a:r>
-              <a:rPr lang="en-US" sz="1950" dirty="0" spc="12" kern="0">
+              <a:t>Cách</a:t>
+            </a:r>
+            <a:r>
+              <a:rPr lang="en-US" sz="1950" dirty="0" spc="-1" kern="0">
                 <a:solidFill>
                   <a:srgbClr val="6B6A66"/>
                 </a:solidFill>
@@ -15993,7 +15652,51 @@
                 <a:ea typeface="Be Vietnam Pro" pitchFamily="34" charset="-122"/>
                 <a:cs typeface="Be Vietnam Pro" pitchFamily="34" charset="-120"/>
               </a:rPr>
-              <a:t> đích:</a:t>
+              <a:t> cấu trúc</a:t>
+            </a:r>
+            <a:r>
+              <a:rPr lang="en-US" sz="1950" dirty="0" spc="4" kern="0">
+                <a:solidFill>
+                  <a:srgbClr val="6B6A66"/>
+                </a:solidFill>
+                <a:latin typeface="Be Vietnam Pro" pitchFamily="34" charset="0"/>
+                <a:ea typeface="Be Vietnam Pro" pitchFamily="34" charset="-122"/>
+                <a:cs typeface="Be Vietnam Pro" pitchFamily="34" charset="-120"/>
+              </a:rPr>
+              <a:t> chương</a:t>
+            </a:r>
+            <a:r>
+              <a:rPr lang="en-US" sz="1950" dirty="0" spc="7" kern="0">
+                <a:solidFill>
+                  <a:srgbClr val="6B6A66"/>
+                </a:solidFill>
+                <a:latin typeface="Be Vietnam Pro" pitchFamily="34" charset="0"/>
+                <a:ea typeface="Be Vietnam Pro" pitchFamily="34" charset="-122"/>
+                <a:cs typeface="Be Vietnam Pro" pitchFamily="34" charset="-120"/>
+              </a:rPr>
+              <a:t> trình,</a:t>
+            </a:r>
+            <a:r>
+              <a:rPr lang="en-US" sz="1950" dirty="0" spc="-3" kern="0">
+                <a:solidFill>
+                  <a:srgbClr val="6B6A66"/>
+                </a:solidFill>
+                <a:latin typeface="Be Vietnam Pro" pitchFamily="34" charset="0"/>
+                <a:ea typeface="Be Vietnam Pro" pitchFamily="34" charset="-122"/>
+                <a:cs typeface="Be Vietnam Pro" pitchFamily="34" charset="-120"/>
+              </a:rPr>
+              <a:t> khác</a:t>
+            </a:r>
+            <a:r>
+              <a:rPr lang="en-US" sz="1950" dirty="0" spc="-1" kern="0">
+                <a:solidFill>
+                  <a:srgbClr val="6B6A66"/>
+                </a:solidFill>
+                <a:latin typeface="Be Vietnam Pro" pitchFamily="34" charset="0"/>
+                <a:ea typeface="Be Vietnam Pro" pitchFamily="34" charset="-122"/>
+                <a:cs typeface="Be Vietnam Pro" pitchFamily="34" charset="-120"/>
+              </a:rPr>
+              <a:t> song</a:t>
             </a:r>
             <a:r>
               <a:rPr lang="en-US" sz="1950" dirty="0" spc="-2" kern="0">
@@ -16004,84 +15707,7 @@
                 <a:ea typeface="Be Vietnam Pro" pitchFamily="34" charset="-122"/>
                 <a:cs typeface="Be Vietnam Pro" pitchFamily="34" charset="-120"/>
               </a:rPr>
-              <a:t> cải</a:t>
-            </a:r>
-            <a:r>
-              <a:rPr lang="en-US" sz="1950" dirty="0" spc="0" kern="0">
-                <a:solidFill>
-                  <a:srgbClr val="6B6A66"/>
-                </a:solidFill>
-                <a:latin typeface="Be Vietnam Pro" pitchFamily="34" charset="0"/>
-                <a:ea typeface="Be Vietnam Pro" pitchFamily="34" charset="-122"/>
-                <a:cs typeface="Be Vietnam Pro" pitchFamily="34" charset="-120"/>
-              </a:rPr>
-              <a:t> thiện</a:t>
-            </a:r>
-            <a:r>
-              <a:rPr lang="en-US" sz="1950" dirty="0" spc="1" kern="0">
-                <a:solidFill>
-                  <a:srgbClr val="6B6A66"/>
-                </a:solidFill>
-                <a:latin typeface="Be Vietnam Pro" pitchFamily="34" charset="0"/>
-                <a:ea typeface="Be Vietnam Pro" pitchFamily="34" charset="-122"/>
-                <a:cs typeface="Be Vietnam Pro" pitchFamily="34" charset="-120"/>
-              </a:rPr>
-              <a:t> hiệu</a:t>
-            </a:r>
-            <a:r>
-              <a:rPr lang="en-US" sz="1950" dirty="0" spc="2" kern="0">
-                <a:solidFill>
-                  <a:srgbClr val="6B6A66"/>
-                </a:solidFill>
-                <a:latin typeface="Be Vietnam Pro" pitchFamily="34" charset="0"/>
-                <a:ea typeface="Be Vietnam Pro" pitchFamily="34" charset="-122"/>
-                <a:cs typeface="Be Vietnam Pro" pitchFamily="34" charset="-120"/>
-              </a:rPr>
-              <a:t> năng,</a:t>
-            </a:r>
-            <a:r>
-              <a:rPr lang="en-US" sz="1950" dirty="0" spc="-9" kern="0">
-                <a:solidFill>
-                  <a:srgbClr val="6B6A66"/>
-                </a:solidFill>
-                <a:latin typeface="Be Vietnam Pro" pitchFamily="34" charset="0"/>
-                <a:ea typeface="Be Vietnam Pro" pitchFamily="34" charset="-122"/>
-                <a:cs typeface="Be Vietnam Pro" pitchFamily="34" charset="-120"/>
-              </a:rPr>
-              <a:t> tận</a:t>
-            </a:r>
-            <a:r>
-              <a:rPr lang="en-US" sz="1950" dirty="0" spc="1" kern="0">
-                <a:solidFill>
-                  <a:srgbClr val="6B6A66"/>
-                </a:solidFill>
-                <a:latin typeface="Be Vietnam Pro" pitchFamily="34" charset="0"/>
-                <a:ea typeface="Be Vietnam Pro" pitchFamily="34" charset="-122"/>
-                <a:cs typeface="Be Vietnam Pro" pitchFamily="34" charset="-120"/>
-              </a:rPr>
-              <a:t> dụng</a:t>
-            </a:r>
-            <a:r>
-              <a:rPr lang="en-US" sz="1950" dirty="0" spc="-11" kern="0">
-                <a:solidFill>
-                  <a:srgbClr val="6B6A66"/>
-                </a:solidFill>
-                <a:latin typeface="Be Vietnam Pro" pitchFamily="34" charset="0"/>
-                <a:ea typeface="Be Vietnam Pro" pitchFamily="34" charset="-122"/>
-                <a:cs typeface="Be Vietnam Pro" pitchFamily="34" charset="-120"/>
-              </a:rPr>
-              <a:t> tài</a:t>
-            </a:r>
-            <a:r>
-              <a:rPr lang="en-US" sz="1950" dirty="0" spc="-7" kern="0">
-                <a:solidFill>
-                  <a:srgbClr val="6B6A66"/>
-                </a:solidFill>
-                <a:latin typeface="Be Vietnam Pro" pitchFamily="34" charset="0"/>
-                <a:ea typeface="Be Vietnam Pro" pitchFamily="34" charset="-122"/>
-                <a:cs typeface="Be Vietnam Pro" pitchFamily="34" charset="-120"/>
-              </a:rPr>
-              <a:t> nguyên.</a:t>
+              <a:t> song.</a:t>
             </a:r>
             <a:endParaRPr lang="en-US" sz="1950" dirty="0"/>
           </a:p>
@@ -16751,7 +16377,7 @@
               <a:t>Python,</a:t>
             </a:r>
             <a:r>
-              <a:rPr lang="en-US" sz="3300" b="1" dirty="0" spc="-27" kern="0">
+              <a:rPr lang="en-US" sz="3300" b="1" dirty="0" spc="1" kern="0">
                 <a:solidFill>
                   <a:srgbClr val="C4C8D6"/>
                 </a:solidFill>
@@ -16759,7 +16385,18 @@
                 <a:ea typeface="Be Vietnam Pro" pitchFamily="34" charset="-122"/>
                 <a:cs typeface="Be Vietnam Pro" pitchFamily="34" charset="-120"/>
               </a:rPr>
-              <a:t> Java,</a:t>
+              <a:t> MDN,</a:t>
+            </a:r>
+            <a:r>
+              <a:rPr lang="en-US" sz="3300" b="1" dirty="0" spc="4" kern="0">
+                <a:solidFill>
+                  <a:srgbClr val="C4C8D6"/>
+                </a:solidFill>
+                <a:latin typeface="Be Vietnam Pro" pitchFamily="34" charset="0"/>
+                <a:ea typeface="Be Vietnam Pro" pitchFamily="34" charset="-122"/>
+                <a:cs typeface="Be Vietnam Pro" pitchFamily="34" charset="-120"/>
+              </a:rPr>
+              <a:t> Spring, JDK,</a:t>
             </a:r>
             <a:r>
               <a:rPr lang="en-US" sz="3300" b="1" dirty="0" spc="-5" kern="0">
@@ -16801,6 +16438,28 @@
               <a:buNone/>
             </a:pPr>
             <a:r>
+              <a:rPr lang="en-US" sz="2700" dirty="0" spc="0" kern="0">
+                <a:solidFill>
+                  <a:srgbClr val="F3EEE3"/>
+                </a:solidFill>
+                <a:latin typeface="Be Vietnam Pro" pitchFamily="34" charset="0"/>
+                <a:ea typeface="Be Vietnam Pro" pitchFamily="34" charset="-122"/>
+                <a:cs typeface="Be Vietnam Pro" pitchFamily="34" charset="-120"/>
+              </a:rPr>
+              <a:t>Mỗi</a:t>
+            </a:r>
+            <a:r>
+              <a:rPr lang="en-US" sz="2700" dirty="0" spc="-2" kern="0">
+                <a:solidFill>
+                  <a:srgbClr val="F3EEE3"/>
+                </a:solidFill>
+                <a:latin typeface="Be Vietnam Pro" pitchFamily="34" charset="0"/>
+                <a:ea typeface="Be Vietnam Pro" pitchFamily="34" charset="-122"/>
+                <a:cs typeface="Be Vietnam Pro" pitchFamily="34" charset="-120"/>
+              </a:rPr>
+              <a:t> mô</a:t>
+            </a:r>
+            <a:r>
               <a:rPr lang="en-US" sz="2700" dirty="0" spc="-3" kern="0">
                 <a:solidFill>
                   <a:srgbClr val="F3EEE3"/>
@@ -16809,7 +16468,51 @@
                 <a:ea typeface="Be Vietnam Pro" pitchFamily="34" charset="-122"/>
                 <a:cs typeface="Be Vietnam Pro" pitchFamily="34" charset="-120"/>
               </a:rPr>
-              <a:t>Bốn mô hình</a:t>
+              <a:t> hình</a:t>
+            </a:r>
+            <a:r>
+              <a:rPr lang="en-US" sz="2700" dirty="0" spc="-15" kern="0">
+                <a:solidFill>
+                  <a:srgbClr val="F3EEE3"/>
+                </a:solidFill>
+                <a:latin typeface="Be Vietnam Pro" pitchFamily="34" charset="0"/>
+                <a:ea typeface="Be Vietnam Pro" pitchFamily="34" charset="-122"/>
+                <a:cs typeface="Be Vietnam Pro" pitchFamily="34" charset="-120"/>
+              </a:rPr>
+              <a:t> gặp</a:t>
+            </a:r>
+            <a:r>
+              <a:rPr lang="en-US" sz="2700" dirty="0" spc="0" kern="0">
+                <a:solidFill>
+                  <a:srgbClr val="F3EEE3"/>
+                </a:solidFill>
+                <a:latin typeface="Be Vietnam Pro" pitchFamily="34" charset="0"/>
+                <a:ea typeface="Be Vietnam Pro" pitchFamily="34" charset="-122"/>
+                <a:cs typeface="Be Vietnam Pro" pitchFamily="34" charset="-120"/>
+              </a:rPr>
+              <a:t> lại</a:t>
+            </a:r>
+            <a:r>
+              <a:rPr lang="en-US" sz="2700" dirty="0" spc="-20" kern="0">
+                <a:solidFill>
+                  <a:srgbClr val="F3EEE3"/>
+                </a:solidFill>
+                <a:latin typeface="Be Vietnam Pro" pitchFamily="34" charset="0"/>
+                <a:ea typeface="Be Vietnam Pro" pitchFamily="34" charset="-122"/>
+                <a:cs typeface="Be Vietnam Pro" pitchFamily="34" charset="-120"/>
+              </a:rPr>
+              <a:t> trong</a:t>
+            </a:r>
+            <a:r>
+              <a:rPr lang="en-US" sz="2700" dirty="0" spc="-13" kern="0">
+                <a:solidFill>
+                  <a:srgbClr val="F3EEE3"/>
+                </a:solidFill>
+                <a:latin typeface="Be Vietnam Pro" pitchFamily="34" charset="0"/>
+                <a:ea typeface="Be Vietnam Pro" pitchFamily="34" charset="-122"/>
+                <a:cs typeface="Be Vietnam Pro" pitchFamily="34" charset="-120"/>
+              </a:rPr>
+              <a:t> tài</a:t>
             </a:r>
             <a:r>
               <a:rPr lang="en-US" sz="2700" dirty="0" spc="-1" kern="0">
@@ -16820,18 +16523,7 @@
                 <a:ea typeface="Be Vietnam Pro" pitchFamily="34" charset="-122"/>
                 <a:cs typeface="Be Vietnam Pro" pitchFamily="34" charset="-120"/>
               </a:rPr>
-              <a:t> của</a:t>
-            </a:r>
-            <a:r>
-              <a:rPr lang="en-US" sz="2700" dirty="0" spc="-5" kern="0">
-                <a:solidFill>
-                  <a:srgbClr val="F3EEE3"/>
-                </a:solidFill>
-                <a:latin typeface="Be Vietnam Pro" pitchFamily="34" charset="0"/>
-                <a:ea typeface="Be Vietnam Pro" pitchFamily="34" charset="-122"/>
-                <a:cs typeface="Be Vietnam Pro" pitchFamily="34" charset="-120"/>
-              </a:rPr>
-              <a:t> bài</a:t>
+              <a:t> liệu</a:t>
             </a:r>
             <a:r>
               <a:rPr lang="en-US" sz="2700" dirty="0" spc="-15" kern="0">
@@ -16842,95 +16534,7 @@
                 <a:ea typeface="Be Vietnam Pro" pitchFamily="34" charset="-122"/>
                 <a:cs typeface="Be Vietnam Pro" pitchFamily="34" charset="-120"/>
               </a:rPr>
-              <a:t> gặp</a:t>
-            </a:r>
-            <a:r>
-              <a:rPr lang="en-US" sz="2700" dirty="0" spc="-1" kern="0">
-                <a:solidFill>
-                  <a:srgbClr val="F3EEE3"/>
-                </a:solidFill>
-                <a:latin typeface="Be Vietnam Pro" pitchFamily="34" charset="0"/>
-                <a:ea typeface="Be Vietnam Pro" pitchFamily="34" charset="-122"/>
-                <a:cs typeface="Be Vietnam Pro" pitchFamily="34" charset="-120"/>
-              </a:rPr>
-              <a:t> lại</a:t>
-            </a:r>
-            <a:r>
-              <a:rPr lang="en-US" sz="2700" dirty="0" spc="-20" kern="0">
-                <a:solidFill>
-                  <a:srgbClr val="F3EEE3"/>
-                </a:solidFill>
-                <a:latin typeface="Be Vietnam Pro" pitchFamily="34" charset="0"/>
-                <a:ea typeface="Be Vietnam Pro" pitchFamily="34" charset="-122"/>
-                <a:cs typeface="Be Vietnam Pro" pitchFamily="34" charset="-120"/>
-              </a:rPr>
-              <a:t> trong</a:t>
-            </a:r>
-            <a:r>
-              <a:rPr lang="en-US" sz="2700" dirty="0" spc="-12" kern="0">
-                <a:solidFill>
-                  <a:srgbClr val="F3EEE3"/>
-                </a:solidFill>
-                <a:latin typeface="Be Vietnam Pro" pitchFamily="34" charset="0"/>
-                <a:ea typeface="Be Vietnam Pro" pitchFamily="34" charset="-122"/>
-                <a:cs typeface="Be Vietnam Pro" pitchFamily="34" charset="-120"/>
-              </a:rPr>
-              <a:t> tài</a:t>
-            </a:r>
-            <a:r>
-              <a:rPr lang="en-US" sz="2700" dirty="0" spc="-1" kern="0">
-                <a:solidFill>
-                  <a:srgbClr val="F3EEE3"/>
-                </a:solidFill>
-                <a:latin typeface="Be Vietnam Pro" pitchFamily="34" charset="0"/>
-                <a:ea typeface="Be Vietnam Pro" pitchFamily="34" charset="-122"/>
-                <a:cs typeface="Be Vietnam Pro" pitchFamily="34" charset="-120"/>
-              </a:rPr>
-              <a:t> liệu</a:t>
-            </a:r>
-            <a:r>
-              <a:rPr lang="en-US" sz="2700" dirty="0" spc="-2" kern="0">
-                <a:solidFill>
-                  <a:srgbClr val="F3EEE3"/>
-                </a:solidFill>
-                <a:latin typeface="Be Vietnam Pro" pitchFamily="34" charset="0"/>
-                <a:ea typeface="Be Vietnam Pro" pitchFamily="34" charset="-122"/>
-                <a:cs typeface="Be Vietnam Pro" pitchFamily="34" charset="-120"/>
-              </a:rPr>
-              <a:t> của</a:t>
-            </a:r>
-            <a:r>
-              <a:rPr lang="en-US" sz="2700" dirty="0" spc="-8" kern="0">
-                <a:solidFill>
-                  <a:srgbClr val="F3EEE3"/>
-                </a:solidFill>
-                <a:latin typeface="Be Vietnam Pro" pitchFamily="34" charset="0"/>
-                <a:ea typeface="Be Vietnam Pro" pitchFamily="34" charset="-122"/>
-                <a:cs typeface="Be Vietnam Pro" pitchFamily="34" charset="-120"/>
-              </a:rPr>
-              <a:t> ba</a:t>
-            </a:r>
-            <a:r>
-              <a:rPr lang="en-US" sz="2700" dirty="0" spc="-14" kern="0">
-                <a:solidFill>
-                  <a:srgbClr val="F3EEE3"/>
-                </a:solidFill>
-                <a:latin typeface="Be Vietnam Pro" pitchFamily="34" charset="0"/>
-                <a:ea typeface="Be Vietnam Pro" pitchFamily="34" charset="-122"/>
-                <a:cs typeface="Be Vietnam Pro" pitchFamily="34" charset="-120"/>
-              </a:rPr>
-              <a:t> ngôn</a:t>
-            </a:r>
-            <a:r>
-              <a:rPr lang="en-US" sz="2700" dirty="0" spc="-3" kern="0">
-                <a:solidFill>
-                  <a:srgbClr val="F3EEE3"/>
-                </a:solidFill>
-                <a:latin typeface="Be Vietnam Pro" pitchFamily="34" charset="0"/>
-                <a:ea typeface="Be Vietnam Pro" pitchFamily="34" charset="-122"/>
-                <a:cs typeface="Be Vietnam Pro" pitchFamily="34" charset="-120"/>
-              </a:rPr>
-              <a:t> ngữ.</a:t>
+              <a:t> gốc.</a:t>
             </a:r>
             <a:endParaRPr lang="en-US" sz="2700" dirty="0"/>
           </a:p>
@@ -19731,6 +19335,28 @@
               <a:t> ngữ</a:t>
             </a:r>
             <a:r>
+              <a:rPr lang="en-US" sz="2550" dirty="0" spc="-1" kern="0">
+                <a:solidFill>
+                  <a:srgbClr val="14161C"/>
+                </a:solidFill>
+                <a:latin typeface="Be Vietnam Pro" pitchFamily="34" charset="0"/>
+                <a:ea typeface="Be Vietnam Pro" pitchFamily="34" charset="-122"/>
+                <a:cs typeface="Be Vietnam Pro" pitchFamily="34" charset="-120"/>
+              </a:rPr>
+              <a:t> của</a:t>
+            </a:r>
+            <a:r>
+              <a:rPr lang="en-US" sz="2550" dirty="0" spc="0" kern="0">
+                <a:solidFill>
+                  <a:srgbClr val="14161C"/>
+                </a:solidFill>
+                <a:latin typeface="Be Vietnam Pro" pitchFamily="34" charset="0"/>
+                <a:ea typeface="Be Vietnam Pro" pitchFamily="34" charset="-122"/>
+                <a:cs typeface="Be Vietnam Pro" pitchFamily="34" charset="-120"/>
+              </a:rPr>
+              <a:t> nguồn</a:t>
+            </a:r>
+            <a:r>
               <a:rPr lang="en-US" sz="2550" dirty="0" spc="1" kern="0">
                 <a:solidFill>
                   <a:srgbClr val="14161C"/>
@@ -19739,10 +19365,10 @@
                 <a:ea typeface="Be Vietnam Pro" pitchFamily="34" charset="-122"/>
                 <a:cs typeface="Be Vietnam Pro" pitchFamily="34" charset="-120"/>
               </a:rPr>
-              <a:t> là</a:t>
-            </a:r>
-            <a:r>
-              <a:rPr lang="en-US" sz="2550" dirty="0" spc="-1" kern="0">
+              <a:t> không</a:t>
+            </a:r>
+            <a:r>
+              <a:rPr lang="en-US" sz="2550" dirty="0" spc="6" kern="0">
                 <a:solidFill>
                   <a:srgbClr val="14161C"/>
                 </a:solidFill>
@@ -19750,10 +19376,10 @@
                 <a:ea typeface="Be Vietnam Pro" pitchFamily="34" charset="-122"/>
                 <a:cs typeface="Be Vietnam Pro" pitchFamily="34" charset="-120"/>
               </a:rPr>
-              <a:t> ví</a:t>
-            </a:r>
-            <a:r>
-              <a:rPr lang="en-US" sz="2550" dirty="0" spc="-2" kern="0">
+              <a:t> được</a:t>
+            </a:r>
+            <a:r>
+              <a:rPr lang="en-US" sz="2550" dirty="0" spc="1" kern="0">
                 <a:solidFill>
                   <a:srgbClr val="14161C"/>
                 </a:solidFill>
@@ -19761,84 +19387,7 @@
                 <a:ea typeface="Be Vietnam Pro" pitchFamily="34" charset="-122"/>
                 <a:cs typeface="Be Vietnam Pro" pitchFamily="34" charset="-120"/>
               </a:rPr>
-              <a:t> dụ của</a:t>
-            </a:r>
-            <a:r>
-              <a:rPr lang="en-US" sz="2550" dirty="0" spc="0" kern="0">
-                <a:solidFill>
-                  <a:srgbClr val="14161C"/>
-                </a:solidFill>
-                <a:latin typeface="Be Vietnam Pro" pitchFamily="34" charset="0"/>
-                <a:ea typeface="Be Vietnam Pro" pitchFamily="34" charset="-122"/>
-                <a:cs typeface="Be Vietnam Pro" pitchFamily="34" charset="-120"/>
-              </a:rPr>
-              <a:t> nguồn,</a:t>
-            </a:r>
-            <a:r>
-              <a:rPr lang="en-US" sz="2550" dirty="0" spc="-3" kern="0">
-                <a:solidFill>
-                  <a:srgbClr val="14161C"/>
-                </a:solidFill>
-                <a:latin typeface="Be Vietnam Pro" pitchFamily="34" charset="0"/>
-                <a:ea typeface="Be Vietnam Pro" pitchFamily="34" charset="-122"/>
-                <a:cs typeface="Be Vietnam Pro" pitchFamily="34" charset="-120"/>
-              </a:rPr>
-              <a:t> bài</a:t>
-            </a:r>
-            <a:r>
-              <a:rPr lang="en-US" sz="2550" dirty="0" spc="6" kern="0">
-                <a:solidFill>
-                  <a:srgbClr val="14161C"/>
-                </a:solidFill>
-                <a:latin typeface="Be Vietnam Pro" pitchFamily="34" charset="0"/>
-                <a:ea typeface="Be Vietnam Pro" pitchFamily="34" charset="-122"/>
-                <a:cs typeface="Be Vietnam Pro" pitchFamily="34" charset="-120"/>
-              </a:rPr>
-              <a:t> chưa</a:t>
-            </a:r>
-            <a:r>
-              <a:rPr lang="en-US" sz="2550" dirty="0" spc="1" kern="0">
-                <a:solidFill>
-                  <a:srgbClr val="14161C"/>
-                </a:solidFill>
-                <a:latin typeface="Be Vietnam Pro" pitchFamily="34" charset="0"/>
-                <a:ea typeface="Be Vietnam Pro" pitchFamily="34" charset="-122"/>
-                <a:cs typeface="Be Vietnam Pro" pitchFamily="34" charset="-120"/>
-              </a:rPr>
-              <a:t> kiểm</a:t>
-            </a:r>
-            <a:r>
-              <a:rPr lang="en-US" sz="2550" dirty="0" spc="-24" kern="0">
-                <a:solidFill>
-                  <a:srgbClr val="14161C"/>
-                </a:solidFill>
-                <a:latin typeface="Be Vietnam Pro" pitchFamily="34" charset="0"/>
-                <a:ea typeface="Be Vietnam Pro" pitchFamily="34" charset="-122"/>
-                <a:cs typeface="Be Vietnam Pro" pitchFamily="34" charset="-120"/>
-              </a:rPr>
-              <a:t> tra</a:t>
-            </a:r>
-            <a:r>
-              <a:rPr lang="en-US" sz="2550" dirty="0" spc="20" kern="0">
-                <a:solidFill>
-                  <a:srgbClr val="14161C"/>
-                </a:solidFill>
-                <a:latin typeface="Be Vietnam Pro" pitchFamily="34" charset="0"/>
-                <a:ea typeface="Be Vietnam Pro" pitchFamily="34" charset="-122"/>
-                <a:cs typeface="Be Vietnam Pro" pitchFamily="34" charset="-120"/>
-              </a:rPr>
-              <a:t> từng</a:t>
-            </a:r>
-            <a:r>
-              <a:rPr lang="en-US" sz="2550" dirty="0" spc="1" kern="0">
-                <a:solidFill>
-                  <a:srgbClr val="14161C"/>
-                </a:solidFill>
-                <a:latin typeface="Be Vietnam Pro" pitchFamily="34" charset="0"/>
-                <a:ea typeface="Be Vietnam Pro" pitchFamily="34" charset="-122"/>
-                <a:cs typeface="Be Vietnam Pro" pitchFamily="34" charset="-120"/>
-              </a:rPr>
-              <a:t> cái.</a:t>
+              <a:t> lặp lại.</a:t>
             </a:r>
             <a:endParaRPr lang="en-US" sz="2550" dirty="0"/>
           </a:p>
@@ -22037,15 +21586,15 @@
               <a:t> nào</a:t>
             </a:r>
             <a:r>
-              <a:rPr lang="en-US" sz="2700" dirty="0" spc="-21" kern="0">
-                <a:solidFill>
-                  <a:srgbClr val="F3EEE3"/>
-                </a:solidFill>
-                <a:latin typeface="Be Vietnam Pro" pitchFamily="34" charset="0"/>
-                <a:ea typeface="Be Vietnam Pro" pitchFamily="34" charset="-122"/>
-                <a:cs typeface="Be Vietnam Pro" pitchFamily="34" charset="-120"/>
-              </a:rPr>
-              <a:t> xem</a:t>
+              <a:rPr lang="en-US" sz="2700" dirty="0" spc="-1" kern="0">
+                <a:solidFill>
+                  <a:srgbClr val="F3EEE3"/>
+                </a:solidFill>
+                <a:latin typeface="Be Vietnam Pro" pitchFamily="34" charset="0"/>
+                <a:ea typeface="Be Vietnam Pro" pitchFamily="34" charset="-122"/>
+                <a:cs typeface="Be Vietnam Pro" pitchFamily="34" charset="-120"/>
+              </a:rPr>
+              <a:t> chia</a:t>
             </a:r>
             <a:r>
               <a:rPr lang="en-US" sz="2700" dirty="0" spc="-2" kern="0">
@@ -22056,7 +21605,51 @@
                 <a:ea typeface="Be Vietnam Pro" pitchFamily="34" charset="-122"/>
                 <a:cs typeface="Be Vietnam Pro" pitchFamily="34" charset="-120"/>
               </a:rPr>
-              <a:t> tính</a:t>
+              <a:t> việc</a:t>
+            </a:r>
+            <a:r>
+              <a:rPr lang="en-US" sz="2700" dirty="0" spc="-1" kern="0">
+                <a:solidFill>
+                  <a:srgbClr val="F3EEE3"/>
+                </a:solidFill>
+                <a:latin typeface="Be Vietnam Pro" pitchFamily="34" charset="0"/>
+                <a:ea typeface="Be Vietnam Pro" pitchFamily="34" charset="-122"/>
+                <a:cs typeface="Be Vietnam Pro" pitchFamily="34" charset="-120"/>
+              </a:rPr>
+              <a:t> thành</a:t>
+            </a:r>
+            <a:r>
+              <a:rPr lang="en-US" sz="2700" dirty="0" spc="2" kern="0">
+                <a:solidFill>
+                  <a:srgbClr val="F3EEE3"/>
+                </a:solidFill>
+                <a:latin typeface="Be Vietnam Pro" pitchFamily="34" charset="0"/>
+                <a:ea typeface="Be Vietnam Pro" pitchFamily="34" charset="-122"/>
+                <a:cs typeface="Be Vietnam Pro" pitchFamily="34" charset="-120"/>
+              </a:rPr>
+              <a:t> các</a:t>
+            </a:r>
+            <a:r>
+              <a:rPr lang="en-US" sz="2700" dirty="0" spc="-1" kern="0">
+                <a:solidFill>
+                  <a:srgbClr val="F3EEE3"/>
+                </a:solidFill>
+                <a:latin typeface="Be Vietnam Pro" pitchFamily="34" charset="0"/>
+                <a:ea typeface="Be Vietnam Pro" pitchFamily="34" charset="-122"/>
+                <a:cs typeface="Be Vietnam Pro" pitchFamily="34" charset="-120"/>
+              </a:rPr>
+              <a:t> hàm chỉ</a:t>
+            </a:r>
+            <a:r>
+              <a:rPr lang="en-US" sz="2700" dirty="0" spc="-2" kern="0">
+                <a:solidFill>
+                  <a:srgbClr val="F3EEE3"/>
+                </a:solidFill>
+                <a:latin typeface="Be Vietnam Pro" pitchFamily="34" charset="0"/>
+                <a:ea typeface="Be Vietnam Pro" pitchFamily="34" charset="-122"/>
+                <a:cs typeface="Be Vietnam Pro" pitchFamily="34" charset="-120"/>
+              </a:rPr>
+              <a:t> nhận</a:t>
             </a:r>
             <a:r>
               <a:rPr lang="en-US" sz="2700" dirty="0" spc="-14" kern="0">
@@ -22067,106 +21660,40 @@
                 <a:ea typeface="Be Vietnam Pro" pitchFamily="34" charset="-122"/>
                 <a:cs typeface="Be Vietnam Pro" pitchFamily="34" charset="-120"/>
               </a:rPr>
-              <a:t> toán</a:t>
-            </a:r>
-            <a:r>
-              <a:rPr lang="en-US" sz="2700" dirty="0" spc="-1" kern="0">
-                <a:solidFill>
-                  <a:srgbClr val="F3EEE3"/>
-                </a:solidFill>
-                <a:latin typeface="Be Vietnam Pro" pitchFamily="34" charset="0"/>
-                <a:ea typeface="Be Vietnam Pro" pitchFamily="34" charset="-122"/>
-                <a:cs typeface="Be Vietnam Pro" pitchFamily="34" charset="-120"/>
-              </a:rPr>
-              <a:t> là tính giá</a:t>
-            </a:r>
-            <a:r>
-              <a:rPr lang="en-US" sz="2700" dirty="0" spc="11" kern="0">
-                <a:solidFill>
-                  <a:srgbClr val="F3EEE3"/>
-                </a:solidFill>
-                <a:latin typeface="Be Vietnam Pro" pitchFamily="34" charset="0"/>
-                <a:ea typeface="Be Vietnam Pro" pitchFamily="34" charset="-122"/>
-                <a:cs typeface="Be Vietnam Pro" pitchFamily="34" charset="-120"/>
-              </a:rPr>
-              <a:t> trị</a:t>
-            </a:r>
-            <a:r>
-              <a:rPr lang="en-US" sz="2700" dirty="0" spc="0" kern="0">
-                <a:solidFill>
-                  <a:srgbClr val="F3EEE3"/>
-                </a:solidFill>
-                <a:latin typeface="Be Vietnam Pro" pitchFamily="34" charset="0"/>
-                <a:ea typeface="Be Vietnam Pro" pitchFamily="34" charset="-122"/>
-                <a:cs typeface="Be Vietnam Pro" pitchFamily="34" charset="-120"/>
-              </a:rPr>
-              <a:t> hàm,</a:t>
-            </a:r>
-            <a:r>
-              <a:rPr lang="en-US" sz="2700" dirty="0" spc="29" kern="0">
-                <a:solidFill>
-                  <a:srgbClr val="F3EEE3"/>
-                </a:solidFill>
-                <a:latin typeface="Be Vietnam Pro" pitchFamily="34" charset="0"/>
-                <a:ea typeface="Be Vietnam Pro" pitchFamily="34" charset="-122"/>
-                <a:cs typeface="Be Vietnam Pro" pitchFamily="34" charset="-120"/>
-              </a:rPr>
-              <a:t> ưu</a:t>
-            </a:r>
-            <a:r>
-              <a:rPr lang="en-US" sz="2700" dirty="0" spc="-2" kern="0">
-                <a:solidFill>
-                  <a:srgbClr val="F3EEE3"/>
-                </a:solidFill>
-                <a:latin typeface="Be Vietnam Pro" pitchFamily="34" charset="0"/>
-                <a:ea typeface="Be Vietnam Pro" pitchFamily="34" charset="-122"/>
-                <a:cs typeface="Be Vietnam Pro" pitchFamily="34" charset="-120"/>
-              </a:rPr>
-              <a:t> tiên</a:t>
-            </a:r>
-            <a:r>
-              <a:rPr lang="en-US" sz="2700" dirty="0" spc="-3" kern="0">
-                <a:solidFill>
-                  <a:srgbClr val="F3EEE3"/>
-                </a:solidFill>
-                <a:latin typeface="Be Vietnam Pro" pitchFamily="34" charset="0"/>
-                <a:ea typeface="Be Vietnam Pro" pitchFamily="34" charset="-122"/>
-                <a:cs typeface="Be Vietnam Pro" pitchFamily="34" charset="-120"/>
-              </a:rPr>
-              <a:t> dữ</a:t>
-            </a:r>
-            <a:r>
-              <a:rPr lang="en-US" sz="2700" dirty="0" spc="-1" kern="0">
-                <a:solidFill>
-                  <a:srgbClr val="F3EEE3"/>
-                </a:solidFill>
-                <a:latin typeface="Be Vietnam Pro" pitchFamily="34" charset="0"/>
-                <a:ea typeface="Be Vietnam Pro" pitchFamily="34" charset="-122"/>
-                <a:cs typeface="Be Vietnam Pro" pitchFamily="34" charset="-120"/>
-              </a:rPr>
-              <a:t> liệu</a:t>
-            </a:r>
-            <a:r>
-              <a:rPr lang="en-US" sz="2700" dirty="0" spc="-17" kern="0">
-                <a:solidFill>
-                  <a:srgbClr val="F3EEE3"/>
-                </a:solidFill>
-                <a:latin typeface="Be Vietnam Pro" pitchFamily="34" charset="0"/>
-                <a:ea typeface="Be Vietnam Pro" pitchFamily="34" charset="-122"/>
-                <a:cs typeface="Be Vietnam Pro" pitchFamily="34" charset="-120"/>
-              </a:rPr>
-              <a:t> bất</a:t>
-            </a:r>
-            <a:r>
-              <a:rPr lang="en-US" sz="2700" dirty="0" spc="-3" kern="0">
-                <a:solidFill>
-                  <a:srgbClr val="F3EEE3"/>
-                </a:solidFill>
-                <a:latin typeface="Be Vietnam Pro" pitchFamily="34" charset="0"/>
-                <a:ea typeface="Be Vietnam Pro" pitchFamily="34" charset="-122"/>
-                <a:cs typeface="Be Vietnam Pro" pitchFamily="34" charset="-120"/>
-              </a:rPr>
-              <a:t> biến?</a:t>
+              <a:t> vào</a:t>
+            </a:r>
+            <a:r>
+              <a:rPr lang="en-US" sz="2700" dirty="0" spc="-18" kern="0">
+                <a:solidFill>
+                  <a:srgbClr val="F3EEE3"/>
+                </a:solidFill>
+                <a:latin typeface="Be Vietnam Pro" pitchFamily="34" charset="0"/>
+                <a:ea typeface="Be Vietnam Pro" pitchFamily="34" charset="-122"/>
+                <a:cs typeface="Be Vietnam Pro" pitchFamily="34" charset="-120"/>
+              </a:rPr>
+              <a:t> và</a:t>
+            </a:r>
+            <a:r>
+              <a:rPr lang="en-US" sz="2700" dirty="0" spc="-27" kern="0">
+                <a:solidFill>
+                  <a:srgbClr val="F3EEE3"/>
+                </a:solidFill>
+                <a:latin typeface="Be Vietnam Pro" pitchFamily="34" charset="0"/>
+                <a:ea typeface="Be Vietnam Pro" pitchFamily="34" charset="-122"/>
+                <a:cs typeface="Be Vietnam Pro" pitchFamily="34" charset="-120"/>
+              </a:rPr>
+              <a:t> trả</a:t>
+            </a:r>
+            <a:r>
+              <a:rPr lang="en-US" sz="2700" dirty="0" spc="-31" kern="0">
+                <a:solidFill>
+                  <a:srgbClr val="F3EEE3"/>
+                </a:solidFill>
+                <a:latin typeface="Be Vietnam Pro" pitchFamily="34" charset="0"/>
+                <a:ea typeface="Be Vietnam Pro" pitchFamily="34" charset="-122"/>
+                <a:cs typeface="Be Vietnam Pro" pitchFamily="34" charset="-120"/>
+              </a:rPr>
+              <a:t> ra?</a:t>
             </a:r>
             <a:endParaRPr lang="en-US" sz="2700" dirty="0"/>
           </a:p>
@@ -22714,6 +22241,39 @@
               <a:buNone/>
             </a:pPr>
             <a:r>
+              <a:rPr lang="en-US" sz="2250" dirty="0" spc="-5" kern="0">
+                <a:solidFill>
+                  <a:srgbClr val="C4C8D6"/>
+                </a:solidFill>
+                <a:latin typeface="Be Vietnam Pro" pitchFamily="34" charset="0"/>
+                <a:ea typeface="Be Vietnam Pro" pitchFamily="34" charset="-122"/>
+                <a:cs typeface="Be Vietnam Pro" pitchFamily="34" charset="-120"/>
+              </a:rPr>
+              <a:t>Chia</a:t>
+            </a:r>
+            <a:r>
+              <a:rPr lang="en-US" sz="2250" dirty="0" spc="-3" kern="0">
+                <a:solidFill>
+                  <a:srgbClr val="C4C8D6"/>
+                </a:solidFill>
+                <a:latin typeface="Be Vietnam Pro" pitchFamily="34" charset="0"/>
+                <a:ea typeface="Be Vietnam Pro" pitchFamily="34" charset="-122"/>
+                <a:cs typeface="Be Vietnam Pro" pitchFamily="34" charset="-120"/>
+              </a:rPr>
+              <a:t> việc</a:t>
+            </a:r>
+            <a:r>
+              <a:rPr lang="en-US" sz="2250" dirty="0" spc="0" kern="0">
+                <a:solidFill>
+                  <a:srgbClr val="C4C8D6"/>
+                </a:solidFill>
+                <a:latin typeface="Be Vietnam Pro" pitchFamily="34" charset="0"/>
+                <a:ea typeface="Be Vietnam Pro" pitchFamily="34" charset="-122"/>
+                <a:cs typeface="Be Vietnam Pro" pitchFamily="34" charset="-120"/>
+              </a:rPr>
+              <a:t> thành</a:t>
+            </a:r>
+            <a:r>
               <a:rPr lang="en-US" sz="2250" dirty="0" spc="-1" kern="0">
                 <a:solidFill>
                   <a:srgbClr val="C4C8D6"/>
@@ -22722,10 +22282,10 @@
                 <a:ea typeface="Be Vietnam Pro" pitchFamily="34" charset="-122"/>
                 <a:cs typeface="Be Vietnam Pro" pitchFamily="34" charset="-120"/>
               </a:rPr>
-              <a:t>Tính</a:t>
-            </a:r>
-            <a:r>
-              <a:rPr lang="en-US" sz="2250" dirty="0" spc="-2" kern="0">
+              <a:t> hàm</a:t>
+            </a:r>
+            <a:r>
+              <a:rPr lang="en-US" sz="2250" dirty="0" spc="0" kern="0">
                 <a:solidFill>
                   <a:srgbClr val="C4C8D6"/>
                 </a:solidFill>
@@ -22733,10 +22293,10 @@
                 <a:ea typeface="Be Vietnam Pro" pitchFamily="34" charset="-122"/>
                 <a:cs typeface="Be Vietnam Pro" pitchFamily="34" charset="-120"/>
               </a:rPr>
-              <a:t> giá</a:t>
-            </a:r>
-            <a:r>
-              <a:rPr lang="en-US" sz="2250" dirty="0" spc="10" kern="0">
+              <a:t> nhận</a:t>
+            </a:r>
+            <a:r>
+              <a:rPr lang="en-US" sz="2250" dirty="0" spc="-12" kern="0">
                 <a:solidFill>
                   <a:srgbClr val="C4C8D6"/>
                 </a:solidFill>
@@ -22744,10 +22304,10 @@
                 <a:ea typeface="Be Vietnam Pro" pitchFamily="34" charset="-122"/>
                 <a:cs typeface="Be Vietnam Pro" pitchFamily="34" charset="-120"/>
               </a:rPr>
-              <a:t> trị</a:t>
-            </a:r>
-            <a:r>
-              <a:rPr lang="en-US" sz="2250" dirty="0" spc="2" kern="0">
+              <a:t> vào,</a:t>
+            </a:r>
+            <a:r>
+              <a:rPr lang="en-US" sz="2250" dirty="0" spc="-24" kern="0">
                 <a:solidFill>
                   <a:srgbClr val="C4C8D6"/>
                 </a:solidFill>
@@ -22755,10 +22315,10 @@
                 <a:ea typeface="Be Vietnam Pro" pitchFamily="34" charset="-122"/>
                 <a:cs typeface="Be Vietnam Pro" pitchFamily="34" charset="-120"/>
               </a:rPr>
-              <a:t> các</a:t>
-            </a:r>
-            <a:r>
-              <a:rPr lang="en-US" sz="2250" dirty="0" spc="-1" kern="0">
+              <a:t> trả</a:t>
+            </a:r>
+            <a:r>
+              <a:rPr lang="en-US" sz="2250" dirty="0" spc="-22" kern="0">
                 <a:solidFill>
                   <a:srgbClr val="C4C8D6"/>
                 </a:solidFill>
@@ -22766,84 +22326,7 @@
                 <a:ea typeface="Be Vietnam Pro" pitchFamily="34" charset="-122"/>
                 <a:cs typeface="Be Vietnam Pro" pitchFamily="34" charset="-120"/>
               </a:rPr>
-              <a:t> hàm</a:t>
-            </a:r>
-            <a:r>
-              <a:rPr lang="en-US" sz="2250" dirty="0" spc="-12" kern="0">
-                <a:solidFill>
-                  <a:srgbClr val="C4C8D6"/>
-                </a:solidFill>
-                <a:latin typeface="Be Vietnam Pro" pitchFamily="34" charset="0"/>
-                <a:ea typeface="Be Vietnam Pro" pitchFamily="34" charset="-122"/>
-                <a:cs typeface="Be Vietnam Pro" pitchFamily="34" charset="-120"/>
-              </a:rPr>
-              <a:t> toán</a:t>
-            </a:r>
-            <a:r>
-              <a:rPr lang="en-US" sz="2250" dirty="0" spc="-1" kern="0">
-                <a:solidFill>
-                  <a:srgbClr val="C4C8D6"/>
-                </a:solidFill>
-                <a:latin typeface="Be Vietnam Pro" pitchFamily="34" charset="0"/>
-                <a:ea typeface="Be Vietnam Pro" pitchFamily="34" charset="-122"/>
-                <a:cs typeface="Be Vietnam Pro" pitchFamily="34" charset="-120"/>
-              </a:rPr>
-              <a:t> học,</a:t>
-            </a:r>
-            <a:r>
-              <a:rPr lang="en-US" sz="2250" dirty="0" spc="0" kern="0">
-                <a:solidFill>
-                  <a:srgbClr val="C4C8D6"/>
-                </a:solidFill>
-                <a:latin typeface="Be Vietnam Pro" pitchFamily="34" charset="0"/>
-                <a:ea typeface="Be Vietnam Pro" pitchFamily="34" charset="-122"/>
-                <a:cs typeface="Be Vietnam Pro" pitchFamily="34" charset="-120"/>
-              </a:rPr>
-              <a:t> nhấn mạnh</a:t>
-            </a:r>
-            <a:r>
-              <a:rPr lang="en-US" sz="2250" dirty="0" spc="4" kern="0">
-                <a:solidFill>
-                  <a:srgbClr val="C4C8D6"/>
-                </a:solidFill>
-                <a:latin typeface="Be Vietnam Pro" pitchFamily="34" charset="0"/>
-                <a:ea typeface="Be Vietnam Pro" pitchFamily="34" charset="-122"/>
-                <a:cs typeface="Be Vietnam Pro" pitchFamily="34" charset="-120"/>
-              </a:rPr>
-              <a:t> dữ</a:t>
-            </a:r>
-            <a:r>
-              <a:rPr lang="en-US" sz="2250" dirty="0" spc="-2" kern="0">
-                <a:solidFill>
-                  <a:srgbClr val="C4C8D6"/>
-                </a:solidFill>
-                <a:latin typeface="Be Vietnam Pro" pitchFamily="34" charset="0"/>
-                <a:ea typeface="Be Vietnam Pro" pitchFamily="34" charset="-122"/>
-                <a:cs typeface="Be Vietnam Pro" pitchFamily="34" charset="-120"/>
-              </a:rPr>
-              <a:t> liệu</a:t>
-            </a:r>
-            <a:r>
-              <a:rPr lang="en-US" sz="2250" dirty="0" spc="-12" kern="0">
-                <a:solidFill>
-                  <a:srgbClr val="C4C8D6"/>
-                </a:solidFill>
-                <a:latin typeface="Be Vietnam Pro" pitchFamily="34" charset="0"/>
-                <a:ea typeface="Be Vietnam Pro" pitchFamily="34" charset="-122"/>
-                <a:cs typeface="Be Vietnam Pro" pitchFamily="34" charset="-120"/>
-              </a:rPr>
-              <a:t> bất</a:t>
-            </a:r>
-            <a:r>
-              <a:rPr lang="en-US" sz="2250" dirty="0" spc="1" kern="0">
-                <a:solidFill>
-                  <a:srgbClr val="C4C8D6"/>
-                </a:solidFill>
-                <a:latin typeface="Be Vietnam Pro" pitchFamily="34" charset="0"/>
-                <a:ea typeface="Be Vietnam Pro" pitchFamily="34" charset="-122"/>
-                <a:cs typeface="Be Vietnam Pro" pitchFamily="34" charset="-120"/>
-              </a:rPr>
-              <a:t> biến.</a:t>
+              <a:t> ra.</a:t>
             </a:r>
             <a:endParaRPr lang="en-US" sz="2250" dirty="0"/>
           </a:p>
@@ -23424,10 +22907,10 @@
                 <a:ea typeface="Be Vietnam Pro" pitchFamily="34" charset="-122"/>
                 <a:cs typeface="Be Vietnam Pro" pitchFamily="34" charset="-120"/>
               </a:rPr>
-              <a:t>Nêu</a:t>
-            </a:r>
-            <a:r>
-              <a:rPr lang="en-US" sz="2250" dirty="0" spc="-1" kern="0">
+              <a:t>Nêu bài</a:t>
+            </a:r>
+            <a:r>
+              <a:rPr lang="en-US" sz="2250" dirty="0" spc="-11" kern="0">
                 <a:solidFill>
                   <a:srgbClr val="C4C8D6"/>
                 </a:solidFill>
@@ -23435,18 +22918,7 @@
                 <a:ea typeface="Be Vietnam Pro" pitchFamily="34" charset="-122"/>
                 <a:cs typeface="Be Vietnam Pro" pitchFamily="34" charset="-120"/>
               </a:rPr>
-              <a:t> cái</a:t>
-            </a:r>
-            <a:r>
-              <a:rPr lang="en-US" sz="2250" dirty="0" spc="2" kern="0">
-                <a:solidFill>
-                  <a:srgbClr val="C4C8D6"/>
-                </a:solidFill>
-                <a:latin typeface="Be Vietnam Pro" pitchFamily="34" charset="0"/>
-                <a:ea typeface="Be Vietnam Pro" pitchFamily="34" charset="-122"/>
-                <a:cs typeface="Be Vietnam Pro" pitchFamily="34" charset="-120"/>
-              </a:rPr>
-              <a:t> cần có,</a:t>
+              <a:t> toán,</a:t>
             </a:r>
             <a:endParaRPr lang="en-US" sz="2250" dirty="0"/>
           </a:p>
@@ -23455,7 +22927,7 @@
               <a:buNone/>
             </a:pPr>
             <a:r>
-              <a:rPr lang="en-US" sz="2250" dirty="0" spc="0" kern="0">
+              <a:rPr lang="en-US" sz="2250" dirty="0" spc="21" kern="0">
                 <a:solidFill>
                   <a:srgbClr val="C4C8D6"/>
                 </a:solidFill>
@@ -23463,7 +22935,18 @@
                 <a:ea typeface="Be Vietnam Pro" pitchFamily="34" charset="-122"/>
                 <a:cs typeface="Be Vietnam Pro" pitchFamily="34" charset="-120"/>
               </a:rPr>
-              <a:t>không nêu</a:t>
+              <a:t>để</a:t>
+            </a:r>
+            <a:r>
+              <a:rPr lang="en-US" sz="2250" dirty="0" spc="-1" kern="0">
+                <a:solidFill>
+                  <a:srgbClr val="C4C8D6"/>
+                </a:solidFill>
+                <a:latin typeface="Be Vietnam Pro" pitchFamily="34" charset="0"/>
+                <a:ea typeface="Be Vietnam Pro" pitchFamily="34" charset="-122"/>
+                <a:cs typeface="Be Vietnam Pro" pitchFamily="34" charset="-120"/>
+              </a:rPr>
+              <a:t> cài</a:t>
             </a:r>
             <a:r>
               <a:rPr lang="en-US" sz="2250" dirty="0" spc="1" kern="0">
@@ -23474,10 +22957,10 @@
                 <a:ea typeface="Be Vietnam Pro" pitchFamily="34" charset="-122"/>
                 <a:cs typeface="Be Vietnam Pro" pitchFamily="34" charset="-120"/>
               </a:rPr>
-              <a:t> luồng</a:t>
-            </a:r>
-            <a:r>
-              <a:rPr lang="en-US" sz="2250" dirty="0" spc="17" kern="0">
+              <a:t> đặt</a:t>
+            </a:r>
+            <a:r>
+              <a:rPr lang="en-US" sz="2250" dirty="0" spc="3" kern="0">
                 <a:solidFill>
                   <a:srgbClr val="C4C8D6"/>
                 </a:solidFill>
@@ -23485,10 +22968,10 @@
                 <a:ea typeface="Be Vietnam Pro" pitchFamily="34" charset="-122"/>
                 <a:cs typeface="Be Vietnam Pro" pitchFamily="34" charset="-120"/>
               </a:rPr>
-              <a:t> điều</a:t>
-            </a:r>
-            <a:r>
-              <a:rPr lang="en-US" sz="2250" dirty="0" spc="0" kern="0">
+              <a:t> chọn</a:t>
+            </a:r>
+            <a:r>
+              <a:rPr lang="en-US" sz="2250" dirty="0" spc="1" kern="0">
                 <a:solidFill>
                   <a:srgbClr val="C4C8D6"/>
                 </a:solidFill>
@@ -23496,7 +22979,18 @@
                 <a:ea typeface="Be Vietnam Pro" pitchFamily="34" charset="-122"/>
                 <a:cs typeface="Be Vietnam Pro" pitchFamily="34" charset="-120"/>
               </a:rPr>
-              <a:t> khiển.</a:t>
+              <a:t> cách</a:t>
+            </a:r>
+            <a:r>
+              <a:rPr lang="en-US" sz="2250" dirty="0" spc="-1" kern="0">
+                <a:solidFill>
+                  <a:srgbClr val="C4C8D6"/>
+                </a:solidFill>
+                <a:latin typeface="Be Vietnam Pro" pitchFamily="34" charset="0"/>
+                <a:ea typeface="Be Vietnam Pro" pitchFamily="34" charset="-122"/>
+                <a:cs typeface="Be Vietnam Pro" pitchFamily="34" charset="-120"/>
+              </a:rPr>
+              <a:t> giải.</a:t>
             </a:r>
             <a:endParaRPr lang="en-US" sz="2250" dirty="0"/>
           </a:p>
@@ -23527,7 +23021,7 @@
               <a:buNone/>
             </a:pPr>
             <a:r>
-              <a:rPr lang="en-US" sz="2250" dirty="0" spc="0" kern="0">
+              <a:rPr lang="en-US" sz="2250" dirty="0" spc="-5" kern="0">
                 <a:solidFill>
                   <a:srgbClr val="C4C8D6"/>
                 </a:solidFill>
@@ -23535,10 +23029,10 @@
                 <a:ea typeface="Be Vietnam Pro" pitchFamily="34" charset="-122"/>
                 <a:cs typeface="Be Vietnam Pro" pitchFamily="34" charset="-120"/>
               </a:rPr>
-              <a:t>Nguồn</a:t>
-            </a:r>
-            <a:r>
-              <a:rPr lang="en-US" sz="2250" dirty="0" spc="1" kern="0">
+              <a:t>Hàm</a:t>
+            </a:r>
+            <a:r>
+              <a:rPr lang="en-US" sz="2250" dirty="0" spc="-16" kern="0">
                 <a:solidFill>
                   <a:srgbClr val="C4C8D6"/>
                 </a:solidFill>
@@ -23546,10 +23040,10 @@
                 <a:ea typeface="Be Vietnam Pro" pitchFamily="34" charset="-122"/>
                 <a:cs typeface="Be Vietnam Pro" pitchFamily="34" charset="-120"/>
               </a:rPr>
-              <a:t> nói</a:t>
-            </a:r>
-            <a:r>
-              <a:rPr lang="en-US" sz="2250" dirty="0" spc="-1" kern="0">
+              <a:t> và</a:t>
+            </a:r>
+            <a:r>
+              <a:rPr lang="en-US" sz="2250" dirty="0" spc="-2" kern="0">
                 <a:solidFill>
                   <a:srgbClr val="C4C8D6"/>
                 </a:solidFill>
@@ -23557,10 +23051,10 @@
                 <a:ea typeface="Be Vietnam Pro" pitchFamily="34" charset="-122"/>
                 <a:cs typeface="Be Vietnam Pro" pitchFamily="34" charset="-120"/>
               </a:rPr>
-              <a:t> hàm là</a:t>
-            </a:r>
-            <a:r>
-              <a:rPr lang="en-US" sz="2250" dirty="0" spc="-4" kern="0">
+              <a:t> khai</a:t>
+            </a:r>
+            <a:r>
+              <a:rPr lang="en-US" sz="2250" dirty="0" spc="-3" kern="0">
                 <a:solidFill>
                   <a:srgbClr val="C4C8D6"/>
                 </a:solidFill>
@@ -23568,10 +23062,10 @@
                 <a:ea typeface="Be Vietnam Pro" pitchFamily="34" charset="-122"/>
                 <a:cs typeface="Be Vietnam Pro" pitchFamily="34" charset="-120"/>
               </a:rPr>
-              <a:t> một</a:t>
-            </a:r>
-            <a:r>
-              <a:rPr lang="en-US" sz="2250" dirty="0" spc="0" kern="0">
+              <a:t> báo</a:t>
+            </a:r>
+            <a:r>
+              <a:rPr lang="en-US" sz="2250" dirty="0" spc="2" kern="0">
                 <a:solidFill>
                   <a:srgbClr val="C4C8D6"/>
                 </a:solidFill>
@@ -23579,7 +23073,7 @@
                 <a:ea typeface="Be Vietnam Pro" pitchFamily="34" charset="-122"/>
                 <a:cs typeface="Be Vietnam Pro" pitchFamily="34" charset="-120"/>
               </a:rPr>
-              <a:t> dạng</a:t>
+              <a:t> cùng nhóm</a:t>
             </a:r>
             <a:endParaRPr lang="en-US" sz="2250" dirty="0"/>
           </a:p>
@@ -23588,7 +23082,7 @@
               <a:buNone/>
             </a:pPr>
             <a:r>
-              <a:rPr lang="en-US" sz="2250" dirty="0" spc="3" kern="0">
+              <a:rPr lang="en-US" sz="2250" dirty="0" spc="-5" kern="0">
                 <a:solidFill>
                   <a:srgbClr val="C4C8D6"/>
                 </a:solidFill>
@@ -23596,10 +23090,10 @@
                 <a:ea typeface="Be Vietnam Pro" pitchFamily="34" charset="-122"/>
                 <a:cs typeface="Be Vietnam Pro" pitchFamily="34" charset="-120"/>
               </a:rPr>
-              <a:t>phổ</a:t>
-            </a:r>
-            <a:r>
-              <a:rPr lang="en-US" sz="2250" dirty="0" spc="0" kern="0">
+              <a:t>theo</a:t>
+            </a:r>
+            <a:r>
+              <a:rPr lang="en-US" sz="2250" dirty="0" spc="2" kern="0">
                 <a:solidFill>
                   <a:srgbClr val="C4C8D6"/>
                 </a:solidFill>
@@ -23607,7 +23101,18 @@
                 <a:ea typeface="Be Vietnam Pro" pitchFamily="34" charset="-122"/>
                 <a:cs typeface="Be Vietnam Pro" pitchFamily="34" charset="-120"/>
               </a:rPr>
-              <a:t> biến</a:t>
+              <a:t> cách</a:t>
+            </a:r>
+            <a:r>
+              <a:rPr lang="en-US" sz="2250" dirty="0" spc="-1" kern="0">
+                <a:solidFill>
+                  <a:srgbClr val="C4C8D6"/>
+                </a:solidFill>
+                <a:latin typeface="Be Vietnam Pro" pitchFamily="34" charset="0"/>
+                <a:ea typeface="Be Vietnam Pro" pitchFamily="34" charset="-122"/>
+                <a:cs typeface="Be Vietnam Pro" pitchFamily="34" charset="-120"/>
+              </a:rPr>
+              <a:t> chia</a:t>
             </a:r>
             <a:r>
               <a:rPr lang="en-US" sz="2250" dirty="0" spc="2" kern="0">
@@ -23621,7 +23126,7 @@
               <a:t> của</a:t>
             </a:r>
             <a:r>
-              <a:rPr lang="en-US" sz="2250" dirty="0" spc="-2" kern="0">
+              <a:rPr lang="en-US" sz="2250" dirty="0" spc="-1" kern="0">
                 <a:solidFill>
                   <a:srgbClr val="C4C8D6"/>
                 </a:solidFill>
@@ -23629,18 +23134,7 @@
                 <a:ea typeface="Be Vietnam Pro" pitchFamily="34" charset="-122"/>
                 <a:cs typeface="Be Vietnam Pro" pitchFamily="34" charset="-120"/>
               </a:rPr>
-              <a:t> khai</a:t>
-            </a:r>
-            <a:r>
-              <a:rPr lang="en-US" sz="2250" dirty="0" spc="-1" kern="0">
-                <a:solidFill>
-                  <a:srgbClr val="C4C8D6"/>
-                </a:solidFill>
-                <a:latin typeface="Be Vietnam Pro" pitchFamily="34" charset="0"/>
-                <a:ea typeface="Be Vietnam Pro" pitchFamily="34" charset="-122"/>
-                <a:cs typeface="Be Vietnam Pro" pitchFamily="34" charset="-120"/>
-              </a:rPr>
-              <a:t> báo.</a:t>
+              <a:t> bài.</a:t>
             </a:r>
             <a:endParaRPr lang="en-US" sz="2250" dirty="0"/>
           </a:p>

--- a/system-design-101/vi/lessons/sd-10-020/slides/sd-10-020.pptx
+++ b/system-design-101/vi/lessons/sd-10-020/slides/sd-10-020.pptx
@@ -17750,7 +17750,7 @@
               <a:buNone/>
             </a:pPr>
             <a:r>
-              <a:rPr lang="en-US" sz="2100" dirty="0" spc="-33" kern="0">
+              <a:rPr lang="en-US" sz="2100" dirty="0" spc="-1" kern="0">
                 <a:solidFill>
                   <a:srgbClr val="C4C8D6"/>
                 </a:solidFill>
@@ -17758,7 +17758,18 @@
                 <a:ea typeface="Be Vietnam Pro" pitchFamily="34" charset="-122"/>
                 <a:cs typeface="Be Vietnam Pro" pitchFamily="34" charset="-120"/>
               </a:rPr>
-              <a:t>Lớp</a:t>
+              <a:t>Giao</a:t>
+            </a:r>
+            <a:r>
+              <a:rPr lang="en-US" sz="2100" dirty="0" spc="0" kern="0">
+                <a:solidFill>
+                  <a:srgbClr val="C4C8D6"/>
+                </a:solidFill>
+                <a:latin typeface="Be Vietnam Pro" pitchFamily="34" charset="0"/>
+                <a:ea typeface="Be Vietnam Pro" pitchFamily="34" charset="-122"/>
+                <a:cs typeface="Be Vietnam Pro" pitchFamily="34" charset="-120"/>
+              </a:rPr>
+              <a:t> diện</a:t>
             </a:r>
             <a:r>
               <a:rPr lang="en-US" sz="2100" dirty="0" spc="-4" kern="0">
@@ -17816,7 +17827,7 @@
               <a:t> phần</a:t>
             </a:r>
             <a:r>
-              <a:rPr lang="en-US" sz="2100" dirty="0" spc="0" kern="0">
+              <a:rPr lang="en-US" sz="2100" dirty="0" spc="-1" kern="0">
                 <a:solidFill>
                   <a:srgbClr val="C4C8D6"/>
                 </a:solidFill>
@@ -17824,7 +17835,18 @@
                 <a:ea typeface="Be Vietnam Pro" pitchFamily="34" charset="-122"/>
                 <a:cs typeface="Be Vietnam Pro" pitchFamily="34" charset="-120"/>
               </a:rPr>
-              <a:t> tử</a:t>
+              <a:t> tử như</a:t>
+            </a:r>
+            <a:r>
+              <a:rPr lang="en-US" sz="2100" dirty="0" spc="-8" kern="0">
+                <a:solidFill>
+                  <a:srgbClr val="C4C8D6"/>
+                </a:solidFill>
+                <a:latin typeface="Be Vietnam Pro" pitchFamily="34" charset="0"/>
+                <a:ea typeface="Be Vietnam Pro" pitchFamily="34" charset="-122"/>
+                <a:cs typeface="Be Vietnam Pro" pitchFamily="34" charset="-120"/>
+              </a:rPr>
+              <a:t> một</a:t>
             </a:r>
             <a:r>
               <a:rPr lang="en-US" sz="2100" dirty="0" spc="-2" kern="0">
@@ -17835,32 +17857,10 @@
                 <a:ea typeface="Be Vietnam Pro" pitchFamily="34" charset="-122"/>
                 <a:cs typeface="Be Vietnam Pro" pitchFamily="34" charset="-120"/>
               </a:rPr>
-              <a:t> như</a:t>
-            </a:r>
-            <a:r>
-              <a:rPr lang="en-US" sz="2100" dirty="0" spc="-8" kern="0">
-                <a:solidFill>
-                  <a:srgbClr val="C4C8D6"/>
-                </a:solidFill>
-                <a:latin typeface="Be Vietnam Pro" pitchFamily="34" charset="0"/>
-                <a:ea typeface="Be Vietnam Pro" pitchFamily="34" charset="-122"/>
-                <a:cs typeface="Be Vietnam Pro" pitchFamily="34" charset="-120"/>
-              </a:rPr>
-              <a:t> một</a:t>
-            </a:r>
-            <a:r>
-              <a:rPr lang="en-US" sz="2100" dirty="0" spc="-1" kern="0">
-                <a:solidFill>
-                  <a:srgbClr val="C4C8D6"/>
-                </a:solidFill>
-                <a:latin typeface="Be Vietnam Pro" pitchFamily="34" charset="0"/>
-                <a:ea typeface="Be Vietnam Pro" pitchFamily="34" charset="-122"/>
-                <a:cs typeface="Be Vietnam Pro" pitchFamily="34" charset="-120"/>
-              </a:rPr>
               <a:t> tham</a:t>
             </a:r>
             <a:r>
-              <a:rPr lang="en-US" sz="2100" dirty="0" spc="-7" kern="0">
+              <a:rPr lang="en-US" sz="2100" dirty="0" spc="-6" kern="0">
                 <a:solidFill>
                   <a:srgbClr val="C4C8D6"/>
                 </a:solidFill>

--- a/system-design-101/vi/lessons/sd-10-020/slides/sd-10-020.pptx
+++ b/system-design-101/vi/lessons/sd-10-020/slides/sd-10-020.pptx
@@ -14219,6 +14219,39 @@
               <a:t> ứng:</a:t>
             </a:r>
             <a:r>
+              <a:rPr lang="en-US" sz="2700" dirty="0" spc="-8" kern="0">
+                <a:solidFill>
+                  <a:srgbClr val="14161C"/>
+                </a:solidFill>
+                <a:latin typeface="Be Vietnam Pro" pitchFamily="34" charset="0"/>
+                <a:ea typeface="Be Vietnam Pro" pitchFamily="34" charset="-122"/>
+                <a:cs typeface="Be Vietnam Pro" pitchFamily="34" charset="-120"/>
+              </a:rPr>
+              <a:t> chạy</a:t>
+            </a:r>
+            <a:r>
+              <a:rPr lang="en-US" sz="2700" dirty="0" spc="-2" kern="0">
+                <a:solidFill>
+                  <a:srgbClr val="14161C"/>
+                </a:solidFill>
+                <a:latin typeface="Be Vietnam Pro" pitchFamily="34" charset="0"/>
+                <a:ea typeface="Be Vietnam Pro" pitchFamily="34" charset="-122"/>
+                <a:cs typeface="Be Vietnam Pro" pitchFamily="34" charset="-120"/>
+              </a:rPr>
+              <a:t> khi</a:t>
+            </a:r>
+            <a:r>
+              <a:rPr lang="en-US" sz="2700" dirty="0" spc="-3" kern="0">
+                <a:solidFill>
+                  <a:srgbClr val="14161C"/>
+                </a:solidFill>
+                <a:latin typeface="Be Vietnam Pro" pitchFamily="34" charset="0"/>
+                <a:ea typeface="Be Vietnam Pro" pitchFamily="34" charset="-122"/>
+                <a:cs typeface="Be Vietnam Pro" pitchFamily="34" charset="-120"/>
+              </a:rPr>
+              <a:t> dữ</a:t>
+            </a:r>
+            <a:r>
               <a:rPr lang="en-US" sz="2700" dirty="0" spc="-1" kern="0">
                 <a:solidFill>
                   <a:srgbClr val="14161C"/>
@@ -14227,7 +14260,29 @@
                 <a:ea typeface="Be Vietnam Pro" pitchFamily="34" charset="-122"/>
                 <a:cs typeface="Be Vietnam Pro" pitchFamily="34" charset="-120"/>
               </a:rPr>
-              <a:t> luồng</a:t>
+              <a:t> liệu</a:t>
+            </a:r>
+            <a:r>
+              <a:rPr lang="en-US" sz="2700" dirty="0" spc="8" kern="0">
+                <a:solidFill>
+                  <a:srgbClr val="14161C"/>
+                </a:solidFill>
+                <a:latin typeface="Be Vietnam Pro" pitchFamily="34" charset="0"/>
+                <a:ea typeface="Be Vietnam Pro" pitchFamily="34" charset="-122"/>
+                <a:cs typeface="Be Vietnam Pro" pitchFamily="34" charset="-120"/>
+              </a:rPr>
+              <a:t> đến.</a:t>
+            </a:r>
+            <a:r>
+              <a:rPr lang="en-US" sz="2700" dirty="0" spc="-2" kern="0">
+                <a:solidFill>
+                  <a:srgbClr val="14161C"/>
+                </a:solidFill>
+                <a:latin typeface="Be Vietnam Pro" pitchFamily="34" charset="0"/>
+                <a:ea typeface="Be Vietnam Pro" pitchFamily="34" charset="-122"/>
+                <a:cs typeface="Be Vietnam Pro" pitchFamily="34" charset="-120"/>
+              </a:rPr>
+              <a:t> Đồng</a:t>
             </a:r>
             <a:r>
               <a:rPr lang="en-US" sz="2700" dirty="0" spc="0" kern="0">
@@ -14238,10 +14293,10 @@
                 <a:ea typeface="Be Vietnam Pro" pitchFamily="34" charset="-122"/>
                 <a:cs typeface="Be Vietnam Pro" pitchFamily="34" charset="-120"/>
               </a:rPr>
-              <a:t> có</a:t>
-            </a:r>
-            <a:r>
-              <a:rPr lang="en-US" sz="2700" dirty="0" spc="20" kern="0">
+              <a:t> thời:</a:t>
+            </a:r>
+            <a:r>
+              <a:rPr lang="en-US" sz="2700" dirty="0" spc="1" kern="0">
                 <a:solidFill>
                   <a:srgbClr val="14161C"/>
                 </a:solidFill>
@@ -14249,10 +14304,10 @@
                 <a:ea typeface="Be Vietnam Pro" pitchFamily="34" charset="-122"/>
                 <a:cs typeface="Be Vietnam Pro" pitchFamily="34" charset="-120"/>
               </a:rPr>
-              <a:t> điều</a:t>
-            </a:r>
-            <a:r>
-              <a:rPr lang="en-US" sz="2700" dirty="0" spc="-5" kern="0">
+              <a:t> các</a:t>
+            </a:r>
+            <a:r>
+              <a:rPr lang="en-US" sz="2700" dirty="0" spc="-2" kern="0">
                 <a:solidFill>
                   <a:srgbClr val="14161C"/>
                 </a:solidFill>
@@ -14260,10 +14315,10 @@
                 <a:ea typeface="Be Vietnam Pro" pitchFamily="34" charset="-122"/>
                 <a:cs typeface="Be Vietnam Pro" pitchFamily="34" charset="-120"/>
               </a:rPr>
-              <a:t> tiết</a:t>
-            </a:r>
-            <a:r>
-              <a:rPr lang="en-US" sz="2700" dirty="0" spc="22" kern="0">
+              <a:t> phần</a:t>
+            </a:r>
+            <a:r>
+              <a:rPr lang="en-US" sz="2700" dirty="0" spc="-8" kern="0">
                 <a:solidFill>
                   <a:srgbClr val="14161C"/>
                 </a:solidFill>
@@ -14271,10 +14326,10 @@
                 <a:ea typeface="Be Vietnam Pro" pitchFamily="34" charset="-122"/>
                 <a:cs typeface="Be Vietnam Pro" pitchFamily="34" charset="-120"/>
               </a:rPr>
-              <a:t> lưu</a:t>
-            </a:r>
-            <a:r>
-              <a:rPr lang="en-US" sz="2700" dirty="0" spc="5" kern="0">
+              <a:t> chạy</a:t>
+            </a:r>
+            <a:r>
+              <a:rPr lang="en-US" sz="2700" dirty="0" spc="10" kern="0">
                 <a:solidFill>
                   <a:srgbClr val="14161C"/>
                 </a:solidFill>
@@ -14282,76 +14337,10 @@
                 <a:ea typeface="Be Vietnam Pro" pitchFamily="34" charset="-122"/>
                 <a:cs typeface="Be Vietnam Pro" pitchFamily="34" charset="-120"/>
               </a:rPr>
-              <a:t> lượng.</a:t>
+              <a:t> độc</a:t>
             </a:r>
             <a:r>
               <a:rPr lang="en-US" sz="2700" dirty="0" spc="-2" kern="0">
-                <a:solidFill>
-                  <a:srgbClr val="14161C"/>
-                </a:solidFill>
-                <a:latin typeface="Be Vietnam Pro" pitchFamily="34" charset="0"/>
-                <a:ea typeface="Be Vietnam Pro" pitchFamily="34" charset="-122"/>
-                <a:cs typeface="Be Vietnam Pro" pitchFamily="34" charset="-120"/>
-              </a:rPr>
-              <a:t> Đồng</a:t>
-            </a:r>
-            <a:r>
-              <a:rPr lang="en-US" sz="2700" dirty="0" spc="-1" kern="0">
-                <a:solidFill>
-                  <a:srgbClr val="14161C"/>
-                </a:solidFill>
-                <a:latin typeface="Be Vietnam Pro" pitchFamily="34" charset="0"/>
-                <a:ea typeface="Be Vietnam Pro" pitchFamily="34" charset="-122"/>
-                <a:cs typeface="Be Vietnam Pro" pitchFamily="34" charset="-120"/>
-              </a:rPr>
-              <a:t> thời:</a:t>
-            </a:r>
-            <a:r>
-              <a:rPr lang="en-US" sz="2700" dirty="0" spc="2" kern="0">
-                <a:solidFill>
-                  <a:srgbClr val="14161C"/>
-                </a:solidFill>
-                <a:latin typeface="Be Vietnam Pro" pitchFamily="34" charset="0"/>
-                <a:ea typeface="Be Vietnam Pro" pitchFamily="34" charset="-122"/>
-                <a:cs typeface="Be Vietnam Pro" pitchFamily="34" charset="-120"/>
-              </a:rPr>
-              <a:t> các</a:t>
-            </a:r>
-            <a:r>
-              <a:rPr lang="en-US" sz="2700" dirty="0" spc="-2" kern="0">
-                <a:solidFill>
-                  <a:srgbClr val="14161C"/>
-                </a:solidFill>
-                <a:latin typeface="Be Vietnam Pro" pitchFamily="34" charset="0"/>
-                <a:ea typeface="Be Vietnam Pro" pitchFamily="34" charset="-122"/>
-                <a:cs typeface="Be Vietnam Pro" pitchFamily="34" charset="-120"/>
-              </a:rPr>
-              <a:t> phần</a:t>
-            </a:r>
-            <a:r>
-              <a:rPr lang="en-US" sz="2700" dirty="0" spc="-8" kern="0">
-                <a:solidFill>
-                  <a:srgbClr val="14161C"/>
-                </a:solidFill>
-                <a:latin typeface="Be Vietnam Pro" pitchFamily="34" charset="0"/>
-                <a:ea typeface="Be Vietnam Pro" pitchFamily="34" charset="-122"/>
-                <a:cs typeface="Be Vietnam Pro" pitchFamily="34" charset="-120"/>
-              </a:rPr>
-              <a:t> chạy</a:t>
-            </a:r>
-            <a:r>
-              <a:rPr lang="en-US" sz="2700" dirty="0" spc="10" kern="0">
-                <a:solidFill>
-                  <a:srgbClr val="14161C"/>
-                </a:solidFill>
-                <a:latin typeface="Be Vietnam Pro" pitchFamily="34" charset="0"/>
-                <a:ea typeface="Be Vietnam Pro" pitchFamily="34" charset="-122"/>
-                <a:cs typeface="Be Vietnam Pro" pitchFamily="34" charset="-120"/>
-              </a:rPr>
-              <a:t> độc</a:t>
-            </a:r>
-            <a:r>
-              <a:rPr lang="en-US" sz="2700" dirty="0" spc="-1" kern="0">
                 <a:solidFill>
                   <a:srgbClr val="14161C"/>
                 </a:solidFill>
@@ -14570,7 +14559,7 @@
               <a:buNone/>
             </a:pPr>
             <a:r>
-              <a:rPr lang="en-US" sz="2550" dirty="0" spc="-23" kern="0">
+              <a:rPr lang="en-US" sz="2550" dirty="0" spc="2" kern="0">
                 <a:solidFill>
                   <a:srgbClr val="14161C"/>
                 </a:solidFill>
@@ -14578,10 +14567,10 @@
                 <a:ea typeface="Be Vietnam Pro" pitchFamily="34" charset="-122"/>
                 <a:cs typeface="Be Vietnam Pro" pitchFamily="34" charset="-120"/>
               </a:rPr>
-              <a:t>Reactive</a:t>
-            </a:r>
-            <a:r>
-              <a:rPr lang="en-US" sz="2550" dirty="0" spc="-13" kern="0">
+              <a:t>Ví</a:t>
+            </a:r>
+            <a:r>
+              <a:rPr lang="en-US" sz="2550" dirty="0" spc="0" kern="0">
                 <a:solidFill>
                   <a:srgbClr val="14161C"/>
                 </a:solidFill>
@@ -14589,10 +14578,10 @@
                 <a:ea typeface="Be Vietnam Pro" pitchFamily="34" charset="-122"/>
                 <a:cs typeface="Be Vietnam Pro" pitchFamily="34" charset="-120"/>
               </a:rPr>
-              <a:t> Streams:</a:t>
-            </a:r>
-            <a:r>
-              <a:rPr lang="en-US" sz="2550" dirty="0" spc="1" kern="0">
+              <a:t> dụ:</a:t>
+            </a:r>
+            <a:r>
+              <a:rPr lang="en-US" sz="2550" dirty="0" spc="-21" kern="0">
                 <a:solidFill>
                   <a:srgbClr val="14161C"/>
                 </a:solidFill>
@@ -14600,6 +14589,28 @@
                 <a:ea typeface="Be Vietnam Pro" pitchFamily="34" charset="-122"/>
                 <a:cs typeface="Be Vietnam Pro" pitchFamily="34" charset="-120"/>
               </a:rPr>
+              <a:t> Reactive</a:t>
+            </a:r>
+            <a:r>
+              <a:rPr lang="en-US" sz="2550" dirty="0" spc="-14" kern="0">
+                <a:solidFill>
+                  <a:srgbClr val="14161C"/>
+                </a:solidFill>
+                <a:latin typeface="Be Vietnam Pro" pitchFamily="34" charset="0"/>
+                <a:ea typeface="Be Vietnam Pro" pitchFamily="34" charset="-122"/>
+                <a:cs typeface="Be Vietnam Pro" pitchFamily="34" charset="-120"/>
+              </a:rPr>
+              <a:t> Streams,</a:t>
+            </a:r>
+            <a:r>
+              <a:rPr lang="en-US" sz="2550" dirty="0" spc="2" kern="0">
+                <a:solidFill>
+                  <a:srgbClr val="14161C"/>
+                </a:solidFill>
+                <a:latin typeface="Be Vietnam Pro" pitchFamily="34" charset="0"/>
+                <a:ea typeface="Be Vietnam Pro" pitchFamily="34" charset="-122"/>
+                <a:cs typeface="Be Vietnam Pro" pitchFamily="34" charset="-120"/>
+              </a:rPr>
               <a:t> luồng</a:t>
             </a:r>
             <a:r>
@@ -14614,7 +14625,7 @@
               <a:t> bất</a:t>
             </a:r>
             <a:r>
-              <a:rPr lang="en-US" sz="2550" dirty="0" spc="11" kern="0">
+              <a:rPr lang="en-US" sz="2550" dirty="0" spc="10" kern="0">
                 <a:solidFill>
                   <a:srgbClr val="14161C"/>
                 </a:solidFill>
@@ -14625,7 +14636,7 @@
               <a:t> đồng</a:t>
             </a:r>
             <a:r>
-              <a:rPr lang="en-US" sz="2550" dirty="0" spc="-4" kern="0">
+              <a:rPr lang="en-US" sz="2550" dirty="0" spc="-2" kern="0">
                 <a:solidFill>
                   <a:srgbClr val="14161C"/>
                 </a:solidFill>
@@ -14633,18 +14644,7 @@
                 <a:ea typeface="Be Vietnam Pro" pitchFamily="34" charset="-122"/>
                 <a:cs typeface="Be Vietnam Pro" pitchFamily="34" charset="-120"/>
               </a:rPr>
-              <a:t> bộ,</a:t>
-            </a:r>
-            <a:r>
-              <a:rPr lang="en-US" sz="2550" dirty="0" spc="-15" kern="0">
-                <a:solidFill>
-                  <a:srgbClr val="14161C"/>
-                </a:solidFill>
-                <a:latin typeface="Be Vietnam Pro" pitchFamily="34" charset="0"/>
-                <a:ea typeface="Be Vietnam Pro" pitchFamily="34" charset="-122"/>
-                <a:cs typeface="Be Vietnam Pro" pitchFamily="34" charset="-120"/>
-              </a:rPr>
-              <a:t> backpressure.</a:t>
+              <a:t> bộ.</a:t>
             </a:r>
             <a:endParaRPr lang="en-US" sz="2550" dirty="0"/>
           </a:p>
@@ -14732,10 +14732,10 @@
                 <a:ea typeface="Be Vietnam Pro" pitchFamily="34" charset="-122"/>
                 <a:cs typeface="Be Vietnam Pro" pitchFamily="34" charset="-120"/>
               </a:rPr>
-              <a:t> ·</a:t>
-            </a:r>
-            <a:r>
-              <a:rPr lang="en-US" sz="1800" b="1" spc="225" kern="0" dirty="0">
+              <a:t> · VÍ</a:t>
+            </a:r>
+            <a:r>
+              <a:rPr lang="en-US" sz="1800" b="1" spc="228" kern="0" dirty="0">
                 <a:solidFill>
                   <a:srgbClr val="0F766E"/>
                 </a:solidFill>
@@ -14743,10 +14743,10 @@
                 <a:ea typeface="Be Vietnam Pro" pitchFamily="34" charset="-122"/>
                 <a:cs typeface="Be Vietnam Pro" pitchFamily="34" charset="-120"/>
               </a:rPr>
-              <a:t> LUỒNG</a:t>
-            </a:r>
-            <a:r>
-              <a:rPr lang="en-US" sz="1800" b="1" spc="227" kern="0" dirty="0">
+              <a:t> DỤ</a:t>
+            </a:r>
+            <a:r>
+              <a:rPr lang="en-US" sz="1800" b="1" spc="210" kern="0" dirty="0">
                 <a:solidFill>
                   <a:srgbClr val="0F766E"/>
                 </a:solidFill>
@@ -14754,10 +14754,10 @@
                 <a:ea typeface="Be Vietnam Pro" pitchFamily="34" charset="-122"/>
                 <a:cs typeface="Be Vietnam Pro" pitchFamily="34" charset="-120"/>
               </a:rPr>
-              <a:t> DỮ</a:t>
-            </a:r>
-            <a:r>
-              <a:rPr lang="en-US" sz="1800" b="1" spc="224" kern="0" dirty="0">
+              <a:t> REACTIVE</a:t>
+            </a:r>
+            <a:r>
+              <a:rPr lang="en-US" sz="1800" b="1" spc="219" kern="0" dirty="0">
                 <a:solidFill>
                   <a:srgbClr val="0F766E"/>
                 </a:solidFill>
@@ -14765,40 +14765,7 @@
                 <a:ea typeface="Be Vietnam Pro" pitchFamily="34" charset="-122"/>
                 <a:cs typeface="Be Vietnam Pro" pitchFamily="34" charset="-120"/>
               </a:rPr>
-              <a:t> LIỆU</a:t>
-            </a:r>
-            <a:r>
-              <a:rPr lang="en-US" sz="1800" b="1" spc="175" kern="0" dirty="0">
-                <a:solidFill>
-                  <a:srgbClr val="0F766E"/>
-                </a:solidFill>
-                <a:latin typeface="Be Vietnam Pro" pitchFamily="34" charset="0"/>
-                <a:ea typeface="Be Vietnam Pro" pitchFamily="34" charset="-122"/>
-                <a:cs typeface="Be Vietnam Pro" pitchFamily="34" charset="-120"/>
-              </a:rPr>
-              <a:t> BẤT</a:t>
-            </a:r>
-            <a:r>
-              <a:rPr lang="en-US" sz="1800" b="1" spc="224" kern="0" dirty="0">
-                <a:solidFill>
-                  <a:srgbClr val="0F766E"/>
-                </a:solidFill>
-                <a:latin typeface="Be Vietnam Pro" pitchFamily="34" charset="0"/>
-                <a:ea typeface="Be Vietnam Pro" pitchFamily="34" charset="-122"/>
-                <a:cs typeface="Be Vietnam Pro" pitchFamily="34" charset="-120"/>
-              </a:rPr>
-              <a:t> ĐỒNG</a:t>
-            </a:r>
-            <a:r>
-              <a:rPr lang="en-US" sz="1800" b="1" spc="220" kern="0" dirty="0">
-                <a:solidFill>
-                  <a:srgbClr val="0F766E"/>
-                </a:solidFill>
-                <a:latin typeface="Be Vietnam Pro" pitchFamily="34" charset="0"/>
-                <a:ea typeface="Be Vietnam Pro" pitchFamily="34" charset="-122"/>
-                <a:cs typeface="Be Vietnam Pro" pitchFamily="34" charset="-120"/>
-              </a:rPr>
-              <a:t> BỘ</a:t>
+              <a:t> STREAMS</a:t>
             </a:r>
             <a:endParaRPr lang="en-US" sz="1800" dirty="0"/>
           </a:p>

--- a/system-design-101/vi/lessons/sd-10-020/slides/sd-10-020.pptx
+++ b/system-design-101/vi/lessons/sd-10-020/slides/sd-10-020.pptx
@@ -16413,7 +16413,106 @@
                 <a:ea typeface="Be Vietnam Pro" pitchFamily="34" charset="-122"/>
                 <a:cs typeface="Be Vietnam Pro" pitchFamily="34" charset="-120"/>
               </a:rPr>
-              <a:t>Mỗi</a:t>
+              <a:t>Gặp</a:t>
+            </a:r>
+            <a:r>
+              <a:rPr lang="en-US" sz="2700" dirty="0" spc="-1" kern="0">
+                <a:solidFill>
+                  <a:srgbClr val="F3EEE3"/>
+                </a:solidFill>
+                <a:latin typeface="Be Vietnam Pro" pitchFamily="34" charset="0"/>
+                <a:ea typeface="Be Vietnam Pro" pitchFamily="34" charset="-122"/>
+                <a:cs typeface="Be Vietnam Pro" pitchFamily="34" charset="-120"/>
+              </a:rPr>
+              <a:t> lại</a:t>
+            </a:r>
+            <a:r>
+              <a:rPr lang="en-US" sz="2700" dirty="0" spc="-19" kern="0">
+                <a:solidFill>
+                  <a:srgbClr val="F3EEE3"/>
+                </a:solidFill>
+                <a:latin typeface="Be Vietnam Pro" pitchFamily="34" charset="0"/>
+                <a:ea typeface="Be Vietnam Pro" pitchFamily="34" charset="-122"/>
+                <a:cs typeface="Be Vietnam Pro" pitchFamily="34" charset="-120"/>
+              </a:rPr>
+              <a:t> trong</a:t>
+            </a:r>
+            <a:r>
+              <a:rPr lang="en-US" sz="2700" dirty="0" spc="-14" kern="0">
+                <a:solidFill>
+                  <a:srgbClr val="F3EEE3"/>
+                </a:solidFill>
+                <a:latin typeface="Be Vietnam Pro" pitchFamily="34" charset="0"/>
+                <a:ea typeface="Be Vietnam Pro" pitchFamily="34" charset="-122"/>
+                <a:cs typeface="Be Vietnam Pro" pitchFamily="34" charset="-120"/>
+              </a:rPr>
+              <a:t> tài</a:t>
+            </a:r>
+            <a:r>
+              <a:rPr lang="en-US" sz="2700" dirty="0" spc="-1" kern="0">
+                <a:solidFill>
+                  <a:srgbClr val="F3EEE3"/>
+                </a:solidFill>
+                <a:latin typeface="Be Vietnam Pro" pitchFamily="34" charset="0"/>
+                <a:ea typeface="Be Vietnam Pro" pitchFamily="34" charset="-122"/>
+                <a:cs typeface="Be Vietnam Pro" pitchFamily="34" charset="-120"/>
+              </a:rPr>
+              <a:t> liệu</a:t>
+            </a:r>
+            <a:r>
+              <a:rPr lang="en-US" sz="2700" dirty="0" spc="-13" kern="0">
+                <a:solidFill>
+                  <a:srgbClr val="F3EEE3"/>
+                </a:solidFill>
+                <a:latin typeface="Be Vietnam Pro" pitchFamily="34" charset="0"/>
+                <a:ea typeface="Be Vietnam Pro" pitchFamily="34" charset="-122"/>
+                <a:cs typeface="Be Vietnam Pro" pitchFamily="34" charset="-120"/>
+              </a:rPr>
+              <a:t> gốc,</a:t>
+            </a:r>
+            <a:r>
+              <a:rPr lang="en-US" sz="2700" dirty="0" spc="-1" kern="0">
+                <a:solidFill>
+                  <a:srgbClr val="F3EEE3"/>
+                </a:solidFill>
+                <a:latin typeface="Be Vietnam Pro" pitchFamily="34" charset="0"/>
+                <a:ea typeface="Be Vietnam Pro" pitchFamily="34" charset="-122"/>
+                <a:cs typeface="Be Vietnam Pro" pitchFamily="34" charset="-120"/>
+              </a:rPr>
+              <a:t> trừ</a:t>
+            </a:r>
+            <a:r>
+              <a:rPr lang="en-US" sz="2700" dirty="0" spc="19" kern="0">
+                <a:solidFill>
+                  <a:srgbClr val="F3EEE3"/>
+                </a:solidFill>
+                <a:latin typeface="Be Vietnam Pro" pitchFamily="34" charset="0"/>
+                <a:ea typeface="Be Vietnam Pro" pitchFamily="34" charset="-122"/>
+                <a:cs typeface="Be Vietnam Pro" pitchFamily="34" charset="-120"/>
+              </a:rPr>
+              <a:t> định</a:t>
+            </a:r>
+            <a:r>
+              <a:rPr lang="en-US" sz="2700" dirty="0" spc="-3" kern="0">
+                <a:solidFill>
+                  <a:srgbClr val="F3EEE3"/>
+                </a:solidFill>
+                <a:latin typeface="Be Vietnam Pro" pitchFamily="34" charset="0"/>
+                <a:ea typeface="Be Vietnam Pro" pitchFamily="34" charset="-122"/>
+                <a:cs typeface="Be Vietnam Pro" pitchFamily="34" charset="-120"/>
+              </a:rPr>
+              <a:t> nghĩa</a:t>
+            </a:r>
+            <a:r>
+              <a:rPr lang="en-US" sz="2700" dirty="0" spc="0" kern="0">
+                <a:solidFill>
+                  <a:srgbClr val="F3EEE3"/>
+                </a:solidFill>
+                <a:latin typeface="Be Vietnam Pro" pitchFamily="34" charset="0"/>
+                <a:ea typeface="Be Vietnam Pro" pitchFamily="34" charset="-122"/>
+                <a:cs typeface="Be Vietnam Pro" pitchFamily="34" charset="-120"/>
+              </a:rPr>
+              <a:t> chung</a:t>
             </a:r>
             <a:r>
               <a:rPr lang="en-US" sz="2700" dirty="0" spc="-2" kern="0">
@@ -16424,84 +16523,18 @@
                 <a:ea typeface="Be Vietnam Pro" pitchFamily="34" charset="-122"/>
                 <a:cs typeface="Be Vietnam Pro" pitchFamily="34" charset="-120"/>
               </a:rPr>
-              <a:t> mô</a:t>
-            </a:r>
-            <a:r>
-              <a:rPr lang="en-US" sz="2700" dirty="0" spc="-3" kern="0">
-                <a:solidFill>
-                  <a:srgbClr val="F3EEE3"/>
-                </a:solidFill>
-                <a:latin typeface="Be Vietnam Pro" pitchFamily="34" charset="0"/>
-                <a:ea typeface="Be Vietnam Pro" pitchFamily="34" charset="-122"/>
-                <a:cs typeface="Be Vietnam Pro" pitchFamily="34" charset="-120"/>
-              </a:rPr>
-              <a:t> hình</a:t>
-            </a:r>
-            <a:r>
-              <a:rPr lang="en-US" sz="2700" dirty="0" spc="-15" kern="0">
-                <a:solidFill>
-                  <a:srgbClr val="F3EEE3"/>
-                </a:solidFill>
-                <a:latin typeface="Be Vietnam Pro" pitchFamily="34" charset="0"/>
-                <a:ea typeface="Be Vietnam Pro" pitchFamily="34" charset="-122"/>
-                <a:cs typeface="Be Vietnam Pro" pitchFamily="34" charset="-120"/>
-              </a:rPr>
-              <a:t> gặp</a:t>
-            </a:r>
-            <a:r>
-              <a:rPr lang="en-US" sz="2700" dirty="0" spc="0" kern="0">
-                <a:solidFill>
-                  <a:srgbClr val="F3EEE3"/>
-                </a:solidFill>
-                <a:latin typeface="Be Vietnam Pro" pitchFamily="34" charset="0"/>
-                <a:ea typeface="Be Vietnam Pro" pitchFamily="34" charset="-122"/>
-                <a:cs typeface="Be Vietnam Pro" pitchFamily="34" charset="-120"/>
-              </a:rPr>
-              <a:t> lại</a:t>
-            </a:r>
-            <a:r>
-              <a:rPr lang="en-US" sz="2700" dirty="0" spc="-20" kern="0">
-                <a:solidFill>
-                  <a:srgbClr val="F3EEE3"/>
-                </a:solidFill>
-                <a:latin typeface="Be Vietnam Pro" pitchFamily="34" charset="0"/>
-                <a:ea typeface="Be Vietnam Pro" pitchFamily="34" charset="-122"/>
-                <a:cs typeface="Be Vietnam Pro" pitchFamily="34" charset="-120"/>
-              </a:rPr>
-              <a:t> trong</a:t>
-            </a:r>
-            <a:r>
-              <a:rPr lang="en-US" sz="2700" dirty="0" spc="-13" kern="0">
-                <a:solidFill>
-                  <a:srgbClr val="F3EEE3"/>
-                </a:solidFill>
-                <a:latin typeface="Be Vietnam Pro" pitchFamily="34" charset="0"/>
-                <a:ea typeface="Be Vietnam Pro" pitchFamily="34" charset="-122"/>
-                <a:cs typeface="Be Vietnam Pro" pitchFamily="34" charset="-120"/>
-              </a:rPr>
-              <a:t> tài</a:t>
-            </a:r>
-            <a:r>
-              <a:rPr lang="en-US" sz="2700" dirty="0" spc="-1" kern="0">
-                <a:solidFill>
-                  <a:srgbClr val="F3EEE3"/>
-                </a:solidFill>
-                <a:latin typeface="Be Vietnam Pro" pitchFamily="34" charset="0"/>
-                <a:ea typeface="Be Vietnam Pro" pitchFamily="34" charset="-122"/>
-                <a:cs typeface="Be Vietnam Pro" pitchFamily="34" charset="-120"/>
-              </a:rPr>
-              <a:t> liệu</a:t>
-            </a:r>
-            <a:r>
-              <a:rPr lang="en-US" sz="2700" dirty="0" spc="-15" kern="0">
-                <a:solidFill>
-                  <a:srgbClr val="F3EEE3"/>
-                </a:solidFill>
-                <a:latin typeface="Be Vietnam Pro" pitchFamily="34" charset="0"/>
-                <a:ea typeface="Be Vietnam Pro" pitchFamily="34" charset="-122"/>
-                <a:cs typeface="Be Vietnam Pro" pitchFamily="34" charset="-120"/>
-              </a:rPr>
-              <a:t> gốc.</a:t>
+              <a:t> của phản</a:t>
+            </a:r>
+            <a:r>
+              <a:rPr lang="en-US" sz="2700" dirty="0" spc="19" kern="0">
+                <a:solidFill>
+                  <a:srgbClr val="F3EEE3"/>
+                </a:solidFill>
+                <a:latin typeface="Be Vietnam Pro" pitchFamily="34" charset="0"/>
+                <a:ea typeface="Be Vietnam Pro" pitchFamily="34" charset="-122"/>
+                <a:cs typeface="Be Vietnam Pro" pitchFamily="34" charset="-120"/>
+              </a:rPr>
+              <a:t> ứng.</a:t>
             </a:r>
             <a:endParaRPr lang="en-US" sz="2700" dirty="0"/>
           </a:p>

--- a/system-design-101/vi/lessons/sd-10-020/slides/sd-10-020.pptx
+++ b/system-design-101/vi/lessons/sd-10-020/slides/sd-10-020.pptx
@@ -16504,17 +16504,6 @@
               <a:t> nghĩa</a:t>
             </a:r>
             <a:r>
-              <a:rPr lang="en-US" sz="2700" dirty="0" spc="0" kern="0">
-                <a:solidFill>
-                  <a:srgbClr val="F3EEE3"/>
-                </a:solidFill>
-                <a:latin typeface="Be Vietnam Pro" pitchFamily="34" charset="0"/>
-                <a:ea typeface="Be Vietnam Pro" pitchFamily="34" charset="-122"/>
-                <a:cs typeface="Be Vietnam Pro" pitchFamily="34" charset="-120"/>
-              </a:rPr>
-              <a:t> chung</a:t>
-            </a:r>
-            <a:r>
               <a:rPr lang="en-US" sz="2700" dirty="0" spc="-2" kern="0">
                 <a:solidFill>
                   <a:srgbClr val="F3EEE3"/>
@@ -16523,18 +16512,73 @@
                 <a:ea typeface="Be Vietnam Pro" pitchFamily="34" charset="-122"/>
                 <a:cs typeface="Be Vietnam Pro" pitchFamily="34" charset="-120"/>
               </a:rPr>
-              <a:t> của phản</a:t>
-            </a:r>
-            <a:r>
-              <a:rPr lang="en-US" sz="2700" dirty="0" spc="19" kern="0">
-                <a:solidFill>
-                  <a:srgbClr val="F3EEE3"/>
-                </a:solidFill>
-                <a:latin typeface="Be Vietnam Pro" pitchFamily="34" charset="0"/>
-                <a:ea typeface="Be Vietnam Pro" pitchFamily="34" charset="-122"/>
-                <a:cs typeface="Be Vietnam Pro" pitchFamily="34" charset="-120"/>
-              </a:rPr>
-              <a:t> ứng.</a:t>
+              <a:t> phản</a:t>
+            </a:r>
+            <a:r>
+              <a:rPr lang="en-US" sz="2700" dirty="0" spc="24" kern="0">
+                <a:solidFill>
+                  <a:srgbClr val="F3EEE3"/>
+                </a:solidFill>
+                <a:latin typeface="Be Vietnam Pro" pitchFamily="34" charset="0"/>
+                <a:ea typeface="Be Vietnam Pro" pitchFamily="34" charset="-122"/>
+                <a:cs typeface="Be Vietnam Pro" pitchFamily="34" charset="-120"/>
+              </a:rPr>
+              <a:t> ứng</a:t>
+            </a:r>
+            <a:r>
+              <a:rPr lang="en-US" sz="2700" dirty="0" spc="-18" kern="0">
+                <a:solidFill>
+                  <a:srgbClr val="F3EEE3"/>
+                </a:solidFill>
+                <a:latin typeface="Be Vietnam Pro" pitchFamily="34" charset="0"/>
+                <a:ea typeface="Be Vietnam Pro" pitchFamily="34" charset="-122"/>
+                <a:cs typeface="Be Vietnam Pro" pitchFamily="34" charset="-120"/>
+              </a:rPr>
+              <a:t> và</a:t>
+            </a:r>
+            <a:r>
+              <a:rPr lang="en-US" sz="2700" dirty="0" spc="1" kern="0">
+                <a:solidFill>
+                  <a:srgbClr val="F3EEE3"/>
+                </a:solidFill>
+                <a:latin typeface="Be Vietnam Pro" pitchFamily="34" charset="0"/>
+                <a:ea typeface="Be Vietnam Pro" pitchFamily="34" charset="-122"/>
+                <a:cs typeface="Be Vietnam Pro" pitchFamily="34" charset="-120"/>
+              </a:rPr>
+              <a:t> cách</a:t>
+            </a:r>
+            <a:r>
+              <a:rPr lang="en-US" sz="2700" dirty="0" spc="10" kern="0">
+                <a:solidFill>
+                  <a:srgbClr val="F3EEE3"/>
+                </a:solidFill>
+                <a:latin typeface="Be Vietnam Pro" pitchFamily="34" charset="0"/>
+                <a:ea typeface="Be Vietnam Pro" pitchFamily="34" charset="-122"/>
+                <a:cs typeface="Be Vietnam Pro" pitchFamily="34" charset="-120"/>
+              </a:rPr>
+              <a:t> đọc</a:t>
+            </a:r>
+            <a:r>
+              <a:rPr lang="en-US" sz="2700" dirty="0" spc="-3" kern="0">
+                <a:solidFill>
+                  <a:srgbClr val="F3EEE3"/>
+                </a:solidFill>
+                <a:latin typeface="Be Vietnam Pro" pitchFamily="34" charset="0"/>
+                <a:ea typeface="Be Vietnam Pro" pitchFamily="34" charset="-122"/>
+                <a:cs typeface="Be Vietnam Pro" pitchFamily="34" charset="-120"/>
+              </a:rPr>
+              <a:t> mệnh</a:t>
+            </a:r>
+            <a:r>
+              <a:rPr lang="en-US" sz="2700" dirty="0" spc="-2" kern="0">
+                <a:solidFill>
+                  <a:srgbClr val="F3EEE3"/>
+                </a:solidFill>
+                <a:latin typeface="Be Vietnam Pro" pitchFamily="34" charset="0"/>
+                <a:ea typeface="Be Vietnam Pro" pitchFamily="34" charset="-122"/>
+                <a:cs typeface="Be Vietnam Pro" pitchFamily="34" charset="-120"/>
+              </a:rPr>
+              <a:t> lệnh.</a:t>
             </a:r>
             <a:endParaRPr lang="en-US" sz="2700" dirty="0"/>
           </a:p>

--- a/system-design-101/vi/lessons/sd-10-020/slides/sd-10-020.pptx
+++ b/system-design-101/vi/lessons/sd-10-020/slides/sd-10-020.pptx
@@ -4500,7 +4500,7 @@
         <p:spPr>
           <a:xfrm>
             <a:off x="914400" y="8191500"/>
-            <a:ext cx="16459200" cy="381000"/>
+            <a:ext cx="16459200" cy="857250"/>
           </a:xfrm>
           <a:prstGeom prst="rect">
             <a:avLst/>
@@ -4657,6 +4657,155 @@
                 <a:cs typeface="Be Vietnam Pro" pitchFamily="34" charset="-120"/>
               </a:rPr>
               <a:t> Streams.</a:t>
+            </a:r>
+            <a:endParaRPr lang="en-US" sz="1950" dirty="0"/>
+          </a:p>
+          <a:p>
+            <a:pPr algn="l" indent="0" marL="0">
+              <a:buNone/>
+            </a:pPr>
+            <a:r>
+              <a:rPr lang="en-US" sz="1950" dirty="0" spc="8" kern="0">
+                <a:solidFill>
+                  <a:srgbClr val="C4C8D6"/>
+                </a:solidFill>
+                <a:latin typeface="Be Vietnam Pro" pitchFamily="34" charset="0"/>
+                <a:ea typeface="Be Vietnam Pro" pitchFamily="34" charset="-122"/>
+                <a:cs typeface="Be Vietnam Pro" pitchFamily="34" charset="-120"/>
+              </a:rPr>
+              <a:t>SQL:</a:t>
+            </a:r>
+            <a:r>
+              <a:rPr lang="en-US" sz="1950" dirty="0" spc="-8" kern="0">
+                <a:solidFill>
+                  <a:srgbClr val="C4C8D6"/>
+                </a:solidFill>
+                <a:latin typeface="Be Vietnam Pro" pitchFamily="34" charset="0"/>
+                <a:ea typeface="Be Vietnam Pro" pitchFamily="34" charset="-122"/>
+                <a:cs typeface="Be Vietnam Pro" pitchFamily="34" charset="-120"/>
+              </a:rPr>
+              <a:t> Structured</a:t>
+            </a:r>
+            <a:r>
+              <a:rPr lang="en-US" sz="1950" dirty="0" spc="2" kern="0">
+                <a:solidFill>
+                  <a:srgbClr val="C4C8D6"/>
+                </a:solidFill>
+                <a:latin typeface="Be Vietnam Pro" pitchFamily="34" charset="0"/>
+                <a:ea typeface="Be Vietnam Pro" pitchFamily="34" charset="-122"/>
+                <a:cs typeface="Be Vietnam Pro" pitchFamily="34" charset="-120"/>
+              </a:rPr>
+              <a:t> Query</a:t>
+            </a:r>
+            <a:r>
+              <a:rPr lang="en-US" sz="1950" dirty="0" spc="-10" kern="0">
+                <a:solidFill>
+                  <a:srgbClr val="C4C8D6"/>
+                </a:solidFill>
+                <a:latin typeface="Be Vietnam Pro" pitchFamily="34" charset="0"/>
+                <a:ea typeface="Be Vietnam Pro" pitchFamily="34" charset="-122"/>
+                <a:cs typeface="Be Vietnam Pro" pitchFamily="34" charset="-120"/>
+              </a:rPr>
+              <a:t> Language</a:t>
+            </a:r>
+            <a:r>
+              <a:rPr lang="en-US" sz="1950" dirty="0" spc="0" kern="0">
+                <a:solidFill>
+                  <a:srgbClr val="C4C8D6"/>
+                </a:solidFill>
+                <a:latin typeface="Be Vietnam Pro" pitchFamily="34" charset="0"/>
+                <a:ea typeface="Be Vietnam Pro" pitchFamily="34" charset="-122"/>
+                <a:cs typeface="Be Vietnam Pro" pitchFamily="34" charset="-120"/>
+              </a:rPr>
+              <a:t> ·</a:t>
+            </a:r>
+            <a:r>
+              <a:rPr lang="en-US" sz="1950" dirty="0" spc="-4" kern="0">
+                <a:solidFill>
+                  <a:srgbClr val="C4C8D6"/>
+                </a:solidFill>
+                <a:latin typeface="Be Vietnam Pro" pitchFamily="34" charset="0"/>
+                <a:ea typeface="Be Vietnam Pro" pitchFamily="34" charset="-122"/>
+                <a:cs typeface="Be Vietnam Pro" pitchFamily="34" charset="-120"/>
+              </a:rPr>
+              <a:t> JDK:</a:t>
+            </a:r>
+            <a:r>
+              <a:rPr lang="en-US" sz="1950" dirty="0" spc="-16" kern="0">
+                <a:solidFill>
+                  <a:srgbClr val="C4C8D6"/>
+                </a:solidFill>
+                <a:latin typeface="Be Vietnam Pro" pitchFamily="34" charset="0"/>
+                <a:ea typeface="Be Vietnam Pro" pitchFamily="34" charset="-122"/>
+                <a:cs typeface="Be Vietnam Pro" pitchFamily="34" charset="-120"/>
+              </a:rPr>
+              <a:t> Java</a:t>
+            </a:r>
+            <a:r>
+              <a:rPr lang="en-US" sz="1950" dirty="0" spc="-9" kern="0">
+                <a:solidFill>
+                  <a:srgbClr val="C4C8D6"/>
+                </a:solidFill>
+                <a:latin typeface="Be Vietnam Pro" pitchFamily="34" charset="0"/>
+                <a:ea typeface="Be Vietnam Pro" pitchFamily="34" charset="-122"/>
+                <a:cs typeface="Be Vietnam Pro" pitchFamily="34" charset="-120"/>
+              </a:rPr>
+              <a:t> Development</a:t>
+            </a:r>
+            <a:r>
+              <a:rPr lang="en-US" sz="1950" dirty="0" spc="-1" kern="0">
+                <a:solidFill>
+                  <a:srgbClr val="C4C8D6"/>
+                </a:solidFill>
+                <a:latin typeface="Be Vietnam Pro" pitchFamily="34" charset="0"/>
+                <a:ea typeface="Be Vietnam Pro" pitchFamily="34" charset="-122"/>
+                <a:cs typeface="Be Vietnam Pro" pitchFamily="34" charset="-120"/>
+              </a:rPr>
+              <a:t> Kit</a:t>
+            </a:r>
+            <a:r>
+              <a:rPr lang="en-US" sz="1950" dirty="0" spc="-2" kern="0">
+                <a:solidFill>
+                  <a:srgbClr val="C4C8D6"/>
+                </a:solidFill>
+                <a:latin typeface="Be Vietnam Pro" pitchFamily="34" charset="0"/>
+                <a:ea typeface="Be Vietnam Pro" pitchFamily="34" charset="-122"/>
+                <a:cs typeface="Be Vietnam Pro" pitchFamily="34" charset="-120"/>
+              </a:rPr>
+              <a:t> · MDN:</a:t>
+            </a:r>
+            <a:r>
+              <a:rPr lang="en-US" sz="1950" dirty="0" spc="1" kern="0">
+                <a:solidFill>
+                  <a:srgbClr val="C4C8D6"/>
+                </a:solidFill>
+                <a:latin typeface="Be Vietnam Pro" pitchFamily="34" charset="0"/>
+                <a:ea typeface="Be Vietnam Pro" pitchFamily="34" charset="-122"/>
+                <a:cs typeface="Be Vietnam Pro" pitchFamily="34" charset="-120"/>
+              </a:rPr>
+              <a:t> Mozilla</a:t>
+            </a:r>
+            <a:r>
+              <a:rPr lang="en-US" sz="1950" dirty="0" spc="-9" kern="0">
+                <a:solidFill>
+                  <a:srgbClr val="C4C8D6"/>
+                </a:solidFill>
+                <a:latin typeface="Be Vietnam Pro" pitchFamily="34" charset="0"/>
+                <a:ea typeface="Be Vietnam Pro" pitchFamily="34" charset="-122"/>
+                <a:cs typeface="Be Vietnam Pro" pitchFamily="34" charset="-120"/>
+              </a:rPr>
+              <a:t> Developer</a:t>
+            </a:r>
+            <a:r>
+              <a:rPr lang="en-US" sz="1950" dirty="0" spc="-7" kern="0">
+                <a:solidFill>
+                  <a:srgbClr val="C4C8D6"/>
+                </a:solidFill>
+                <a:latin typeface="Be Vietnam Pro" pitchFamily="34" charset="0"/>
+                <a:ea typeface="Be Vietnam Pro" pitchFamily="34" charset="-122"/>
+                <a:cs typeface="Be Vietnam Pro" pitchFamily="34" charset="-120"/>
+              </a:rPr>
+              <a:t> Network</a:t>
             </a:r>
             <a:endParaRPr lang="en-US" sz="1950" dirty="0"/>
           </a:p>
@@ -11920,7 +12069,7 @@
               <a:buNone/>
             </a:pPr>
             <a:r>
-              <a:rPr lang="en-US" sz="6900" dirty="0" spc="-3" kern="0">
+              <a:rPr lang="en-US" sz="6900" dirty="0" spc="8" kern="0">
                 <a:solidFill>
                   <a:srgbClr val="F3EEE3"/>
                 </a:solidFill>
@@ -11928,7 +12077,7 @@
                 <a:ea typeface="Bricolage Grotesque ExtraBold" pitchFamily="34" charset="-122"/>
                 <a:cs typeface="Bricolage Grotesque ExtraBold" pitchFamily="34" charset="-120"/>
               </a:rPr>
-              <a:t>Mã</a:t>
+              <a:t>Kiểu</a:t>
             </a:r>
             <a:r>
               <a:rPr lang="en-US" sz="6900" dirty="0" spc="0" kern="0">
@@ -11939,7 +12088,7 @@
                 <a:ea typeface="Bricolage Grotesque ExtraBold" pitchFamily="34" charset="-122"/>
                 <a:cs typeface="Bricolage Grotesque ExtraBold" pitchFamily="34" charset="-120"/>
               </a:rPr>
-              <a:t> không</a:t>
+              <a:t> là</a:t>
             </a:r>
             <a:endParaRPr lang="en-US" sz="6900" dirty="0"/>
           </a:p>
@@ -11948,7 +12097,7 @@
               <a:buNone/>
             </a:pPr>
             <a:r>
-              <a:rPr lang="en-US" sz="6900" dirty="0" spc="7" kern="0">
+              <a:rPr lang="en-US" sz="6900" dirty="0" spc="1" kern="0">
                 <a:solidFill>
                   <a:srgbClr val="F3EEE3"/>
                 </a:solidFill>
@@ -11956,10 +12105,10 @@
                 <a:ea typeface="Bricolage Grotesque ExtraBold" pitchFamily="34" charset="-122"/>
                 <a:cs typeface="Bricolage Grotesque ExtraBold" pitchFamily="34" charset="-120"/>
               </a:rPr>
-              <a:t>phụ</a:t>
-            </a:r>
-            <a:r>
-              <a:rPr lang="en-US" sz="6900" dirty="0" spc="1" kern="0">
+              <a:t>tham</a:t>
+            </a:r>
+            <a:r>
+              <a:rPr lang="en-US" sz="6900" dirty="0" spc="2" kern="0">
                 <a:solidFill>
                   <a:srgbClr val="F3EEE3"/>
                 </a:solidFill>
@@ -11967,10 +12116,10 @@
                 <a:ea typeface="Bricolage Grotesque ExtraBold" pitchFamily="34" charset="-122"/>
                 <a:cs typeface="Bricolage Grotesque ExtraBold" pitchFamily="34" charset="-120"/>
               </a:rPr>
-              <a:t> thuộc</a:t>
-            </a:r>
-            <a:r>
-              <a:rPr lang="en-US" sz="6900" dirty="0" spc="6" kern="0">
+              <a:t> số</a:t>
+            </a:r>
+            <a:r>
+              <a:rPr lang="en-US" sz="6900" dirty="0" spc="-1" kern="0">
                 <a:solidFill>
                   <a:srgbClr val="F3EEE3"/>
                 </a:solidFill>
@@ -11978,7 +12127,18 @@
                 <a:ea typeface="Bricolage Grotesque ExtraBold" pitchFamily="34" charset="-122"/>
                 <a:cs typeface="Bricolage Grotesque ExtraBold" pitchFamily="34" charset="-120"/>
               </a:rPr>
-              <a:t> kiểu</a:t>
+              <a:t> của</a:t>
+            </a:r>
+            <a:r>
+              <a:rPr lang="en-US" sz="6900" dirty="0" spc="-2" kern="0">
+                <a:solidFill>
+                  <a:srgbClr val="F3EEE3"/>
+                </a:solidFill>
+                <a:latin typeface="Bricolage Grotesque ExtraBold" pitchFamily="34" charset="0"/>
+                <a:ea typeface="Bricolage Grotesque ExtraBold" pitchFamily="34" charset="-122"/>
+                <a:cs typeface="Bricolage Grotesque ExtraBold" pitchFamily="34" charset="-120"/>
+              </a:rPr>
+              <a:t> mã</a:t>
             </a:r>
             <a:endParaRPr lang="en-US" sz="6900" dirty="0"/>
           </a:p>

--- a/system-design-101/vi/lessons/sd-10-020/slides/sd-10-020.pptx
+++ b/system-design-101/vi/lessons/sd-10-020/slides/sd-10-020.pptx
@@ -3457,7 +3457,7 @@
               <a:buNone/>
             </a:pPr>
             <a:r>
-              <a:rPr lang="en-US" sz="1950" b="1" spc="214" kern="0" dirty="0">
+              <a:rPr lang="en-US" sz="1950" b="1" spc="227" kern="0" dirty="0">
                 <a:solidFill>
                   <a:srgbClr val="FF6A4D"/>
                 </a:solidFill>
@@ -3465,21 +3465,10 @@
                 <a:ea typeface="Be Vietnam Pro" pitchFamily="34" charset="-122"/>
                 <a:cs typeface="Be Vietnam Pro" pitchFamily="34" charset="-120"/>
               </a:rPr>
-              <a:t>BA</a:t>
+              <a:t>TỪ</a:t>
             </a:r>
             <a:r>
               <a:rPr lang="en-US" sz="1950" b="1" spc="226" kern="0" dirty="0">
-                <a:solidFill>
-                  <a:srgbClr val="FF6A4D"/>
-                </a:solidFill>
-                <a:latin typeface="Be Vietnam Pro" pitchFamily="34" charset="0"/>
-                <a:ea typeface="Be Vietnam Pro" pitchFamily="34" charset="-122"/>
-                <a:cs typeface="Be Vietnam Pro" pitchFamily="34" charset="-120"/>
-              </a:rPr>
-              <a:t> TỪ</a:t>
-            </a:r>
-            <a:r>
-              <a:rPr lang="en-US" sz="1950" b="1" spc="225" kern="0" dirty="0">
                 <a:solidFill>
                   <a:srgbClr val="FF6A4D"/>
                 </a:solidFill>
@@ -4499,8 +4488,8 @@
         </p:nvSpPr>
         <p:spPr>
           <a:xfrm>
-            <a:off x="914400" y="8191500"/>
-            <a:ext cx="16459200" cy="857250"/>
+            <a:off x="914400" y="8058150"/>
+            <a:ext cx="16459200" cy="1143000"/>
           </a:xfrm>
           <a:prstGeom prst="rect">
             <a:avLst/>
@@ -4665,7 +4654,7 @@
               <a:buNone/>
             </a:pPr>
             <a:r>
-              <a:rPr lang="en-US" sz="1950" dirty="0" spc="8" kern="0">
+              <a:rPr lang="en-US" sz="1950" dirty="0" spc="0" kern="0">
                 <a:solidFill>
                   <a:srgbClr val="C4C8D6"/>
                 </a:solidFill>
@@ -4673,7 +4662,95 @@
                 <a:ea typeface="Be Vietnam Pro" pitchFamily="34" charset="-122"/>
                 <a:cs typeface="Be Vietnam Pro" pitchFamily="34" charset="-120"/>
               </a:rPr>
-              <a:t>SQL:</a:t>
+              <a:t>ML:</a:t>
+            </a:r>
+            <a:r>
+              <a:rPr lang="en-US" sz="1950" dirty="0" spc="-11" kern="0">
+                <a:solidFill>
+                  <a:srgbClr val="C4C8D6"/>
+                </a:solidFill>
+                <a:latin typeface="Be Vietnam Pro" pitchFamily="34" charset="0"/>
+                <a:ea typeface="Be Vietnam Pro" pitchFamily="34" charset="-122"/>
+                <a:cs typeface="Be Vietnam Pro" pitchFamily="34" charset="-120"/>
+              </a:rPr>
+              <a:t> Meta</a:t>
+            </a:r>
+            <a:r>
+              <a:rPr lang="en-US" sz="1950" dirty="0" spc="-8" kern="0">
+                <a:solidFill>
+                  <a:srgbClr val="C4C8D6"/>
+                </a:solidFill>
+                <a:latin typeface="Be Vietnam Pro" pitchFamily="34" charset="0"/>
+                <a:ea typeface="Be Vietnam Pro" pitchFamily="34" charset="-122"/>
+                <a:cs typeface="Be Vietnam Pro" pitchFamily="34" charset="-120"/>
+              </a:rPr>
+              <a:t> Language,</a:t>
+            </a:r>
+            <a:r>
+              <a:rPr lang="en-US" sz="1950" dirty="0" spc="-3" kern="0">
+                <a:solidFill>
+                  <a:srgbClr val="C4C8D6"/>
+                </a:solidFill>
+                <a:latin typeface="Be Vietnam Pro" pitchFamily="34" charset="0"/>
+                <a:ea typeface="Be Vietnam Pro" pitchFamily="34" charset="-122"/>
+                <a:cs typeface="Be Vietnam Pro" pitchFamily="34" charset="-120"/>
+              </a:rPr>
+              <a:t> họ</a:t>
+            </a:r>
+            <a:r>
+              <a:rPr lang="en-US" sz="1950" dirty="0" spc="-6" kern="0">
+                <a:solidFill>
+                  <a:srgbClr val="C4C8D6"/>
+                </a:solidFill>
+                <a:latin typeface="Be Vietnam Pro" pitchFamily="34" charset="0"/>
+                <a:ea typeface="Be Vietnam Pro" pitchFamily="34" charset="-122"/>
+                <a:cs typeface="Be Vietnam Pro" pitchFamily="34" charset="-120"/>
+              </a:rPr>
+              <a:t> ngôn</a:t>
+            </a:r>
+            <a:r>
+              <a:rPr lang="en-US" sz="1950" dirty="0" spc="2" kern="0">
+                <a:solidFill>
+                  <a:srgbClr val="C4C8D6"/>
+                </a:solidFill>
+                <a:latin typeface="Be Vietnam Pro" pitchFamily="34" charset="0"/>
+                <a:ea typeface="Be Vietnam Pro" pitchFamily="34" charset="-122"/>
+                <a:cs typeface="Be Vietnam Pro" pitchFamily="34" charset="-120"/>
+              </a:rPr>
+              <a:t> ngữ</a:t>
+            </a:r>
+            <a:r>
+              <a:rPr lang="en-US" sz="1950" dirty="0" spc="0" kern="0">
+                <a:solidFill>
+                  <a:srgbClr val="C4C8D6"/>
+                </a:solidFill>
+                <a:latin typeface="Be Vietnam Pro" pitchFamily="34" charset="0"/>
+                <a:ea typeface="Be Vietnam Pro" pitchFamily="34" charset="-122"/>
+                <a:cs typeface="Be Vietnam Pro" pitchFamily="34" charset="-120"/>
+              </a:rPr>
+              <a:t> hàm</a:t>
+            </a:r>
+            <a:r>
+              <a:rPr lang="en-US" sz="1950" dirty="0" spc="-2" kern="0">
+                <a:solidFill>
+                  <a:srgbClr val="C4C8D6"/>
+                </a:solidFill>
+                <a:latin typeface="Be Vietnam Pro" pitchFamily="34" charset="0"/>
+                <a:ea typeface="Be Vietnam Pro" pitchFamily="34" charset="-122"/>
+                <a:cs typeface="Be Vietnam Pro" pitchFamily="34" charset="-120"/>
+              </a:rPr>
+              <a:t> ·</a:t>
+            </a:r>
+            <a:r>
+              <a:rPr lang="en-US" sz="1950" dirty="0" spc="6" kern="0">
+                <a:solidFill>
+                  <a:srgbClr val="C4C8D6"/>
+                </a:solidFill>
+                <a:latin typeface="Be Vietnam Pro" pitchFamily="34" charset="0"/>
+                <a:ea typeface="Be Vietnam Pro" pitchFamily="34" charset="-122"/>
+                <a:cs typeface="Be Vietnam Pro" pitchFamily="34" charset="-120"/>
+              </a:rPr>
+              <a:t> SQL:</a:t>
             </a:r>
             <a:r>
               <a:rPr lang="en-US" sz="1950" dirty="0" spc="-8" kern="0">

--- a/system-design-101/vi/lessons/sd-10-020/slides/sd-10-020.pptx
+++ b/system-design-101/vi/lessons/sd-10-020/slides/sd-10-020.pptx
@@ -15208,7 +15208,7 @@
               <a:buNone/>
             </a:pPr>
             <a:r>
-              <a:rPr lang="en-US" sz="2250" b="1" dirty="0" spc="-4" kern="0">
+              <a:rPr lang="en-US" sz="2250" b="1" dirty="0" spc="2" kern="0">
                 <a:solidFill>
                   <a:srgbClr val="14161C"/>
                 </a:solidFill>
@@ -15216,10 +15216,10 @@
                 <a:ea typeface="Be Vietnam Pro" pitchFamily="34" charset="-122"/>
                 <a:cs typeface="Be Vietnam Pro" pitchFamily="34" charset="-120"/>
               </a:rPr>
-              <a:t>Thay</a:t>
-            </a:r>
-            <a:r>
-              <a:rPr lang="en-US" sz="2250" b="1" dirty="0" spc="8" kern="0">
+              <a:t>Dữ liệu đến</a:t>
+            </a:r>
+            <a:r>
+              <a:rPr lang="en-US" sz="2250" b="1" dirty="0" spc="-2" kern="0">
                 <a:solidFill>
                   <a:srgbClr val="14161C"/>
                 </a:solidFill>
@@ -15227,10 +15227,10 @@
                 <a:ea typeface="Be Vietnam Pro" pitchFamily="34" charset="-122"/>
                 <a:cs typeface="Be Vietnam Pro" pitchFamily="34" charset="-120"/>
               </a:rPr>
-              <a:t> đổi</a:t>
-            </a:r>
-            <a:r>
-              <a:rPr lang="en-US" sz="2250" b="1" dirty="0" spc="-1" kern="0">
+              <a:t> theo</a:t>
+            </a:r>
+            <a:r>
+              <a:rPr lang="en-US" sz="2250" b="1" dirty="0" spc="5" kern="0">
                 <a:solidFill>
                   <a:srgbClr val="14161C"/>
                 </a:solidFill>
@@ -15238,10 +15238,10 @@
                 <a:ea typeface="Be Vietnam Pro" pitchFamily="34" charset="-122"/>
                 <a:cs typeface="Be Vietnam Pro" pitchFamily="34" charset="-120"/>
               </a:rPr>
-              <a:t> lan</a:t>
-            </a:r>
-            <a:r>
-              <a:rPr lang="en-US" sz="2250" b="1" dirty="0" spc="-11" kern="0">
+              <a:t> thời</a:t>
+            </a:r>
+            <a:r>
+              <a:rPr lang="en-US" sz="2250" b="1" dirty="0" spc="2" kern="0">
                 <a:solidFill>
                   <a:srgbClr val="14161C"/>
                 </a:solidFill>
@@ -15249,7 +15249,7 @@
                 <a:ea typeface="Be Vietnam Pro" pitchFamily="34" charset="-122"/>
                 <a:cs typeface="Be Vietnam Pro" pitchFamily="34" charset="-120"/>
               </a:rPr>
-              <a:t> truyền</a:t>
+              <a:t> gian</a:t>
             </a:r>
             <a:endParaRPr lang="en-US" sz="2250" dirty="0"/>
           </a:p>

--- a/system-design-101/vi/lessons/sd-10-020/slides/sd-10-020.pptx
+++ b/system-design-101/vi/lessons/sd-10-020/slides/sd-10-020.pptx
@@ -21911,6 +21911,17 @@
               <a:t> các</a:t>
             </a:r>
             <a:r>
+              <a:rPr lang="en-US" sz="2700" dirty="0" spc="0" kern="0">
+                <a:solidFill>
+                  <a:srgbClr val="F3EEE3"/>
+                </a:solidFill>
+                <a:latin typeface="Be Vietnam Pro" pitchFamily="34" charset="0"/>
+                <a:ea typeface="Be Vietnam Pro" pitchFamily="34" charset="-122"/>
+                <a:cs typeface="Be Vietnam Pro" pitchFamily="34" charset="-120"/>
+              </a:rPr>
+              <a:t> hàm,</a:t>
+            </a:r>
+            <a:r>
               <a:rPr lang="en-US" sz="2700" dirty="0" spc="-1" kern="0">
                 <a:solidFill>
                   <a:srgbClr val="F3EEE3"/>
@@ -21919,7 +21930,29 @@
                 <a:ea typeface="Be Vietnam Pro" pitchFamily="34" charset="-122"/>
                 <a:cs typeface="Be Vietnam Pro" pitchFamily="34" charset="-120"/>
               </a:rPr>
-              <a:t> hàm chỉ</a:t>
+              <a:t> lý</a:t>
+            </a:r>
+            <a:r>
+              <a:rPr lang="en-US" sz="2700" dirty="0" spc="7" kern="0">
+                <a:solidFill>
+                  <a:srgbClr val="F3EEE3"/>
+                </a:solidFill>
+                <a:latin typeface="Be Vietnam Pro" pitchFamily="34" charset="0"/>
+                <a:ea typeface="Be Vietnam Pro" pitchFamily="34" charset="-122"/>
+                <a:cs typeface="Be Vietnam Pro" pitchFamily="34" charset="-120"/>
+              </a:rPr>
+              <a:t> tưởng</a:t>
+            </a:r>
+            <a:r>
+              <a:rPr lang="en-US" sz="2700" dirty="0" spc="-1" kern="0">
+                <a:solidFill>
+                  <a:srgbClr val="F3EEE3"/>
+                </a:solidFill>
+                <a:latin typeface="Be Vietnam Pro" pitchFamily="34" charset="0"/>
+                <a:ea typeface="Be Vietnam Pro" pitchFamily="34" charset="-122"/>
+                <a:cs typeface="Be Vietnam Pro" pitchFamily="34" charset="-120"/>
+              </a:rPr>
+              <a:t> chỉ</a:t>
             </a:r>
             <a:r>
               <a:rPr lang="en-US" sz="2700" dirty="0" spc="-2" kern="0">
@@ -22555,7 +22588,7 @@
               <a:t> thành</a:t>
             </a:r>
             <a:r>
-              <a:rPr lang="en-US" sz="2250" dirty="0" spc="-1" kern="0">
+              <a:rPr lang="en-US" sz="2250" dirty="0" spc="-2" kern="0">
                 <a:solidFill>
                   <a:srgbClr val="C4C8D6"/>
                 </a:solidFill>
@@ -22563,10 +22596,10 @@
                 <a:ea typeface="Be Vietnam Pro" pitchFamily="34" charset="-122"/>
                 <a:cs typeface="Be Vietnam Pro" pitchFamily="34" charset="-120"/>
               </a:rPr>
-              <a:t> hàm</a:t>
-            </a:r>
-            <a:r>
-              <a:rPr lang="en-US" sz="2250" dirty="0" spc="0" kern="0">
+              <a:t> hàm,</a:t>
+            </a:r>
+            <a:r>
+              <a:rPr lang="en-US" sz="2250" dirty="0" spc="1" kern="0">
                 <a:solidFill>
                   <a:srgbClr val="C4C8D6"/>
                 </a:solidFill>
@@ -22574,7 +22607,29 @@
                 <a:ea typeface="Be Vietnam Pro" pitchFamily="34" charset="-122"/>
                 <a:cs typeface="Be Vietnam Pro" pitchFamily="34" charset="-120"/>
               </a:rPr>
-              <a:t> nhận</a:t>
+              <a:t> lý</a:t>
+            </a:r>
+            <a:r>
+              <a:rPr lang="en-US" sz="2250" dirty="0" spc="6" kern="0">
+                <a:solidFill>
+                  <a:srgbClr val="C4C8D6"/>
+                </a:solidFill>
+                <a:latin typeface="Be Vietnam Pro" pitchFamily="34" charset="0"/>
+                <a:ea typeface="Be Vietnam Pro" pitchFamily="34" charset="-122"/>
+                <a:cs typeface="Be Vietnam Pro" pitchFamily="34" charset="-120"/>
+              </a:rPr>
+              <a:t> tưởng</a:t>
+            </a:r>
+            <a:r>
+              <a:rPr lang="en-US" sz="2250" dirty="0" spc="1" kern="0">
+                <a:solidFill>
+                  <a:srgbClr val="C4C8D6"/>
+                </a:solidFill>
+                <a:latin typeface="Be Vietnam Pro" pitchFamily="34" charset="0"/>
+                <a:ea typeface="Be Vietnam Pro" pitchFamily="34" charset="-122"/>
+                <a:cs typeface="Be Vietnam Pro" pitchFamily="34" charset="-120"/>
+              </a:rPr>
+              <a:t> chỉ nhận</a:t>
             </a:r>
             <a:r>
               <a:rPr lang="en-US" sz="2250" dirty="0" spc="-12" kern="0">
@@ -22599,7 +22654,7 @@
               <a:t> trả</a:t>
             </a:r>
             <a:r>
-              <a:rPr lang="en-US" sz="2250" dirty="0" spc="-22" kern="0">
+              <a:rPr lang="en-US" sz="2250" dirty="0" spc="-23" kern="0">
                 <a:solidFill>
                   <a:srgbClr val="C4C8D6"/>
                 </a:solidFill>

--- a/system-design-101/vi/lessons/sd-10-020/slides/sd-10-020.pptx
+++ b/system-design-101/vi/lessons/sd-10-020/slides/sd-10-020.pptx
@@ -2885,7 +2885,7 @@
               <a:buNone/>
             </a:pPr>
             <a:r>
-              <a:rPr lang="en-US" sz="5700" dirty="0" spc="-5" kern="0">
+              <a:rPr lang="en-US" sz="5700" dirty="0" spc="1" kern="0">
                 <a:solidFill>
                   <a:srgbClr val="F3EEE3"/>
                 </a:solidFill>
@@ -2893,7 +2893,7 @@
                 <a:ea typeface="Bricolage Grotesque ExtraBold" pitchFamily="34" charset="-122"/>
                 <a:cs typeface="Bricolage Grotesque ExtraBold" pitchFamily="34" charset="-120"/>
               </a:rPr>
-              <a:t>3</a:t>
+              <a:t>7</a:t>
             </a:r>
             <a:endParaRPr lang="en-US" sz="5700" dirty="0"/>
           </a:p>

--- a/system-design-101/vi/lessons/sd-10-020/slides/sd-10-020.pptx
+++ b/system-design-101/vi/lessons/sd-10-020/slides/sd-10-020.pptx
@@ -9824,7 +9824,40 @@
                 <a:ea typeface="Be Vietnam Pro" pitchFamily="34" charset="-122"/>
                 <a:cs typeface="Be Vietnam Pro" pitchFamily="34" charset="-120"/>
               </a:rPr>
-              <a:t> hàm:</a:t>
+              <a:t> hàm;</a:t>
+            </a:r>
+            <a:r>
+              <a:rPr lang="en-US" sz="2400" dirty="0" spc="1" kern="0">
+                <a:solidFill>
+                  <a:srgbClr val="C4C8D6"/>
+                </a:solidFill>
+                <a:latin typeface="Be Vietnam Pro" pitchFamily="34" charset="0"/>
+                <a:ea typeface="Be Vietnam Pro" pitchFamily="34" charset="-122"/>
+                <a:cs typeface="Be Vietnam Pro" pitchFamily="34" charset="-120"/>
+              </a:rPr>
+              <a:t> lý</a:t>
+            </a:r>
+            <a:r>
+              <a:rPr lang="en-US" sz="2400" dirty="0" spc="7" kern="0">
+                <a:solidFill>
+                  <a:srgbClr val="C4C8D6"/>
+                </a:solidFill>
+                <a:latin typeface="Be Vietnam Pro" pitchFamily="34" charset="0"/>
+                <a:ea typeface="Be Vietnam Pro" pitchFamily="34" charset="-122"/>
+                <a:cs typeface="Be Vietnam Pro" pitchFamily="34" charset="-120"/>
+              </a:rPr>
+              <a:t> tưởng</a:t>
+            </a:r>
+            <a:r>
+              <a:rPr lang="en-US" sz="2400" dirty="0" spc="0" kern="0">
+                <a:solidFill>
+                  <a:srgbClr val="C4C8D6"/>
+                </a:solidFill>
+                <a:latin typeface="Be Vietnam Pro" pitchFamily="34" charset="0"/>
+                <a:ea typeface="Be Vietnam Pro" pitchFamily="34" charset="-122"/>
+                <a:cs typeface="Be Vietnam Pro" pitchFamily="34" charset="-120"/>
+              </a:rPr>
+              <a:t> chỉ</a:t>
             </a:r>
             <a:r>
               <a:rPr lang="en-US" sz="2400" dirty="0" spc="1" kern="0">
